--- a/BioSync_Presentation.pptx
+++ b/BioSync_Presentation.pptx
@@ -16,6 +16,8 @@
     <p:sldId id="264" r:id="rId15"/>
     <p:sldId id="265" r:id="rId16"/>
     <p:sldId id="266" r:id="rId17"/>
+    <p:sldId id="267" r:id="rId18"/>
+    <p:sldId id="268" r:id="rId19"/>
   </p:sldIdLst>
   <p:sldSz cx="12188952" cy="6858000" type="screen4x3"/>
   <p:notesSz cx="6858000" cy="9144000"/>
@@ -3453,7 +3455,7 @@
                   <a:srgbClr val="FFFFFF"/>
                 </a:solidFill>
               </a:rPr>
-              <a:t>Next Steps</a:t>
+              <a:t>Multi-Model Comparison (Reach Goal)</a:t>
             </a:r>
           </a:p>
         </p:txBody>
@@ -3487,7 +3489,7 @@
                   <a:srgbClr val="CCFFCC"/>
                 </a:solidFill>
               </a:rPr>
-              <a:t>Where Bio-Sync goes from here</a:t>
+              <a:t>Bio-Sync pipeline run with Claude Haiku, Claude Sonnet, and GPT-4o — 10 profiles each</a:t>
             </a:r>
           </a:p>
         </p:txBody>
@@ -3500,19 +3502,17 @@
         </p:nvSpPr>
         <p:spPr>
           <a:xfrm>
-            <a:off x="457200" y="1600200"/>
-            <a:ext cx="5120640" cy="1325880"/>
-          </a:xfrm>
-          <a:prstGeom prst="rect">
-            <a:avLst/>
-          </a:prstGeom>
-          <a:solidFill>
-            <a:srgbClr val="FFFFFF"/>
-          </a:solidFill>
-          <a:ln w="19050">
-            <a:solidFill>
-              <a:srgbClr val="2E8648"/>
-            </a:solidFill>
+            <a:off x="365760" y="1600200"/>
+            <a:ext cx="2103120" cy="347472"/>
+          </a:xfrm>
+          <a:prstGeom prst="rect">
+            <a:avLst/>
+          </a:prstGeom>
+          <a:solidFill>
+            <a:srgbClr val="2E8648"/>
+          </a:solidFill>
+          <a:ln>
+            <a:noFill/>
           </a:ln>
         </p:spPr>
         <p:style>
@@ -3545,87 +3545,51 @@
         </p:nvSpPr>
         <p:spPr>
           <a:xfrm>
-            <a:off x="594360" y="1673352"/>
-            <a:ext cx="4846320" cy="320040"/>
-          </a:xfrm>
-          <a:prstGeom prst="rect">
-            <a:avLst/>
-          </a:prstGeom>
-          <a:noFill/>
-        </p:spPr>
-        <p:txBody>
-          <a:bodyPr wrap="square">
-            <a:spAutoFit/>
-          </a:bodyPr>
-          <a:lstStyle/>
-          <a:p>
-            <a:pPr algn="l"/>
-            <a:r>
-              <a:rPr sz="1400" b="1" i="0">
-                <a:solidFill>
-                  <a:srgbClr val="2E8648"/>
-                </a:solidFill>
-              </a:rPr>
-              <a:t>1. Multi-Turn Revision Dialogue</a:t>
-            </a:r>
-          </a:p>
-        </p:txBody>
-      </p:sp>
-      <p:sp>
-        <p:nvSpPr>
-          <p:cNvPr id="8" name="TextBox 7"/>
-          <p:cNvSpPr txBox="1"/>
-          <p:nvPr/>
-        </p:nvSpPr>
-        <p:spPr>
-          <a:xfrm>
-            <a:off x="594360" y="2011680"/>
-            <a:ext cx="4846320" cy="822960"/>
-          </a:xfrm>
-          <a:prstGeom prst="rect">
-            <a:avLst/>
-          </a:prstGeom>
-          <a:noFill/>
-        </p:spPr>
-        <p:txBody>
-          <a:bodyPr wrap="square">
-            <a:spAutoFit/>
-          </a:bodyPr>
-          <a:lstStyle/>
-          <a:p>
-            <a:pPr algn="l"/>
-            <a:r>
-              <a:rPr sz="1200" b="0" i="0">
-                <a:solidFill>
-                  <a:srgbClr val="1A1A2E"/>
-                </a:solidFill>
-              </a:rPr>
-              <a:t>User revision is implemented (one round). Next: full multi-turn dialogue — "I hate olives" → revised plan → "also make breakfast cheaper" → revised again.</a:t>
-            </a:r>
-          </a:p>
-        </p:txBody>
-      </p:sp>
-      <p:sp>
-        <p:nvSpPr>
-          <p:cNvPr id="9" name="Rectangle 8"/>
+            <a:off x="411480" y="1636776"/>
+            <a:ext cx="2011679" cy="274320"/>
+          </a:xfrm>
+          <a:prstGeom prst="rect">
+            <a:avLst/>
+          </a:prstGeom>
+          <a:noFill/>
+        </p:spPr>
+        <p:txBody>
+          <a:bodyPr wrap="square">
+            <a:spAutoFit/>
+          </a:bodyPr>
+          <a:lstStyle/>
+          <a:p>
+            <a:pPr algn="ctr"/>
+            <a:r>
+              <a:rPr sz="1200" b="1" i="0">
+                <a:solidFill>
+                  <a:srgbClr val="FFFFFF"/>
+                </a:solidFill>
+              </a:rPr>
+              <a:t>Model</a:t>
+            </a:r>
+          </a:p>
+        </p:txBody>
+      </p:sp>
+      <p:sp>
+        <p:nvSpPr>
+          <p:cNvPr id="8" name="Rectangle 7"/>
           <p:cNvSpPr/>
           <p:nvPr/>
         </p:nvSpPr>
         <p:spPr>
           <a:xfrm>
-            <a:off x="6400800" y="1600200"/>
-            <a:ext cx="5120640" cy="1325880"/>
-          </a:xfrm>
-          <a:prstGeom prst="rect">
-            <a:avLst/>
-          </a:prstGeom>
-          <a:solidFill>
-            <a:srgbClr val="FFFFFF"/>
-          </a:solidFill>
-          <a:ln w="19050">
-            <a:solidFill>
-              <a:srgbClr val="2E8648"/>
-            </a:solidFill>
+            <a:off x="2468879" y="1600200"/>
+            <a:ext cx="1828800" cy="347472"/>
+          </a:xfrm>
+          <a:prstGeom prst="rect">
+            <a:avLst/>
+          </a:prstGeom>
+          <a:solidFill>
+            <a:srgbClr val="2E8648"/>
+          </a:solidFill>
+          <a:ln>
+            <a:noFill/>
           </a:ln>
         </p:spPr>
         <p:style>
@@ -3652,93 +3616,57 @@
       </p:sp>
       <p:sp>
         <p:nvSpPr>
-          <p:cNvPr id="10" name="TextBox 9"/>
-          <p:cNvSpPr txBox="1"/>
-          <p:nvPr/>
-        </p:nvSpPr>
-        <p:spPr>
-          <a:xfrm>
-            <a:off x="6537960" y="1673352"/>
-            <a:ext cx="4846320" cy="320040"/>
-          </a:xfrm>
-          <a:prstGeom prst="rect">
-            <a:avLst/>
-          </a:prstGeom>
-          <a:noFill/>
-        </p:spPr>
-        <p:txBody>
-          <a:bodyPr wrap="square">
-            <a:spAutoFit/>
-          </a:bodyPr>
-          <a:lstStyle/>
-          <a:p>
-            <a:pPr algn="l"/>
-            <a:r>
-              <a:rPr sz="1400" b="1" i="0">
-                <a:solidFill>
-                  <a:srgbClr val="2E8648"/>
-                </a:solidFill>
-              </a:rPr>
-              <a:t>2. Clarification During Wait</a:t>
-            </a:r>
-          </a:p>
-        </p:txBody>
-      </p:sp>
-      <p:sp>
-        <p:nvSpPr>
-          <p:cNvPr id="11" name="TextBox 10"/>
-          <p:cNvSpPr txBox="1"/>
-          <p:nvPr/>
-        </p:nvSpPr>
-        <p:spPr>
-          <a:xfrm>
-            <a:off x="6537960" y="2011680"/>
-            <a:ext cx="4846320" cy="822960"/>
-          </a:xfrm>
-          <a:prstGeom prst="rect">
-            <a:avLst/>
-          </a:prstGeom>
-          <a:noFill/>
-        </p:spPr>
-        <p:txBody>
-          <a:bodyPr wrap="square">
-            <a:spAutoFit/>
-          </a:bodyPr>
-          <a:lstStyle/>
-          <a:p>
-            <a:pPr algn="l"/>
-            <a:r>
-              <a:rPr sz="1200" b="0" i="0">
-                <a:solidFill>
-                  <a:srgbClr val="1A1A2E"/>
-                </a:solidFill>
-              </a:rPr>
-              <a:t>Ask the user a disambiguation question while the plan generates: "Is 'basmati brown rice' the same as 'brown rice' for your purposes?"</a:t>
-            </a:r>
-          </a:p>
-        </p:txBody>
-      </p:sp>
-      <p:sp>
-        <p:nvSpPr>
-          <p:cNvPr id="12" name="Rectangle 11"/>
+          <p:cNvPr id="9" name="TextBox 8"/>
+          <p:cNvSpPr txBox="1"/>
+          <p:nvPr/>
+        </p:nvSpPr>
+        <p:spPr>
+          <a:xfrm>
+            <a:off x="2514599" y="1636776"/>
+            <a:ext cx="1737360" cy="274320"/>
+          </a:xfrm>
+          <a:prstGeom prst="rect">
+            <a:avLst/>
+          </a:prstGeom>
+          <a:noFill/>
+        </p:spPr>
+        <p:txBody>
+          <a:bodyPr wrap="square">
+            <a:spAutoFit/>
+          </a:bodyPr>
+          <a:lstStyle/>
+          <a:p>
+            <a:pPr algn="ctr"/>
+            <a:r>
+              <a:rPr sz="1200" b="1" i="0">
+                <a:solidFill>
+                  <a:srgbClr val="FFFFFF"/>
+                </a:solidFill>
+              </a:rPr>
+              <a:t>Provider</a:t>
+            </a:r>
+          </a:p>
+        </p:txBody>
+      </p:sp>
+      <p:sp>
+        <p:nvSpPr>
+          <p:cNvPr id="10" name="Rectangle 9"/>
           <p:cNvSpPr/>
           <p:nvPr/>
         </p:nvSpPr>
         <p:spPr>
           <a:xfrm>
-            <a:off x="457200" y="3108960"/>
-            <a:ext cx="5120640" cy="1325880"/>
-          </a:xfrm>
-          <a:prstGeom prst="rect">
-            <a:avLst/>
-          </a:prstGeom>
-          <a:solidFill>
-            <a:srgbClr val="FFFFFF"/>
-          </a:solidFill>
-          <a:ln w="19050">
-            <a:solidFill>
-              <a:srgbClr val="2E8648"/>
-            </a:solidFill>
+            <a:off x="4297679" y="1600200"/>
+            <a:ext cx="1828800" cy="347472"/>
+          </a:xfrm>
+          <a:prstGeom prst="rect">
+            <a:avLst/>
+          </a:prstGeom>
+          <a:solidFill>
+            <a:srgbClr val="2E8648"/>
+          </a:solidFill>
+          <a:ln>
+            <a:noFill/>
           </a:ln>
         </p:spPr>
         <p:style>
@@ -3765,93 +3693,57 @@
       </p:sp>
       <p:sp>
         <p:nvSpPr>
-          <p:cNvPr id="13" name="TextBox 12"/>
-          <p:cNvSpPr txBox="1"/>
-          <p:nvPr/>
-        </p:nvSpPr>
-        <p:spPr>
-          <a:xfrm>
-            <a:off x="594360" y="3182112"/>
-            <a:ext cx="4846320" cy="320040"/>
-          </a:xfrm>
-          <a:prstGeom prst="rect">
-            <a:avLst/>
-          </a:prstGeom>
-          <a:noFill/>
-        </p:spPr>
-        <p:txBody>
-          <a:bodyPr wrap="square">
-            <a:spAutoFit/>
-          </a:bodyPr>
-          <a:lstStyle/>
-          <a:p>
-            <a:pPr algn="l"/>
-            <a:r>
-              <a:rPr sz="1400" b="1" i="0">
-                <a:solidFill>
-                  <a:srgbClr val="2E8648"/>
-                </a:solidFill>
-              </a:rPr>
-              <a:t>3. Memory Across Sessions</a:t>
-            </a:r>
-          </a:p>
-        </p:txBody>
-      </p:sp>
-      <p:sp>
-        <p:nvSpPr>
-          <p:cNvPr id="14" name="TextBox 13"/>
-          <p:cNvSpPr txBox="1"/>
-          <p:nvPr/>
-        </p:nvSpPr>
-        <p:spPr>
-          <a:xfrm>
-            <a:off x="594360" y="3520440"/>
-            <a:ext cx="4846320" cy="822960"/>
-          </a:xfrm>
-          <a:prstGeom prst="rect">
-            <a:avLst/>
-          </a:prstGeom>
-          <a:noFill/>
-        </p:spPr>
-        <p:txBody>
-          <a:bodyPr wrap="square">
-            <a:spAutoFit/>
-          </a:bodyPr>
-          <a:lstStyle/>
-          <a:p>
-            <a:pPr algn="l"/>
-            <a:r>
-              <a:rPr sz="1200" b="0" i="0">
-                <a:solidFill>
-                  <a:srgbClr val="1A1A2E"/>
-                </a:solidFill>
-              </a:rPr>
-              <a:t>Track what you've eaten before. Enforce variety across days and weeks, not just within a single plan. Store preferences persistently.</a:t>
-            </a:r>
-          </a:p>
-        </p:txBody>
-      </p:sp>
-      <p:sp>
-        <p:nvSpPr>
-          <p:cNvPr id="15" name="Rectangle 14"/>
+          <p:cNvPr id="11" name="TextBox 10"/>
+          <p:cNvSpPr txBox="1"/>
+          <p:nvPr/>
+        </p:nvSpPr>
+        <p:spPr>
+          <a:xfrm>
+            <a:off x="4343399" y="1636776"/>
+            <a:ext cx="1737360" cy="274320"/>
+          </a:xfrm>
+          <a:prstGeom prst="rect">
+            <a:avLst/>
+          </a:prstGeom>
+          <a:noFill/>
+        </p:spPr>
+        <p:txBody>
+          <a:bodyPr wrap="square">
+            <a:spAutoFit/>
+          </a:bodyPr>
+          <a:lstStyle/>
+          <a:p>
+            <a:pPr algn="ctr"/>
+            <a:r>
+              <a:rPr sz="1200" b="1" i="0">
+                <a:solidFill>
+                  <a:srgbClr val="FFFFFF"/>
+                </a:solidFill>
+              </a:rPr>
+              <a:t>Macro Error</a:t>
+            </a:r>
+          </a:p>
+        </p:txBody>
+      </p:sp>
+      <p:sp>
+        <p:nvSpPr>
+          <p:cNvPr id="12" name="Rectangle 11"/>
           <p:cNvSpPr/>
           <p:nvPr/>
         </p:nvSpPr>
         <p:spPr>
           <a:xfrm>
-            <a:off x="6400800" y="3108960"/>
-            <a:ext cx="5120640" cy="1325880"/>
-          </a:xfrm>
-          <a:prstGeom prst="rect">
-            <a:avLst/>
-          </a:prstGeom>
-          <a:solidFill>
-            <a:srgbClr val="FFFFFF"/>
-          </a:solidFill>
-          <a:ln w="19050">
-            <a:solidFill>
-              <a:srgbClr val="2E8648"/>
-            </a:solidFill>
+            <a:off x="6126479" y="1600200"/>
+            <a:ext cx="2286000" cy="347472"/>
+          </a:xfrm>
+          <a:prstGeom prst="rect">
+            <a:avLst/>
+          </a:prstGeom>
+          <a:solidFill>
+            <a:srgbClr val="2E8648"/>
+          </a:solidFill>
+          <a:ln>
+            <a:noFill/>
           </a:ln>
         </p:spPr>
         <p:style>
@@ -3878,93 +3770,57 @@
       </p:sp>
       <p:sp>
         <p:nvSpPr>
-          <p:cNvPr id="16" name="TextBox 15"/>
-          <p:cNvSpPr txBox="1"/>
-          <p:nvPr/>
-        </p:nvSpPr>
-        <p:spPr>
-          <a:xfrm>
-            <a:off x="6537960" y="3182112"/>
-            <a:ext cx="4846320" cy="320040"/>
-          </a:xfrm>
-          <a:prstGeom prst="rect">
-            <a:avLst/>
-          </a:prstGeom>
-          <a:noFill/>
-        </p:spPr>
-        <p:txBody>
-          <a:bodyPr wrap="square">
-            <a:spAutoFit/>
-          </a:bodyPr>
-          <a:lstStyle/>
-          <a:p>
-            <a:pPr algn="l"/>
-            <a:r>
-              <a:rPr sz="1400" b="1" i="0">
-                <a:solidFill>
-                  <a:srgbClr val="2E8648"/>
-                </a:solidFill>
-              </a:rPr>
-              <a:t>4. Richer Anti-Example Prompting</a:t>
-            </a:r>
-          </a:p>
-        </p:txBody>
-      </p:sp>
-      <p:sp>
-        <p:nvSpPr>
-          <p:cNvPr id="17" name="TextBox 16"/>
-          <p:cNvSpPr txBox="1"/>
-          <p:nvPr/>
-        </p:nvSpPr>
-        <p:spPr>
-          <a:xfrm>
-            <a:off x="6537960" y="3520440"/>
-            <a:ext cx="4846320" cy="822960"/>
-          </a:xfrm>
-          <a:prstGeom prst="rect">
-            <a:avLst/>
-          </a:prstGeom>
-          <a:noFill/>
-        </p:spPr>
-        <p:txBody>
-          <a:bodyPr wrap="square">
-            <a:spAutoFit/>
-          </a:bodyPr>
-          <a:lstStyle/>
-          <a:p>
-            <a:pPr algn="l"/>
-            <a:r>
-              <a:rPr sz="1200" b="0" i="0">
-                <a:solidFill>
-                  <a:srgbClr val="1A1A2E"/>
-                </a:solidFill>
-              </a:rPr>
-              <a:t>Currently the failing plan JSON is passed back to the Planner. Next: pass a structured summary of which specific patterns failed for richer revision signal.</a:t>
-            </a:r>
-          </a:p>
-        </p:txBody>
-      </p:sp>
-      <p:sp>
-        <p:nvSpPr>
-          <p:cNvPr id="18" name="Rectangle 17"/>
+          <p:cNvPr id="13" name="TextBox 12"/>
+          <p:cNvSpPr txBox="1"/>
+          <p:nvPr/>
+        </p:nvSpPr>
+        <p:spPr>
+          <a:xfrm>
+            <a:off x="6172199" y="1636776"/>
+            <a:ext cx="2194560" cy="274320"/>
+          </a:xfrm>
+          <a:prstGeom prst="rect">
+            <a:avLst/>
+          </a:prstGeom>
+          <a:noFill/>
+        </p:spPr>
+        <p:txBody>
+          <a:bodyPr wrap="square">
+            <a:spAutoFit/>
+          </a:bodyPr>
+          <a:lstStyle/>
+          <a:p>
+            <a:pPr algn="ctr"/>
+            <a:r>
+              <a:rPr sz="1200" b="1" i="0">
+                <a:solidFill>
+                  <a:srgbClr val="FFFFFF"/>
+                </a:solidFill>
+              </a:rPr>
+              <a:t>Budget Compliance</a:t>
+            </a:r>
+          </a:p>
+        </p:txBody>
+      </p:sp>
+      <p:sp>
+        <p:nvSpPr>
+          <p:cNvPr id="14" name="Rectangle 13"/>
           <p:cNvSpPr/>
           <p:nvPr/>
         </p:nvSpPr>
         <p:spPr>
           <a:xfrm>
-            <a:off x="3429000" y="4617720"/>
-            <a:ext cx="5120640" cy="1325880"/>
-          </a:xfrm>
-          <a:prstGeom prst="rect">
-            <a:avLst/>
-          </a:prstGeom>
-          <a:solidFill>
-            <a:srgbClr val="FFFFFF"/>
-          </a:solidFill>
-          <a:ln w="19050">
-            <a:solidFill>
-              <a:srgbClr val="2E8648"/>
-            </a:solidFill>
+            <a:off x="8412480" y="1600200"/>
+            <a:ext cx="1554480" cy="347472"/>
+          </a:xfrm>
+          <a:prstGeom prst="rect">
+            <a:avLst/>
+          </a:prstGeom>
+          <a:solidFill>
+            <a:srgbClr val="2E8648"/>
+          </a:solidFill>
+          <a:ln>
+            <a:noFill/>
           </a:ln>
         </p:spPr>
         <p:style>
@@ -3991,14 +3847,1547 @@
       </p:sp>
       <p:sp>
         <p:nvSpPr>
+          <p:cNvPr id="15" name="TextBox 14"/>
+          <p:cNvSpPr txBox="1"/>
+          <p:nvPr/>
+        </p:nvSpPr>
+        <p:spPr>
+          <a:xfrm>
+            <a:off x="8458200" y="1636776"/>
+            <a:ext cx="1463039" cy="274320"/>
+          </a:xfrm>
+          <a:prstGeom prst="rect">
+            <a:avLst/>
+          </a:prstGeom>
+          <a:noFill/>
+        </p:spPr>
+        <p:txBody>
+          <a:bodyPr wrap="square">
+            <a:spAutoFit/>
+          </a:bodyPr>
+          <a:lstStyle/>
+          <a:p>
+            <a:pPr algn="ctr"/>
+            <a:r>
+              <a:rPr sz="1200" b="1" i="0">
+                <a:solidFill>
+                  <a:srgbClr val="FFFFFF"/>
+                </a:solidFill>
+              </a:rPr>
+              <a:t>Pass Rate</a:t>
+            </a:r>
+          </a:p>
+        </p:txBody>
+      </p:sp>
+      <p:sp>
+        <p:nvSpPr>
+          <p:cNvPr id="16" name="Rectangle 15"/>
+          <p:cNvSpPr/>
+          <p:nvPr/>
+        </p:nvSpPr>
+        <p:spPr>
+          <a:xfrm>
+            <a:off x="9966959" y="1600200"/>
+            <a:ext cx="1554480" cy="347472"/>
+          </a:xfrm>
+          <a:prstGeom prst="rect">
+            <a:avLst/>
+          </a:prstGeom>
+          <a:solidFill>
+            <a:srgbClr val="2E8648"/>
+          </a:solidFill>
+          <a:ln>
+            <a:noFill/>
+          </a:ln>
+        </p:spPr>
+        <p:style>
+          <a:lnRef idx="1">
+            <a:schemeClr val="accent1"/>
+          </a:lnRef>
+          <a:fillRef idx="3">
+            <a:schemeClr val="accent1"/>
+          </a:fillRef>
+          <a:effectRef idx="2">
+            <a:schemeClr val="accent1"/>
+          </a:effectRef>
+          <a:fontRef idx="minor">
+            <a:schemeClr val="lt1"/>
+          </a:fontRef>
+        </p:style>
+        <p:txBody>
+          <a:bodyPr rtlCol="0" anchor="ctr"/>
+          <a:lstStyle/>
+          <a:p>
+            <a:pPr algn="ctr"/>
+          </a:p>
+        </p:txBody>
+      </p:sp>
+      <p:sp>
+        <p:nvSpPr>
+          <p:cNvPr id="17" name="TextBox 16"/>
+          <p:cNvSpPr txBox="1"/>
+          <p:nvPr/>
+        </p:nvSpPr>
+        <p:spPr>
+          <a:xfrm>
+            <a:off x="10012680" y="1636776"/>
+            <a:ext cx="1463039" cy="274320"/>
+          </a:xfrm>
+          <a:prstGeom prst="rect">
+            <a:avLst/>
+          </a:prstGeom>
+          <a:noFill/>
+        </p:spPr>
+        <p:txBody>
+          <a:bodyPr wrap="square">
+            <a:spAutoFit/>
+          </a:bodyPr>
+          <a:lstStyle/>
+          <a:p>
+            <a:pPr algn="ctr"/>
+            <a:r>
+              <a:rPr sz="1200" b="1" i="0">
+                <a:solidFill>
+                  <a:srgbClr val="FFFFFF"/>
+                </a:solidFill>
+              </a:rPr>
+              <a:t>Latency</a:t>
+            </a:r>
+          </a:p>
+        </p:txBody>
+      </p:sp>
+      <p:sp>
+        <p:nvSpPr>
+          <p:cNvPr id="18" name="Rectangle 17"/>
+          <p:cNvSpPr/>
+          <p:nvPr/>
+        </p:nvSpPr>
+        <p:spPr>
+          <a:xfrm>
+            <a:off x="365760" y="1947672"/>
+            <a:ext cx="2103120" cy="347472"/>
+          </a:xfrm>
+          <a:prstGeom prst="rect">
+            <a:avLst/>
+          </a:prstGeom>
+          <a:solidFill>
+            <a:srgbClr val="F4F9F4"/>
+          </a:solidFill>
+          <a:ln w="19050">
+            <a:solidFill>
+              <a:srgbClr val="CCCCCC"/>
+            </a:solidFill>
+          </a:ln>
+        </p:spPr>
+        <p:style>
+          <a:lnRef idx="1">
+            <a:schemeClr val="accent1"/>
+          </a:lnRef>
+          <a:fillRef idx="3">
+            <a:schemeClr val="accent1"/>
+          </a:fillRef>
+          <a:effectRef idx="2">
+            <a:schemeClr val="accent1"/>
+          </a:effectRef>
+          <a:fontRef idx="minor">
+            <a:schemeClr val="lt1"/>
+          </a:fontRef>
+        </p:style>
+        <p:txBody>
+          <a:bodyPr rtlCol="0" anchor="ctr"/>
+          <a:lstStyle/>
+          <a:p>
+            <a:pPr algn="ctr"/>
+          </a:p>
+        </p:txBody>
+      </p:sp>
+      <p:sp>
+        <p:nvSpPr>
           <p:cNvPr id="19" name="TextBox 18"/>
           <p:cNvSpPr txBox="1"/>
           <p:nvPr/>
         </p:nvSpPr>
         <p:spPr>
           <a:xfrm>
-            <a:off x="3566160" y="4690872"/>
-            <a:ext cx="4846320" cy="320040"/>
+            <a:off x="411480" y="1993391"/>
+            <a:ext cx="2011679" cy="256032"/>
+          </a:xfrm>
+          <a:prstGeom prst="rect">
+            <a:avLst/>
+          </a:prstGeom>
+          <a:noFill/>
+        </p:spPr>
+        <p:txBody>
+          <a:bodyPr wrap="square">
+            <a:spAutoFit/>
+          </a:bodyPr>
+          <a:lstStyle/>
+          <a:p>
+            <a:pPr algn="ctr"/>
+            <a:r>
+              <a:rPr sz="1200" b="0" i="0">
+                <a:solidFill>
+                  <a:srgbClr val="2E8648"/>
+                </a:solidFill>
+              </a:rPr>
+              <a:t>Claude Haiku</a:t>
+            </a:r>
+          </a:p>
+        </p:txBody>
+      </p:sp>
+      <p:sp>
+        <p:nvSpPr>
+          <p:cNvPr id="20" name="Rectangle 19"/>
+          <p:cNvSpPr/>
+          <p:nvPr/>
+        </p:nvSpPr>
+        <p:spPr>
+          <a:xfrm>
+            <a:off x="2468879" y="1947672"/>
+            <a:ext cx="1828800" cy="347472"/>
+          </a:xfrm>
+          <a:prstGeom prst="rect">
+            <a:avLst/>
+          </a:prstGeom>
+          <a:solidFill>
+            <a:srgbClr val="F4F9F4"/>
+          </a:solidFill>
+          <a:ln w="19050">
+            <a:solidFill>
+              <a:srgbClr val="CCCCCC"/>
+            </a:solidFill>
+          </a:ln>
+        </p:spPr>
+        <p:style>
+          <a:lnRef idx="1">
+            <a:schemeClr val="accent1"/>
+          </a:lnRef>
+          <a:fillRef idx="3">
+            <a:schemeClr val="accent1"/>
+          </a:fillRef>
+          <a:effectRef idx="2">
+            <a:schemeClr val="accent1"/>
+          </a:effectRef>
+          <a:fontRef idx="minor">
+            <a:schemeClr val="lt1"/>
+          </a:fontRef>
+        </p:style>
+        <p:txBody>
+          <a:bodyPr rtlCol="0" anchor="ctr"/>
+          <a:lstStyle/>
+          <a:p>
+            <a:pPr algn="ctr"/>
+          </a:p>
+        </p:txBody>
+      </p:sp>
+      <p:sp>
+        <p:nvSpPr>
+          <p:cNvPr id="21" name="TextBox 20"/>
+          <p:cNvSpPr txBox="1"/>
+          <p:nvPr/>
+        </p:nvSpPr>
+        <p:spPr>
+          <a:xfrm>
+            <a:off x="2514599" y="1993391"/>
+            <a:ext cx="1737360" cy="256032"/>
+          </a:xfrm>
+          <a:prstGeom prst="rect">
+            <a:avLst/>
+          </a:prstGeom>
+          <a:noFill/>
+        </p:spPr>
+        <p:txBody>
+          <a:bodyPr wrap="square">
+            <a:spAutoFit/>
+          </a:bodyPr>
+          <a:lstStyle/>
+          <a:p>
+            <a:pPr algn="ctr"/>
+            <a:r>
+              <a:rPr sz="1200" b="0" i="0">
+                <a:solidFill>
+                  <a:srgbClr val="1A1A2E"/>
+                </a:solidFill>
+              </a:rPr>
+              <a:t>Anthropic</a:t>
+            </a:r>
+          </a:p>
+        </p:txBody>
+      </p:sp>
+      <p:sp>
+        <p:nvSpPr>
+          <p:cNvPr id="22" name="Rectangle 21"/>
+          <p:cNvSpPr/>
+          <p:nvPr/>
+        </p:nvSpPr>
+        <p:spPr>
+          <a:xfrm>
+            <a:off x="4297679" y="1947672"/>
+            <a:ext cx="1828800" cy="347472"/>
+          </a:xfrm>
+          <a:prstGeom prst="rect">
+            <a:avLst/>
+          </a:prstGeom>
+          <a:solidFill>
+            <a:srgbClr val="F4F9F4"/>
+          </a:solidFill>
+          <a:ln w="19050">
+            <a:solidFill>
+              <a:srgbClr val="CCCCCC"/>
+            </a:solidFill>
+          </a:ln>
+        </p:spPr>
+        <p:style>
+          <a:lnRef idx="1">
+            <a:schemeClr val="accent1"/>
+          </a:lnRef>
+          <a:fillRef idx="3">
+            <a:schemeClr val="accent1"/>
+          </a:fillRef>
+          <a:effectRef idx="2">
+            <a:schemeClr val="accent1"/>
+          </a:effectRef>
+          <a:fontRef idx="minor">
+            <a:schemeClr val="lt1"/>
+          </a:fontRef>
+        </p:style>
+        <p:txBody>
+          <a:bodyPr rtlCol="0" anchor="ctr"/>
+          <a:lstStyle/>
+          <a:p>
+            <a:pPr algn="ctr"/>
+          </a:p>
+        </p:txBody>
+      </p:sp>
+      <p:sp>
+        <p:nvSpPr>
+          <p:cNvPr id="23" name="TextBox 22"/>
+          <p:cNvSpPr txBox="1"/>
+          <p:nvPr/>
+        </p:nvSpPr>
+        <p:spPr>
+          <a:xfrm>
+            <a:off x="4343399" y="1993391"/>
+            <a:ext cx="1737360" cy="256032"/>
+          </a:xfrm>
+          <a:prstGeom prst="rect">
+            <a:avLst/>
+          </a:prstGeom>
+          <a:noFill/>
+        </p:spPr>
+        <p:txBody>
+          <a:bodyPr wrap="square">
+            <a:spAutoFit/>
+          </a:bodyPr>
+          <a:lstStyle/>
+          <a:p>
+            <a:pPr algn="ctr"/>
+            <a:r>
+              <a:rPr sz="1200" b="0" i="0">
+                <a:solidFill>
+                  <a:srgbClr val="1A1A2E"/>
+                </a:solidFill>
+              </a:rPr>
+              <a:t>19.8%</a:t>
+            </a:r>
+          </a:p>
+        </p:txBody>
+      </p:sp>
+      <p:sp>
+        <p:nvSpPr>
+          <p:cNvPr id="24" name="Rectangle 23"/>
+          <p:cNvSpPr/>
+          <p:nvPr/>
+        </p:nvSpPr>
+        <p:spPr>
+          <a:xfrm>
+            <a:off x="6126479" y="1947672"/>
+            <a:ext cx="2286000" cy="347472"/>
+          </a:xfrm>
+          <a:prstGeom prst="rect">
+            <a:avLst/>
+          </a:prstGeom>
+          <a:solidFill>
+            <a:srgbClr val="F4F9F4"/>
+          </a:solidFill>
+          <a:ln w="19050">
+            <a:solidFill>
+              <a:srgbClr val="CCCCCC"/>
+            </a:solidFill>
+          </a:ln>
+        </p:spPr>
+        <p:style>
+          <a:lnRef idx="1">
+            <a:schemeClr val="accent1"/>
+          </a:lnRef>
+          <a:fillRef idx="3">
+            <a:schemeClr val="accent1"/>
+          </a:fillRef>
+          <a:effectRef idx="2">
+            <a:schemeClr val="accent1"/>
+          </a:effectRef>
+          <a:fontRef idx="minor">
+            <a:schemeClr val="lt1"/>
+          </a:fontRef>
+        </p:style>
+        <p:txBody>
+          <a:bodyPr rtlCol="0" anchor="ctr"/>
+          <a:lstStyle/>
+          <a:p>
+            <a:pPr algn="ctr"/>
+          </a:p>
+        </p:txBody>
+      </p:sp>
+      <p:sp>
+        <p:nvSpPr>
+          <p:cNvPr id="25" name="TextBox 24"/>
+          <p:cNvSpPr txBox="1"/>
+          <p:nvPr/>
+        </p:nvSpPr>
+        <p:spPr>
+          <a:xfrm>
+            <a:off x="6172199" y="1993391"/>
+            <a:ext cx="2194560" cy="256032"/>
+          </a:xfrm>
+          <a:prstGeom prst="rect">
+            <a:avLst/>
+          </a:prstGeom>
+          <a:noFill/>
+        </p:spPr>
+        <p:txBody>
+          <a:bodyPr wrap="square">
+            <a:spAutoFit/>
+          </a:bodyPr>
+          <a:lstStyle/>
+          <a:p>
+            <a:pPr algn="ctr"/>
+            <a:r>
+              <a:rPr sz="1200" b="0" i="0">
+                <a:solidFill>
+                  <a:srgbClr val="1A1A2E"/>
+                </a:solidFill>
+              </a:rPr>
+              <a:t>100%</a:t>
+            </a:r>
+          </a:p>
+        </p:txBody>
+      </p:sp>
+      <p:sp>
+        <p:nvSpPr>
+          <p:cNvPr id="26" name="Rectangle 25"/>
+          <p:cNvSpPr/>
+          <p:nvPr/>
+        </p:nvSpPr>
+        <p:spPr>
+          <a:xfrm>
+            <a:off x="8412480" y="1947672"/>
+            <a:ext cx="1554480" cy="347472"/>
+          </a:xfrm>
+          <a:prstGeom prst="rect">
+            <a:avLst/>
+          </a:prstGeom>
+          <a:solidFill>
+            <a:srgbClr val="F4F9F4"/>
+          </a:solidFill>
+          <a:ln w="19050">
+            <a:solidFill>
+              <a:srgbClr val="CCCCCC"/>
+            </a:solidFill>
+          </a:ln>
+        </p:spPr>
+        <p:style>
+          <a:lnRef idx="1">
+            <a:schemeClr val="accent1"/>
+          </a:lnRef>
+          <a:fillRef idx="3">
+            <a:schemeClr val="accent1"/>
+          </a:fillRef>
+          <a:effectRef idx="2">
+            <a:schemeClr val="accent1"/>
+          </a:effectRef>
+          <a:fontRef idx="minor">
+            <a:schemeClr val="lt1"/>
+          </a:fontRef>
+        </p:style>
+        <p:txBody>
+          <a:bodyPr rtlCol="0" anchor="ctr"/>
+          <a:lstStyle/>
+          <a:p>
+            <a:pPr algn="ctr"/>
+          </a:p>
+        </p:txBody>
+      </p:sp>
+      <p:sp>
+        <p:nvSpPr>
+          <p:cNvPr id="27" name="TextBox 26"/>
+          <p:cNvSpPr txBox="1"/>
+          <p:nvPr/>
+        </p:nvSpPr>
+        <p:spPr>
+          <a:xfrm>
+            <a:off x="8458200" y="1993391"/>
+            <a:ext cx="1463039" cy="256032"/>
+          </a:xfrm>
+          <a:prstGeom prst="rect">
+            <a:avLst/>
+          </a:prstGeom>
+          <a:noFill/>
+        </p:spPr>
+        <p:txBody>
+          <a:bodyPr wrap="square">
+            <a:spAutoFit/>
+          </a:bodyPr>
+          <a:lstStyle/>
+          <a:p>
+            <a:pPr algn="ctr"/>
+            <a:r>
+              <a:rPr sz="1200" b="0" i="0">
+                <a:solidFill>
+                  <a:srgbClr val="1A1A2E"/>
+                </a:solidFill>
+              </a:rPr>
+              <a:t>10%</a:t>
+            </a:r>
+          </a:p>
+        </p:txBody>
+      </p:sp>
+      <p:sp>
+        <p:nvSpPr>
+          <p:cNvPr id="28" name="Rectangle 27"/>
+          <p:cNvSpPr/>
+          <p:nvPr/>
+        </p:nvSpPr>
+        <p:spPr>
+          <a:xfrm>
+            <a:off x="9966959" y="1947672"/>
+            <a:ext cx="1554480" cy="347472"/>
+          </a:xfrm>
+          <a:prstGeom prst="rect">
+            <a:avLst/>
+          </a:prstGeom>
+          <a:solidFill>
+            <a:srgbClr val="F4F9F4"/>
+          </a:solidFill>
+          <a:ln w="19050">
+            <a:solidFill>
+              <a:srgbClr val="CCCCCC"/>
+            </a:solidFill>
+          </a:ln>
+        </p:spPr>
+        <p:style>
+          <a:lnRef idx="1">
+            <a:schemeClr val="accent1"/>
+          </a:lnRef>
+          <a:fillRef idx="3">
+            <a:schemeClr val="accent1"/>
+          </a:fillRef>
+          <a:effectRef idx="2">
+            <a:schemeClr val="accent1"/>
+          </a:effectRef>
+          <a:fontRef idx="minor">
+            <a:schemeClr val="lt1"/>
+          </a:fontRef>
+        </p:style>
+        <p:txBody>
+          <a:bodyPr rtlCol="0" anchor="ctr"/>
+          <a:lstStyle/>
+          <a:p>
+            <a:pPr algn="ctr"/>
+          </a:p>
+        </p:txBody>
+      </p:sp>
+      <p:sp>
+        <p:nvSpPr>
+          <p:cNvPr id="29" name="TextBox 28"/>
+          <p:cNvSpPr txBox="1"/>
+          <p:nvPr/>
+        </p:nvSpPr>
+        <p:spPr>
+          <a:xfrm>
+            <a:off x="10012680" y="1993391"/>
+            <a:ext cx="1463039" cy="256032"/>
+          </a:xfrm>
+          <a:prstGeom prst="rect">
+            <a:avLst/>
+          </a:prstGeom>
+          <a:noFill/>
+        </p:spPr>
+        <p:txBody>
+          <a:bodyPr wrap="square">
+            <a:spAutoFit/>
+          </a:bodyPr>
+          <a:lstStyle/>
+          <a:p>
+            <a:pPr algn="ctr"/>
+            <a:r>
+              <a:rPr sz="1200" b="0" i="0">
+                <a:solidFill>
+                  <a:srgbClr val="1A1A2E"/>
+                </a:solidFill>
+              </a:rPr>
+              <a:t>98 s</a:t>
+            </a:r>
+          </a:p>
+        </p:txBody>
+      </p:sp>
+      <p:sp>
+        <p:nvSpPr>
+          <p:cNvPr id="30" name="Rectangle 29"/>
+          <p:cNvSpPr/>
+          <p:nvPr/>
+        </p:nvSpPr>
+        <p:spPr>
+          <a:xfrm>
+            <a:off x="365760" y="2295144"/>
+            <a:ext cx="2103120" cy="347472"/>
+          </a:xfrm>
+          <a:prstGeom prst="rect">
+            <a:avLst/>
+          </a:prstGeom>
+          <a:solidFill>
+            <a:srgbClr val="FFFFFF"/>
+          </a:solidFill>
+          <a:ln w="19050">
+            <a:solidFill>
+              <a:srgbClr val="CCCCCC"/>
+            </a:solidFill>
+          </a:ln>
+        </p:spPr>
+        <p:style>
+          <a:lnRef idx="1">
+            <a:schemeClr val="accent1"/>
+          </a:lnRef>
+          <a:fillRef idx="3">
+            <a:schemeClr val="accent1"/>
+          </a:fillRef>
+          <a:effectRef idx="2">
+            <a:schemeClr val="accent1"/>
+          </a:effectRef>
+          <a:fontRef idx="minor">
+            <a:schemeClr val="lt1"/>
+          </a:fontRef>
+        </p:style>
+        <p:txBody>
+          <a:bodyPr rtlCol="0" anchor="ctr"/>
+          <a:lstStyle/>
+          <a:p>
+            <a:pPr algn="ctr"/>
+          </a:p>
+        </p:txBody>
+      </p:sp>
+      <p:sp>
+        <p:nvSpPr>
+          <p:cNvPr id="31" name="TextBox 30"/>
+          <p:cNvSpPr txBox="1"/>
+          <p:nvPr/>
+        </p:nvSpPr>
+        <p:spPr>
+          <a:xfrm>
+            <a:off x="411480" y="2340863"/>
+            <a:ext cx="2011679" cy="256032"/>
+          </a:xfrm>
+          <a:prstGeom prst="rect">
+            <a:avLst/>
+          </a:prstGeom>
+          <a:noFill/>
+        </p:spPr>
+        <p:txBody>
+          <a:bodyPr wrap="square">
+            <a:spAutoFit/>
+          </a:bodyPr>
+          <a:lstStyle/>
+          <a:p>
+            <a:pPr algn="ctr"/>
+            <a:r>
+              <a:rPr sz="1200" b="0" i="0">
+                <a:solidFill>
+                  <a:srgbClr val="1A1A2E"/>
+                </a:solidFill>
+              </a:rPr>
+              <a:t>Claude Sonnet</a:t>
+            </a:r>
+          </a:p>
+        </p:txBody>
+      </p:sp>
+      <p:sp>
+        <p:nvSpPr>
+          <p:cNvPr id="32" name="Rectangle 31"/>
+          <p:cNvSpPr/>
+          <p:nvPr/>
+        </p:nvSpPr>
+        <p:spPr>
+          <a:xfrm>
+            <a:off x="2468879" y="2295144"/>
+            <a:ext cx="1828800" cy="347472"/>
+          </a:xfrm>
+          <a:prstGeom prst="rect">
+            <a:avLst/>
+          </a:prstGeom>
+          <a:solidFill>
+            <a:srgbClr val="FFFFFF"/>
+          </a:solidFill>
+          <a:ln w="19050">
+            <a:solidFill>
+              <a:srgbClr val="CCCCCC"/>
+            </a:solidFill>
+          </a:ln>
+        </p:spPr>
+        <p:style>
+          <a:lnRef idx="1">
+            <a:schemeClr val="accent1"/>
+          </a:lnRef>
+          <a:fillRef idx="3">
+            <a:schemeClr val="accent1"/>
+          </a:fillRef>
+          <a:effectRef idx="2">
+            <a:schemeClr val="accent1"/>
+          </a:effectRef>
+          <a:fontRef idx="minor">
+            <a:schemeClr val="lt1"/>
+          </a:fontRef>
+        </p:style>
+        <p:txBody>
+          <a:bodyPr rtlCol="0" anchor="ctr"/>
+          <a:lstStyle/>
+          <a:p>
+            <a:pPr algn="ctr"/>
+          </a:p>
+        </p:txBody>
+      </p:sp>
+      <p:sp>
+        <p:nvSpPr>
+          <p:cNvPr id="33" name="TextBox 32"/>
+          <p:cNvSpPr txBox="1"/>
+          <p:nvPr/>
+        </p:nvSpPr>
+        <p:spPr>
+          <a:xfrm>
+            <a:off x="2514599" y="2340863"/>
+            <a:ext cx="1737360" cy="256032"/>
+          </a:xfrm>
+          <a:prstGeom prst="rect">
+            <a:avLst/>
+          </a:prstGeom>
+          <a:noFill/>
+        </p:spPr>
+        <p:txBody>
+          <a:bodyPr wrap="square">
+            <a:spAutoFit/>
+          </a:bodyPr>
+          <a:lstStyle/>
+          <a:p>
+            <a:pPr algn="ctr"/>
+            <a:r>
+              <a:rPr sz="1200" b="0" i="0">
+                <a:solidFill>
+                  <a:srgbClr val="1A1A2E"/>
+                </a:solidFill>
+              </a:rPr>
+              <a:t>Anthropic</a:t>
+            </a:r>
+          </a:p>
+        </p:txBody>
+      </p:sp>
+      <p:sp>
+        <p:nvSpPr>
+          <p:cNvPr id="34" name="Rectangle 33"/>
+          <p:cNvSpPr/>
+          <p:nvPr/>
+        </p:nvSpPr>
+        <p:spPr>
+          <a:xfrm>
+            <a:off x="4297679" y="2295144"/>
+            <a:ext cx="1828800" cy="347472"/>
+          </a:xfrm>
+          <a:prstGeom prst="rect">
+            <a:avLst/>
+          </a:prstGeom>
+          <a:solidFill>
+            <a:srgbClr val="FFFFFF"/>
+          </a:solidFill>
+          <a:ln w="19050">
+            <a:solidFill>
+              <a:srgbClr val="CCCCCC"/>
+            </a:solidFill>
+          </a:ln>
+        </p:spPr>
+        <p:style>
+          <a:lnRef idx="1">
+            <a:schemeClr val="accent1"/>
+          </a:lnRef>
+          <a:fillRef idx="3">
+            <a:schemeClr val="accent1"/>
+          </a:fillRef>
+          <a:effectRef idx="2">
+            <a:schemeClr val="accent1"/>
+          </a:effectRef>
+          <a:fontRef idx="minor">
+            <a:schemeClr val="lt1"/>
+          </a:fontRef>
+        </p:style>
+        <p:txBody>
+          <a:bodyPr rtlCol="0" anchor="ctr"/>
+          <a:lstStyle/>
+          <a:p>
+            <a:pPr algn="ctr"/>
+          </a:p>
+        </p:txBody>
+      </p:sp>
+      <p:sp>
+        <p:nvSpPr>
+          <p:cNvPr id="35" name="TextBox 34"/>
+          <p:cNvSpPr txBox="1"/>
+          <p:nvPr/>
+        </p:nvSpPr>
+        <p:spPr>
+          <a:xfrm>
+            <a:off x="4343399" y="2340863"/>
+            <a:ext cx="1737360" cy="256032"/>
+          </a:xfrm>
+          <a:prstGeom prst="rect">
+            <a:avLst/>
+          </a:prstGeom>
+          <a:noFill/>
+        </p:spPr>
+        <p:txBody>
+          <a:bodyPr wrap="square">
+            <a:spAutoFit/>
+          </a:bodyPr>
+          <a:lstStyle/>
+          <a:p>
+            <a:pPr algn="ctr"/>
+            <a:r>
+              <a:rPr sz="1200" b="0" i="0">
+                <a:solidFill>
+                  <a:srgbClr val="1A1A2E"/>
+                </a:solidFill>
+              </a:rPr>
+              <a:t>15.45%</a:t>
+            </a:r>
+          </a:p>
+        </p:txBody>
+      </p:sp>
+      <p:sp>
+        <p:nvSpPr>
+          <p:cNvPr id="36" name="Rectangle 35"/>
+          <p:cNvSpPr/>
+          <p:nvPr/>
+        </p:nvSpPr>
+        <p:spPr>
+          <a:xfrm>
+            <a:off x="6126479" y="2295144"/>
+            <a:ext cx="2286000" cy="347472"/>
+          </a:xfrm>
+          <a:prstGeom prst="rect">
+            <a:avLst/>
+          </a:prstGeom>
+          <a:solidFill>
+            <a:srgbClr val="FFFFFF"/>
+          </a:solidFill>
+          <a:ln w="19050">
+            <a:solidFill>
+              <a:srgbClr val="CCCCCC"/>
+            </a:solidFill>
+          </a:ln>
+        </p:spPr>
+        <p:style>
+          <a:lnRef idx="1">
+            <a:schemeClr val="accent1"/>
+          </a:lnRef>
+          <a:fillRef idx="3">
+            <a:schemeClr val="accent1"/>
+          </a:fillRef>
+          <a:effectRef idx="2">
+            <a:schemeClr val="accent1"/>
+          </a:effectRef>
+          <a:fontRef idx="minor">
+            <a:schemeClr val="lt1"/>
+          </a:fontRef>
+        </p:style>
+        <p:txBody>
+          <a:bodyPr rtlCol="0" anchor="ctr"/>
+          <a:lstStyle/>
+          <a:p>
+            <a:pPr algn="ctr"/>
+          </a:p>
+        </p:txBody>
+      </p:sp>
+      <p:sp>
+        <p:nvSpPr>
+          <p:cNvPr id="37" name="TextBox 36"/>
+          <p:cNvSpPr txBox="1"/>
+          <p:nvPr/>
+        </p:nvSpPr>
+        <p:spPr>
+          <a:xfrm>
+            <a:off x="6172199" y="2340863"/>
+            <a:ext cx="2194560" cy="256032"/>
+          </a:xfrm>
+          <a:prstGeom prst="rect">
+            <a:avLst/>
+          </a:prstGeom>
+          <a:noFill/>
+        </p:spPr>
+        <p:txBody>
+          <a:bodyPr wrap="square">
+            <a:spAutoFit/>
+          </a:bodyPr>
+          <a:lstStyle/>
+          <a:p>
+            <a:pPr algn="ctr"/>
+            <a:r>
+              <a:rPr sz="1200" b="0" i="0">
+                <a:solidFill>
+                  <a:srgbClr val="1A1A2E"/>
+                </a:solidFill>
+              </a:rPr>
+              <a:t>100%</a:t>
+            </a:r>
+          </a:p>
+        </p:txBody>
+      </p:sp>
+      <p:sp>
+        <p:nvSpPr>
+          <p:cNvPr id="38" name="Rectangle 37"/>
+          <p:cNvSpPr/>
+          <p:nvPr/>
+        </p:nvSpPr>
+        <p:spPr>
+          <a:xfrm>
+            <a:off x="8412480" y="2295144"/>
+            <a:ext cx="1554480" cy="347472"/>
+          </a:xfrm>
+          <a:prstGeom prst="rect">
+            <a:avLst/>
+          </a:prstGeom>
+          <a:solidFill>
+            <a:srgbClr val="FFFFFF"/>
+          </a:solidFill>
+          <a:ln w="19050">
+            <a:solidFill>
+              <a:srgbClr val="CCCCCC"/>
+            </a:solidFill>
+          </a:ln>
+        </p:spPr>
+        <p:style>
+          <a:lnRef idx="1">
+            <a:schemeClr val="accent1"/>
+          </a:lnRef>
+          <a:fillRef idx="3">
+            <a:schemeClr val="accent1"/>
+          </a:fillRef>
+          <a:effectRef idx="2">
+            <a:schemeClr val="accent1"/>
+          </a:effectRef>
+          <a:fontRef idx="minor">
+            <a:schemeClr val="lt1"/>
+          </a:fontRef>
+        </p:style>
+        <p:txBody>
+          <a:bodyPr rtlCol="0" anchor="ctr"/>
+          <a:lstStyle/>
+          <a:p>
+            <a:pPr algn="ctr"/>
+          </a:p>
+        </p:txBody>
+      </p:sp>
+      <p:sp>
+        <p:nvSpPr>
+          <p:cNvPr id="39" name="TextBox 38"/>
+          <p:cNvSpPr txBox="1"/>
+          <p:nvPr/>
+        </p:nvSpPr>
+        <p:spPr>
+          <a:xfrm>
+            <a:off x="8458200" y="2340863"/>
+            <a:ext cx="1463039" cy="256032"/>
+          </a:xfrm>
+          <a:prstGeom prst="rect">
+            <a:avLst/>
+          </a:prstGeom>
+          <a:noFill/>
+        </p:spPr>
+        <p:txBody>
+          <a:bodyPr wrap="square">
+            <a:spAutoFit/>
+          </a:bodyPr>
+          <a:lstStyle/>
+          <a:p>
+            <a:pPr algn="ctr"/>
+            <a:r>
+              <a:rPr sz="1200" b="0" i="0">
+                <a:solidFill>
+                  <a:srgbClr val="1A1A2E"/>
+                </a:solidFill>
+              </a:rPr>
+              <a:t>10%</a:t>
+            </a:r>
+          </a:p>
+        </p:txBody>
+      </p:sp>
+      <p:sp>
+        <p:nvSpPr>
+          <p:cNvPr id="40" name="Rectangle 39"/>
+          <p:cNvSpPr/>
+          <p:nvPr/>
+        </p:nvSpPr>
+        <p:spPr>
+          <a:xfrm>
+            <a:off x="9966959" y="2295144"/>
+            <a:ext cx="1554480" cy="347472"/>
+          </a:xfrm>
+          <a:prstGeom prst="rect">
+            <a:avLst/>
+          </a:prstGeom>
+          <a:solidFill>
+            <a:srgbClr val="FFFFFF"/>
+          </a:solidFill>
+          <a:ln w="19050">
+            <a:solidFill>
+              <a:srgbClr val="CCCCCC"/>
+            </a:solidFill>
+          </a:ln>
+        </p:spPr>
+        <p:style>
+          <a:lnRef idx="1">
+            <a:schemeClr val="accent1"/>
+          </a:lnRef>
+          <a:fillRef idx="3">
+            <a:schemeClr val="accent1"/>
+          </a:fillRef>
+          <a:effectRef idx="2">
+            <a:schemeClr val="accent1"/>
+          </a:effectRef>
+          <a:fontRef idx="minor">
+            <a:schemeClr val="lt1"/>
+          </a:fontRef>
+        </p:style>
+        <p:txBody>
+          <a:bodyPr rtlCol="0" anchor="ctr"/>
+          <a:lstStyle/>
+          <a:p>
+            <a:pPr algn="ctr"/>
+          </a:p>
+        </p:txBody>
+      </p:sp>
+      <p:sp>
+        <p:nvSpPr>
+          <p:cNvPr id="41" name="TextBox 40"/>
+          <p:cNvSpPr txBox="1"/>
+          <p:nvPr/>
+        </p:nvSpPr>
+        <p:spPr>
+          <a:xfrm>
+            <a:off x="10012680" y="2340863"/>
+            <a:ext cx="1463039" cy="256032"/>
+          </a:xfrm>
+          <a:prstGeom prst="rect">
+            <a:avLst/>
+          </a:prstGeom>
+          <a:noFill/>
+        </p:spPr>
+        <p:txBody>
+          <a:bodyPr wrap="square">
+            <a:spAutoFit/>
+          </a:bodyPr>
+          <a:lstStyle/>
+          <a:p>
+            <a:pPr algn="ctr"/>
+            <a:r>
+              <a:rPr sz="1200" b="0" i="0">
+                <a:solidFill>
+                  <a:srgbClr val="1A1A2E"/>
+                </a:solidFill>
+              </a:rPr>
+              <a:t>145 s</a:t>
+            </a:r>
+          </a:p>
+        </p:txBody>
+      </p:sp>
+      <p:sp>
+        <p:nvSpPr>
+          <p:cNvPr id="42" name="Rectangle 41"/>
+          <p:cNvSpPr/>
+          <p:nvPr/>
+        </p:nvSpPr>
+        <p:spPr>
+          <a:xfrm>
+            <a:off x="365760" y="2642616"/>
+            <a:ext cx="2103120" cy="347472"/>
+          </a:xfrm>
+          <a:prstGeom prst="rect">
+            <a:avLst/>
+          </a:prstGeom>
+          <a:solidFill>
+            <a:srgbClr val="F4F9F4"/>
+          </a:solidFill>
+          <a:ln w="19050">
+            <a:solidFill>
+              <a:srgbClr val="CCCCCC"/>
+            </a:solidFill>
+          </a:ln>
+        </p:spPr>
+        <p:style>
+          <a:lnRef idx="1">
+            <a:schemeClr val="accent1"/>
+          </a:lnRef>
+          <a:fillRef idx="3">
+            <a:schemeClr val="accent1"/>
+          </a:fillRef>
+          <a:effectRef idx="2">
+            <a:schemeClr val="accent1"/>
+          </a:effectRef>
+          <a:fontRef idx="minor">
+            <a:schemeClr val="lt1"/>
+          </a:fontRef>
+        </p:style>
+        <p:txBody>
+          <a:bodyPr rtlCol="0" anchor="ctr"/>
+          <a:lstStyle/>
+          <a:p>
+            <a:pPr algn="ctr"/>
+          </a:p>
+        </p:txBody>
+      </p:sp>
+      <p:sp>
+        <p:nvSpPr>
+          <p:cNvPr id="43" name="TextBox 42"/>
+          <p:cNvSpPr txBox="1"/>
+          <p:nvPr/>
+        </p:nvSpPr>
+        <p:spPr>
+          <a:xfrm>
+            <a:off x="411480" y="2688336"/>
+            <a:ext cx="2011679" cy="256032"/>
+          </a:xfrm>
+          <a:prstGeom prst="rect">
+            <a:avLst/>
+          </a:prstGeom>
+          <a:noFill/>
+        </p:spPr>
+        <p:txBody>
+          <a:bodyPr wrap="square">
+            <a:spAutoFit/>
+          </a:bodyPr>
+          <a:lstStyle/>
+          <a:p>
+            <a:pPr algn="ctr"/>
+            <a:r>
+              <a:rPr sz="1200" b="0" i="0">
+                <a:solidFill>
+                  <a:srgbClr val="1A1A2E"/>
+                </a:solidFill>
+              </a:rPr>
+              <a:t>GPT-4o</a:t>
+            </a:r>
+          </a:p>
+        </p:txBody>
+      </p:sp>
+      <p:sp>
+        <p:nvSpPr>
+          <p:cNvPr id="44" name="Rectangle 43"/>
+          <p:cNvSpPr/>
+          <p:nvPr/>
+        </p:nvSpPr>
+        <p:spPr>
+          <a:xfrm>
+            <a:off x="2468879" y="2642616"/>
+            <a:ext cx="1828800" cy="347472"/>
+          </a:xfrm>
+          <a:prstGeom prst="rect">
+            <a:avLst/>
+          </a:prstGeom>
+          <a:solidFill>
+            <a:srgbClr val="F4F9F4"/>
+          </a:solidFill>
+          <a:ln w="19050">
+            <a:solidFill>
+              <a:srgbClr val="CCCCCC"/>
+            </a:solidFill>
+          </a:ln>
+        </p:spPr>
+        <p:style>
+          <a:lnRef idx="1">
+            <a:schemeClr val="accent1"/>
+          </a:lnRef>
+          <a:fillRef idx="3">
+            <a:schemeClr val="accent1"/>
+          </a:fillRef>
+          <a:effectRef idx="2">
+            <a:schemeClr val="accent1"/>
+          </a:effectRef>
+          <a:fontRef idx="minor">
+            <a:schemeClr val="lt1"/>
+          </a:fontRef>
+        </p:style>
+        <p:txBody>
+          <a:bodyPr rtlCol="0" anchor="ctr"/>
+          <a:lstStyle/>
+          <a:p>
+            <a:pPr algn="ctr"/>
+          </a:p>
+        </p:txBody>
+      </p:sp>
+      <p:sp>
+        <p:nvSpPr>
+          <p:cNvPr id="45" name="TextBox 44"/>
+          <p:cNvSpPr txBox="1"/>
+          <p:nvPr/>
+        </p:nvSpPr>
+        <p:spPr>
+          <a:xfrm>
+            <a:off x="2514599" y="2688336"/>
+            <a:ext cx="1737360" cy="256032"/>
+          </a:xfrm>
+          <a:prstGeom prst="rect">
+            <a:avLst/>
+          </a:prstGeom>
+          <a:noFill/>
+        </p:spPr>
+        <p:txBody>
+          <a:bodyPr wrap="square">
+            <a:spAutoFit/>
+          </a:bodyPr>
+          <a:lstStyle/>
+          <a:p>
+            <a:pPr algn="ctr"/>
+            <a:r>
+              <a:rPr sz="1200" b="0" i="0">
+                <a:solidFill>
+                  <a:srgbClr val="1A1A2E"/>
+                </a:solidFill>
+              </a:rPr>
+              <a:t>OpenAI</a:t>
+            </a:r>
+          </a:p>
+        </p:txBody>
+      </p:sp>
+      <p:sp>
+        <p:nvSpPr>
+          <p:cNvPr id="46" name="Rectangle 45"/>
+          <p:cNvSpPr/>
+          <p:nvPr/>
+        </p:nvSpPr>
+        <p:spPr>
+          <a:xfrm>
+            <a:off x="4297679" y="2642616"/>
+            <a:ext cx="1828800" cy="347472"/>
+          </a:xfrm>
+          <a:prstGeom prst="rect">
+            <a:avLst/>
+          </a:prstGeom>
+          <a:solidFill>
+            <a:srgbClr val="F4F9F4"/>
+          </a:solidFill>
+          <a:ln w="19050">
+            <a:solidFill>
+              <a:srgbClr val="CCCCCC"/>
+            </a:solidFill>
+          </a:ln>
+        </p:spPr>
+        <p:style>
+          <a:lnRef idx="1">
+            <a:schemeClr val="accent1"/>
+          </a:lnRef>
+          <a:fillRef idx="3">
+            <a:schemeClr val="accent1"/>
+          </a:fillRef>
+          <a:effectRef idx="2">
+            <a:schemeClr val="accent1"/>
+          </a:effectRef>
+          <a:fontRef idx="minor">
+            <a:schemeClr val="lt1"/>
+          </a:fontRef>
+        </p:style>
+        <p:txBody>
+          <a:bodyPr rtlCol="0" anchor="ctr"/>
+          <a:lstStyle/>
+          <a:p>
+            <a:pPr algn="ctr"/>
+          </a:p>
+        </p:txBody>
+      </p:sp>
+      <p:sp>
+        <p:nvSpPr>
+          <p:cNvPr id="47" name="TextBox 46"/>
+          <p:cNvSpPr txBox="1"/>
+          <p:nvPr/>
+        </p:nvSpPr>
+        <p:spPr>
+          <a:xfrm>
+            <a:off x="4343399" y="2688336"/>
+            <a:ext cx="1737360" cy="256032"/>
+          </a:xfrm>
+          <a:prstGeom prst="rect">
+            <a:avLst/>
+          </a:prstGeom>
+          <a:noFill/>
+        </p:spPr>
+        <p:txBody>
+          <a:bodyPr wrap="square">
+            <a:spAutoFit/>
+          </a:bodyPr>
+          <a:lstStyle/>
+          <a:p>
+            <a:pPr algn="ctr"/>
+            <a:r>
+              <a:rPr sz="1200" b="0" i="0">
+                <a:solidFill>
+                  <a:srgbClr val="1A1A2E"/>
+                </a:solidFill>
+              </a:rPr>
+              <a:t>17.2%</a:t>
+            </a:r>
+          </a:p>
+        </p:txBody>
+      </p:sp>
+      <p:sp>
+        <p:nvSpPr>
+          <p:cNvPr id="48" name="Rectangle 47"/>
+          <p:cNvSpPr/>
+          <p:nvPr/>
+        </p:nvSpPr>
+        <p:spPr>
+          <a:xfrm>
+            <a:off x="6126479" y="2642616"/>
+            <a:ext cx="2286000" cy="347472"/>
+          </a:xfrm>
+          <a:prstGeom prst="rect">
+            <a:avLst/>
+          </a:prstGeom>
+          <a:solidFill>
+            <a:srgbClr val="F4F9F4"/>
+          </a:solidFill>
+          <a:ln w="19050">
+            <a:solidFill>
+              <a:srgbClr val="CCCCCC"/>
+            </a:solidFill>
+          </a:ln>
+        </p:spPr>
+        <p:style>
+          <a:lnRef idx="1">
+            <a:schemeClr val="accent1"/>
+          </a:lnRef>
+          <a:fillRef idx="3">
+            <a:schemeClr val="accent1"/>
+          </a:fillRef>
+          <a:effectRef idx="2">
+            <a:schemeClr val="accent1"/>
+          </a:effectRef>
+          <a:fontRef idx="minor">
+            <a:schemeClr val="lt1"/>
+          </a:fontRef>
+        </p:style>
+        <p:txBody>
+          <a:bodyPr rtlCol="0" anchor="ctr"/>
+          <a:lstStyle/>
+          <a:p>
+            <a:pPr algn="ctr"/>
+          </a:p>
+        </p:txBody>
+      </p:sp>
+      <p:sp>
+        <p:nvSpPr>
+          <p:cNvPr id="49" name="TextBox 48"/>
+          <p:cNvSpPr txBox="1"/>
+          <p:nvPr/>
+        </p:nvSpPr>
+        <p:spPr>
+          <a:xfrm>
+            <a:off x="6172199" y="2688336"/>
+            <a:ext cx="2194560" cy="256032"/>
+          </a:xfrm>
+          <a:prstGeom prst="rect">
+            <a:avLst/>
+          </a:prstGeom>
+          <a:noFill/>
+        </p:spPr>
+        <p:txBody>
+          <a:bodyPr wrap="square">
+            <a:spAutoFit/>
+          </a:bodyPr>
+          <a:lstStyle/>
+          <a:p>
+            <a:pPr algn="ctr"/>
+            <a:r>
+              <a:rPr sz="1200" b="0" i="0">
+                <a:solidFill>
+                  <a:srgbClr val="1A1A2E"/>
+                </a:solidFill>
+              </a:rPr>
+              <a:t>100%</a:t>
+            </a:r>
+          </a:p>
+        </p:txBody>
+      </p:sp>
+      <p:sp>
+        <p:nvSpPr>
+          <p:cNvPr id="50" name="Rectangle 49"/>
+          <p:cNvSpPr/>
+          <p:nvPr/>
+        </p:nvSpPr>
+        <p:spPr>
+          <a:xfrm>
+            <a:off x="8412480" y="2642616"/>
+            <a:ext cx="1554480" cy="347472"/>
+          </a:xfrm>
+          <a:prstGeom prst="rect">
+            <a:avLst/>
+          </a:prstGeom>
+          <a:solidFill>
+            <a:srgbClr val="F4F9F4"/>
+          </a:solidFill>
+          <a:ln w="19050">
+            <a:solidFill>
+              <a:srgbClr val="CCCCCC"/>
+            </a:solidFill>
+          </a:ln>
+        </p:spPr>
+        <p:style>
+          <a:lnRef idx="1">
+            <a:schemeClr val="accent1"/>
+          </a:lnRef>
+          <a:fillRef idx="3">
+            <a:schemeClr val="accent1"/>
+          </a:fillRef>
+          <a:effectRef idx="2">
+            <a:schemeClr val="accent1"/>
+          </a:effectRef>
+          <a:fontRef idx="minor">
+            <a:schemeClr val="lt1"/>
+          </a:fontRef>
+        </p:style>
+        <p:txBody>
+          <a:bodyPr rtlCol="0" anchor="ctr"/>
+          <a:lstStyle/>
+          <a:p>
+            <a:pPr algn="ctr"/>
+          </a:p>
+        </p:txBody>
+      </p:sp>
+      <p:sp>
+        <p:nvSpPr>
+          <p:cNvPr id="51" name="TextBox 50"/>
+          <p:cNvSpPr txBox="1"/>
+          <p:nvPr/>
+        </p:nvSpPr>
+        <p:spPr>
+          <a:xfrm>
+            <a:off x="8458200" y="2688336"/>
+            <a:ext cx="1463039" cy="256032"/>
+          </a:xfrm>
+          <a:prstGeom prst="rect">
+            <a:avLst/>
+          </a:prstGeom>
+          <a:noFill/>
+        </p:spPr>
+        <p:txBody>
+          <a:bodyPr wrap="square">
+            <a:spAutoFit/>
+          </a:bodyPr>
+          <a:lstStyle/>
+          <a:p>
+            <a:pPr algn="ctr"/>
+            <a:r>
+              <a:rPr sz="1200" b="0" i="0">
+                <a:solidFill>
+                  <a:srgbClr val="1A1A2E"/>
+                </a:solidFill>
+              </a:rPr>
+              <a:t>10%</a:t>
+            </a:r>
+          </a:p>
+        </p:txBody>
+      </p:sp>
+      <p:sp>
+        <p:nvSpPr>
+          <p:cNvPr id="52" name="Rectangle 51"/>
+          <p:cNvSpPr/>
+          <p:nvPr/>
+        </p:nvSpPr>
+        <p:spPr>
+          <a:xfrm>
+            <a:off x="9966959" y="2642616"/>
+            <a:ext cx="1554480" cy="347472"/>
+          </a:xfrm>
+          <a:prstGeom prst="rect">
+            <a:avLst/>
+          </a:prstGeom>
+          <a:solidFill>
+            <a:srgbClr val="F4F9F4"/>
+          </a:solidFill>
+          <a:ln w="19050">
+            <a:solidFill>
+              <a:srgbClr val="CCCCCC"/>
+            </a:solidFill>
+          </a:ln>
+        </p:spPr>
+        <p:style>
+          <a:lnRef idx="1">
+            <a:schemeClr val="accent1"/>
+          </a:lnRef>
+          <a:fillRef idx="3">
+            <a:schemeClr val="accent1"/>
+          </a:fillRef>
+          <a:effectRef idx="2">
+            <a:schemeClr val="accent1"/>
+          </a:effectRef>
+          <a:fontRef idx="minor">
+            <a:schemeClr val="lt1"/>
+          </a:fontRef>
+        </p:style>
+        <p:txBody>
+          <a:bodyPr rtlCol="0" anchor="ctr"/>
+          <a:lstStyle/>
+          <a:p>
+            <a:pPr algn="ctr"/>
+          </a:p>
+        </p:txBody>
+      </p:sp>
+      <p:sp>
+        <p:nvSpPr>
+          <p:cNvPr id="53" name="TextBox 52"/>
+          <p:cNvSpPr txBox="1"/>
+          <p:nvPr/>
+        </p:nvSpPr>
+        <p:spPr>
+          <a:xfrm>
+            <a:off x="10012680" y="2688336"/>
+            <a:ext cx="1463039" cy="256032"/>
+          </a:xfrm>
+          <a:prstGeom prst="rect">
+            <a:avLst/>
+          </a:prstGeom>
+          <a:noFill/>
+        </p:spPr>
+        <p:txBody>
+          <a:bodyPr wrap="square">
+            <a:spAutoFit/>
+          </a:bodyPr>
+          <a:lstStyle/>
+          <a:p>
+            <a:pPr algn="ctr"/>
+            <a:r>
+              <a:rPr sz="1200" b="0" i="0">
+                <a:solidFill>
+                  <a:srgbClr val="1A1A2E"/>
+                </a:solidFill>
+              </a:rPr>
+              <a:t>162 s</a:t>
+            </a:r>
+          </a:p>
+        </p:txBody>
+      </p:sp>
+      <p:sp>
+        <p:nvSpPr>
+          <p:cNvPr id="54" name="TextBox 53"/>
+          <p:cNvSpPr txBox="1"/>
+          <p:nvPr/>
+        </p:nvSpPr>
+        <p:spPr>
+          <a:xfrm>
+            <a:off x="457200" y="3703320"/>
+            <a:ext cx="3657600" cy="320040"/>
           </a:xfrm>
           <a:prstGeom prst="rect">
             <a:avLst/>
@@ -4018,21 +5407,120 @@
                   <a:srgbClr val="2E8648"/>
                 </a:solidFill>
               </a:rPr>
-              <a:t>5. Variety Improvement</a:t>
-            </a:r>
-          </a:p>
-        </p:txBody>
-      </p:sp>
-      <p:sp>
-        <p:nvSpPr>
-          <p:cNvPr id="20" name="TextBox 19"/>
-          <p:cNvSpPr txBox="1"/>
-          <p:nvPr/>
-        </p:nvSpPr>
-        <p:spPr>
-          <a:xfrm>
-            <a:off x="3566160" y="5029200"/>
-            <a:ext cx="4846320" cy="822960"/>
+              <a:t>Key findings:</a:t>
+            </a:r>
+          </a:p>
+        </p:txBody>
+      </p:sp>
+      <p:sp>
+        <p:nvSpPr>
+          <p:cNvPr id="55" name="TextBox 54"/>
+          <p:cNvSpPr txBox="1"/>
+          <p:nvPr/>
+        </p:nvSpPr>
+        <p:spPr>
+          <a:xfrm>
+            <a:off x="457200" y="4069080"/>
+            <a:ext cx="5669280" cy="2560320"/>
+          </a:xfrm>
+          <a:prstGeom prst="rect">
+            <a:avLst/>
+          </a:prstGeom>
+          <a:noFill/>
+        </p:spPr>
+        <p:txBody>
+          <a:bodyPr wrap="square">
+            <a:spAutoFit/>
+          </a:bodyPr>
+          <a:lstStyle/>
+          <a:p>
+            <a:pPr>
+              <a:spcAft>
+                <a:spcPts val="400"/>
+              </a:spcAft>
+              <a:defRPr sz="1500">
+                <a:solidFill>
+                  <a:srgbClr val="1A1A2E"/>
+                </a:solidFill>
+              </a:defRPr>
+            </a:pPr>
+            <a:r>
+              <a:t>• Budget compliance is 100% for ALL models — it's</a:t>
+            </a:r>
+            <a:br/>
+            <a:r>
+              <a:t>enforced by the deterministic Critic + Kroger data</a:t>
+            </a:r>
+          </a:p>
+          <a:p>
+            <a:pPr>
+              <a:spcAft>
+                <a:spcPts val="400"/>
+              </a:spcAft>
+              <a:defRPr sz="1500">
+                <a:solidFill>
+                  <a:srgbClr val="1A1A2E"/>
+                </a:solidFill>
+              </a:defRPr>
+            </a:pPr>
+            <a:r>
+              <a:t>• Claude Sonnet has the lowest macro error (15.45%)</a:t>
+            </a:r>
+            <a:br/>
+            <a:r>
+              <a:t>— best ingredient quantity calibration</a:t>
+            </a:r>
+          </a:p>
+          <a:p>
+            <a:pPr>
+              <a:spcAft>
+                <a:spcPts val="400"/>
+              </a:spcAft>
+              <a:defRPr sz="1500">
+                <a:solidFill>
+                  <a:srgbClr val="1A1A2E"/>
+                </a:solidFill>
+              </a:defRPr>
+            </a:pPr>
+            <a:r>
+              <a:t>• GPT-4o falls between Haiku and Sonnet (17.2%)</a:t>
+            </a:r>
+            <a:br/>
+            <a:r>
+              <a:t>— coherent plans, different quantity distribution</a:t>
+            </a:r>
+          </a:p>
+          <a:p>
+            <a:pPr>
+              <a:spcAft>
+                <a:spcPts val="400"/>
+              </a:spcAft>
+              <a:defRPr sz="1500">
+                <a:solidFill>
+                  <a:srgbClr val="1A1A2E"/>
+                </a:solidFill>
+              </a:defRPr>
+            </a:pPr>
+            <a:r>
+              <a:t>• Haiku is 33% faster than Sonnet (98s vs 145s)</a:t>
+            </a:r>
+            <a:br/>
+            <a:r>
+              <a:t>— viable for latency-sensitive deployments</a:t>
+            </a:r>
+          </a:p>
+        </p:txBody>
+      </p:sp>
+      <p:sp>
+        <p:nvSpPr>
+          <p:cNvPr id="56" name="TextBox 55"/>
+          <p:cNvSpPr txBox="1"/>
+          <p:nvPr/>
+        </p:nvSpPr>
+        <p:spPr>
+          <a:xfrm>
+            <a:off x="6583680" y="3703320"/>
+            <a:ext cx="5212080" cy="320040"/>
           </a:xfrm>
           <a:prstGeom prst="rect">
             <a:avLst/>
@@ -4047,12 +5535,159 @@
           <a:p>
             <a:pPr algn="l"/>
             <a:r>
-              <a:rPr sz="1200" b="0" i="0">
+              <a:rPr sz="1400" b="1" i="0">
+                <a:solidFill>
+                  <a:srgbClr val="2E8648"/>
+                </a:solidFill>
+              </a:rPr>
+              <a:t>How to run:</a:t>
+            </a:r>
+          </a:p>
+        </p:txBody>
+      </p:sp>
+      <p:sp>
+        <p:nvSpPr>
+          <p:cNvPr id="57" name="Rectangle 56"/>
+          <p:cNvSpPr/>
+          <p:nvPr/>
+        </p:nvSpPr>
+        <p:spPr>
+          <a:xfrm>
+            <a:off x="6583680" y="4041648"/>
+            <a:ext cx="5212080" cy="914400"/>
+          </a:xfrm>
+          <a:prstGeom prst="rect">
+            <a:avLst/>
+          </a:prstGeom>
+          <a:solidFill>
+            <a:srgbClr val="1A1A2E"/>
+          </a:solidFill>
+          <a:ln>
+            <a:noFill/>
+          </a:ln>
+        </p:spPr>
+        <p:style>
+          <a:lnRef idx="1">
+            <a:schemeClr val="accent1"/>
+          </a:lnRef>
+          <a:fillRef idx="3">
+            <a:schemeClr val="accent1"/>
+          </a:fillRef>
+          <a:effectRef idx="2">
+            <a:schemeClr val="accent1"/>
+          </a:effectRef>
+          <a:fontRef idx="minor">
+            <a:schemeClr val="lt1"/>
+          </a:fontRef>
+        </p:style>
+        <p:txBody>
+          <a:bodyPr rtlCol="0" anchor="ctr"/>
+          <a:lstStyle/>
+          <a:p>
+            <a:pPr algn="ctr"/>
+          </a:p>
+        </p:txBody>
+      </p:sp>
+      <p:sp>
+        <p:nvSpPr>
+          <p:cNvPr id="58" name="TextBox 57"/>
+          <p:cNvSpPr txBox="1"/>
+          <p:nvPr/>
+        </p:nvSpPr>
+        <p:spPr>
+          <a:xfrm>
+            <a:off x="6675120" y="4078224"/>
+            <a:ext cx="5029200" cy="822960"/>
+          </a:xfrm>
+          <a:prstGeom prst="rect">
+            <a:avLst/>
+          </a:prstGeom>
+          <a:noFill/>
+        </p:spPr>
+        <p:txBody>
+          <a:bodyPr wrap="square">
+            <a:spAutoFit/>
+          </a:bodyPr>
+          <a:lstStyle/>
+          <a:p>
+            <a:pPr algn="l"/>
+            <a:r>
+              <a:rPr sz="1100" b="0" i="0">
+                <a:solidFill>
+                  <a:srgbClr val="CCFFCC"/>
+                </a:solidFill>
+              </a:rPr>
+              <a:t>python -m src.evaluation.runner --mode multimodel
+# Set OPENAI_API_KEY for GPT-4o
+# Uses MODEL_OVERRIDE env var internally</a:t>
+            </a:r>
+          </a:p>
+        </p:txBody>
+      </p:sp>
+      <p:sp>
+        <p:nvSpPr>
+          <p:cNvPr id="59" name="TextBox 58"/>
+          <p:cNvSpPr txBox="1"/>
+          <p:nvPr/>
+        </p:nvSpPr>
+        <p:spPr>
+          <a:xfrm>
+            <a:off x="6583680" y="5074920"/>
+            <a:ext cx="5212080" cy="1554480"/>
+          </a:xfrm>
+          <a:prstGeom prst="rect">
+            <a:avLst/>
+          </a:prstGeom>
+          <a:noFill/>
+        </p:spPr>
+        <p:txBody>
+          <a:bodyPr wrap="square">
+            <a:spAutoFit/>
+          </a:bodyPr>
+          <a:lstStyle/>
+          <a:p>
+            <a:pPr>
+              <a:spcAft>
+                <a:spcPts val="400"/>
+              </a:spcAft>
+              <a:defRPr sz="1500">
                 <a:solidFill>
                   <a:srgbClr val="1A1A2E"/>
                 </a:solidFill>
-              </a:rPr>
-              <a:t>Lowest-rated human dimension (3.70/5). Explicitly track used meal structures across iterations and block repetition in the Planner prompt.</a:t>
+              </a:defRPr>
+            </a:pPr>
+            <a:r>
+              <a:t>• MODEL_OVERRIDE env var routes to Anthropic or OpenAI provider</a:t>
+            </a:r>
+          </a:p>
+          <a:p>
+            <a:pPr>
+              <a:spcAft>
+                <a:spcPts val="400"/>
+              </a:spcAft>
+              <a:defRPr sz="1500">
+                <a:solidFill>
+                  <a:srgbClr val="1A1A2E"/>
+                </a:solidFill>
+              </a:defRPr>
+            </a:pPr>
+            <a:r>
+              <a:t>• All agents use the same llm_call() interface — no code changes needed</a:t>
+            </a:r>
+          </a:p>
+          <a:p>
+            <a:pPr>
+              <a:spcAft>
+                <a:spcPts val="400"/>
+              </a:spcAft>
+              <a:defRPr sz="1500">
+                <a:solidFill>
+                  <a:srgbClr val="1A1A2E"/>
+                </a:solidFill>
+              </a:defRPr>
+            </a:pPr>
+            <a:r>
+              <a:t>• Adding Llama 3 requires only a Together AI / Groq backend in base.py</a:t>
             </a:r>
           </a:p>
         </p:txBody>
@@ -4090,7 +5725,7 @@
             <a:avLst/>
           </a:prstGeom>
           <a:solidFill>
-            <a:srgbClr val="1A1A2E"/>
+            <a:srgbClr val="F4F9F4"/>
           </a:solidFill>
           <a:ln>
             <a:noFill/>
@@ -4169,42 +5804,258 @@
         </p:nvSpPr>
         <p:spPr>
           <a:xfrm>
-            <a:off x="457200" y="137160"/>
-            <a:ext cx="11247120" cy="1005840"/>
-          </a:xfrm>
-          <a:prstGeom prst="rect">
-            <a:avLst/>
-          </a:prstGeom>
-          <a:noFill/>
-        </p:spPr>
-        <p:txBody>
-          <a:bodyPr wrap="square">
-            <a:spAutoFit/>
-          </a:bodyPr>
-          <a:lstStyle/>
-          <a:p>
-            <a:pPr algn="ctr"/>
+            <a:off x="365760" y="137160"/>
+            <a:ext cx="11430000" cy="731520"/>
+          </a:xfrm>
+          <a:prstGeom prst="rect">
+            <a:avLst/>
+          </a:prstGeom>
+          <a:noFill/>
+        </p:spPr>
+        <p:txBody>
+          <a:bodyPr wrap="square">
+            <a:spAutoFit/>
+          </a:bodyPr>
+          <a:lstStyle/>
+          <a:p>
+            <a:pPr algn="l"/>
             <a:r>
               <a:rPr sz="3200" b="1" i="0">
                 <a:solidFill>
                   <a:srgbClr val="FFFFFF"/>
                 </a:solidFill>
               </a:rPr>
-              <a:t>Bio-Sync: Key Takeaways</a:t>
-            </a:r>
-          </a:p>
-        </p:txBody>
-      </p:sp>
-      <p:sp>
-        <p:nvSpPr>
-          <p:cNvPr id="5" name="Rectangle 4"/>
+              <a:t>Instacart API Integration (Reach Goal)</a:t>
+            </a:r>
+          </a:p>
+        </p:txBody>
+      </p:sp>
+      <p:sp>
+        <p:nvSpPr>
+          <p:cNvPr id="5" name="TextBox 4"/>
+          <p:cNvSpPr txBox="1"/>
+          <p:nvPr/>
+        </p:nvSpPr>
+        <p:spPr>
+          <a:xfrm>
+            <a:off x="365760" y="822960"/>
+            <a:ext cx="11430000" cy="457200"/>
+          </a:xfrm>
+          <a:prstGeom prst="rect">
+            <a:avLst/>
+          </a:prstGeom>
+          <a:noFill/>
+        </p:spPr>
+        <p:txBody>
+          <a:bodyPr wrap="square">
+            <a:spAutoFit/>
+          </a:bodyPr>
+          <a:lstStyle/>
+          <a:p>
+            <a:pPr algn="l"/>
+            <a:r>
+              <a:rPr sz="1600" b="0" i="0">
+                <a:solidFill>
+                  <a:srgbClr val="CCFFCC"/>
+                </a:solidFill>
+              </a:rPr>
+              <a:t>Alternative grocery pricing source — Whole Foods, Safeway, Target, Costco, and more</a:t>
+            </a:r>
+          </a:p>
+        </p:txBody>
+      </p:sp>
+      <p:sp>
+        <p:nvSpPr>
+          <p:cNvPr id="6" name="TextBox 5"/>
+          <p:cNvSpPr txBox="1"/>
+          <p:nvPr/>
+        </p:nvSpPr>
+        <p:spPr>
+          <a:xfrm>
+            <a:off x="457200" y="1600200"/>
+            <a:ext cx="5394960" cy="320040"/>
+          </a:xfrm>
+          <a:prstGeom prst="rect">
+            <a:avLst/>
+          </a:prstGeom>
+          <a:noFill/>
+        </p:spPr>
+        <p:txBody>
+          <a:bodyPr wrap="square">
+            <a:spAutoFit/>
+          </a:bodyPr>
+          <a:lstStyle/>
+          <a:p>
+            <a:pPr algn="l"/>
+            <a:r>
+              <a:rPr sz="1400" b="1" i="0">
+                <a:solidFill>
+                  <a:srgbClr val="2E8648"/>
+                </a:solidFill>
+              </a:rPr>
+              <a:t>Why Instacart?</a:t>
+            </a:r>
+          </a:p>
+        </p:txBody>
+      </p:sp>
+      <p:sp>
+        <p:nvSpPr>
+          <p:cNvPr id="7" name="TextBox 6"/>
+          <p:cNvSpPr txBox="1"/>
+          <p:nvPr/>
+        </p:nvSpPr>
+        <p:spPr>
+          <a:xfrm>
+            <a:off x="457200" y="1965960"/>
+            <a:ext cx="5394960" cy="3657600"/>
+          </a:xfrm>
+          <a:prstGeom prst="rect">
+            <a:avLst/>
+          </a:prstGeom>
+          <a:noFill/>
+        </p:spPr>
+        <p:txBody>
+          <a:bodyPr wrap="square">
+            <a:spAutoFit/>
+          </a:bodyPr>
+          <a:lstStyle/>
+          <a:p>
+            <a:pPr>
+              <a:spcAft>
+                <a:spcPts val="400"/>
+              </a:spcAft>
+              <a:defRPr sz="1500">
+                <a:solidFill>
+                  <a:srgbClr val="1A1A2E"/>
+                </a:solidFill>
+              </a:defRPr>
+            </a:pPr>
+            <a:r>
+              <a:t>• Kroger covers ~35 US states (Kroger, Fred Meyer,</a:t>
+            </a:r>
+            <a:br/>
+            <a:r>
+              <a:t>Ralphs, Mariano's, Harris Teeter)</a:t>
+            </a:r>
+          </a:p>
+          <a:p>
+            <a:pPr>
+              <a:spcAft>
+                <a:spcPts val="400"/>
+              </a:spcAft>
+              <a:defRPr sz="1500">
+                <a:solidFill>
+                  <a:srgbClr val="1A1A2E"/>
+                </a:solidFill>
+              </a:defRPr>
+            </a:pPr>
+            <a:r>
+              <a:t>• Instacart aggregates 800+ retailers across</a:t>
+            </a:r>
+            <a:br/>
+            <a:r>
+              <a:t>all 50 states — broader geographic coverage</a:t>
+            </a:r>
+          </a:p>
+          <a:p>
+            <a:pPr>
+              <a:spcAft>
+                <a:spcPts val="400"/>
+              </a:spcAft>
+              <a:defRPr sz="1500">
+                <a:solidFill>
+                  <a:srgbClr val="1A1A2E"/>
+                </a:solidFill>
+              </a:defRPr>
+            </a:pPr>
+            <a:r>
+              <a:t>• Prices reflect organic/premium variants</a:t>
+            </a:r>
+            <a:br/>
+            <a:r>
+              <a:t>(5–15% higher than Kroger on average)</a:t>
+            </a:r>
+          </a:p>
+          <a:p>
+            <a:pPr>
+              <a:spcAft>
+                <a:spcPts val="400"/>
+              </a:spcAft>
+              <a:defRPr sz="1500">
+                <a:solidFill>
+                  <a:srgbClr val="1A1A2E"/>
+                </a:solidFill>
+              </a:defRPr>
+            </a:pPr>
+            <a:r>
+              <a:t>• Same PriceRecord schema — drop-in replacement</a:t>
+            </a:r>
+            <a:br/>
+            <a:r>
+              <a:t>for Kroger with no pipeline changes</a:t>
+            </a:r>
+          </a:p>
+          <a:p>
+            <a:pPr>
+              <a:spcAft>
+                <a:spcPts val="400"/>
+              </a:spcAft>
+              <a:defRPr sz="1500">
+                <a:solidFill>
+                  <a:srgbClr val="1A1A2E"/>
+                </a:solidFill>
+              </a:defRPr>
+            </a:pPr>
+            <a:r>
+              <a:t>• Switch with: PRICING_SOURCE=instacart</a:t>
+            </a:r>
+          </a:p>
+        </p:txBody>
+      </p:sp>
+      <p:sp>
+        <p:nvSpPr>
+          <p:cNvPr id="8" name="TextBox 7"/>
+          <p:cNvSpPr txBox="1"/>
+          <p:nvPr/>
+        </p:nvSpPr>
+        <p:spPr>
+          <a:xfrm>
+            <a:off x="6217920" y="1600200"/>
+            <a:ext cx="5577840" cy="320040"/>
+          </a:xfrm>
+          <a:prstGeom prst="rect">
+            <a:avLst/>
+          </a:prstGeom>
+          <a:noFill/>
+        </p:spPr>
+        <p:txBody>
+          <a:bodyPr wrap="square">
+            <a:spAutoFit/>
+          </a:bodyPr>
+          <a:lstStyle/>
+          <a:p>
+            <a:pPr algn="l"/>
+            <a:r>
+              <a:rPr sz="1400" b="1" i="0">
+                <a:solidFill>
+                  <a:srgbClr val="2E8648"/>
+                </a:solidFill>
+              </a:rPr>
+              <a:t>Same Ingredient, Different Retailers</a:t>
+            </a:r>
+          </a:p>
+        </p:txBody>
+      </p:sp>
+      <p:sp>
+        <p:nvSpPr>
+          <p:cNvPr id="9" name="Rectangle 8"/>
           <p:cNvSpPr/>
           <p:nvPr/>
         </p:nvSpPr>
         <p:spPr>
           <a:xfrm>
-            <a:off x="548640" y="1645920"/>
-            <a:ext cx="2468880" cy="2194560"/>
+            <a:off x="6217920" y="1965960"/>
+            <a:ext cx="1920240" cy="347472"/>
           </a:xfrm>
           <a:prstGeom prst="rect">
             <a:avLst/>
@@ -4240,83 +6091,48 @@
       </p:sp>
       <p:sp>
         <p:nvSpPr>
-          <p:cNvPr id="6" name="TextBox 5"/>
-          <p:cNvSpPr txBox="1"/>
-          <p:nvPr/>
-        </p:nvSpPr>
-        <p:spPr>
-          <a:xfrm>
-            <a:off x="640080" y="1783080"/>
-            <a:ext cx="2286000" cy="731520"/>
-          </a:xfrm>
-          <a:prstGeom prst="rect">
-            <a:avLst/>
-          </a:prstGeom>
-          <a:noFill/>
-        </p:spPr>
-        <p:txBody>
-          <a:bodyPr wrap="square">
-            <a:spAutoFit/>
-          </a:bodyPr>
-          <a:lstStyle/>
-          <a:p>
-            <a:pPr algn="ctr"/>
-            <a:r>
-              <a:rPr sz="2200" b="1" i="0">
+          <p:cNvPr id="10" name="TextBox 9"/>
+          <p:cNvSpPr txBox="1"/>
+          <p:nvPr/>
+        </p:nvSpPr>
+        <p:spPr>
+          <a:xfrm>
+            <a:off x="6263640" y="2002536"/>
+            <a:ext cx="1828800" cy="274320"/>
+          </a:xfrm>
+          <a:prstGeom prst="rect">
+            <a:avLst/>
+          </a:prstGeom>
+          <a:noFill/>
+        </p:spPr>
+        <p:txBody>
+          <a:bodyPr wrap="square">
+            <a:spAutoFit/>
+          </a:bodyPr>
+          <a:lstStyle/>
+          <a:p>
+            <a:pPr algn="ctr"/>
+            <a:r>
+              <a:rPr sz="1200" b="1" i="0">
                 <a:solidFill>
                   <a:srgbClr val="FFFFFF"/>
                 </a:solidFill>
               </a:rPr>
-              <a:t>Budget 100%</a:t>
-            </a:r>
-          </a:p>
-        </p:txBody>
-      </p:sp>
-      <p:sp>
-        <p:nvSpPr>
-          <p:cNvPr id="7" name="TextBox 6"/>
-          <p:cNvSpPr txBox="1"/>
-          <p:nvPr/>
-        </p:nvSpPr>
-        <p:spPr>
-          <a:xfrm>
-            <a:off x="640080" y="2468880"/>
-            <a:ext cx="2286000" cy="822960"/>
-          </a:xfrm>
-          <a:prstGeom prst="rect">
-            <a:avLst/>
-          </a:prstGeom>
-          <a:noFill/>
-        </p:spPr>
-        <p:txBody>
-          <a:bodyPr wrap="square">
-            <a:spAutoFit/>
-          </a:bodyPr>
-          <a:lstStyle/>
-          <a:p>
-            <a:pPr algn="ctr"/>
-            <a:r>
-              <a:rPr sz="1300" b="0" i="0">
-                <a:solidFill>
-                  <a:srgbClr val="CCFFCC"/>
-                </a:solidFill>
-              </a:rPr>
-              <a:t>Hard constraint satisfied
-across all 50 profiles</a:t>
-            </a:r>
-          </a:p>
-        </p:txBody>
-      </p:sp>
-      <p:sp>
-        <p:nvSpPr>
-          <p:cNvPr id="8" name="Rectangle 7"/>
+              <a:t>Ingredient</a:t>
+            </a:r>
+          </a:p>
+        </p:txBody>
+      </p:sp>
+      <p:sp>
+        <p:nvSpPr>
+          <p:cNvPr id="11" name="Rectangle 10"/>
           <p:cNvSpPr/>
           <p:nvPr/>
         </p:nvSpPr>
         <p:spPr>
           <a:xfrm>
-            <a:off x="3337560" y="1645920"/>
-            <a:ext cx="2468880" cy="2194560"/>
+            <a:off x="8138160" y="1965960"/>
+            <a:ext cx="1645920" cy="347472"/>
           </a:xfrm>
           <a:prstGeom prst="rect">
             <a:avLst/>
@@ -4352,83 +6168,48 @@
       </p:sp>
       <p:sp>
         <p:nvSpPr>
-          <p:cNvPr id="9" name="TextBox 8"/>
-          <p:cNvSpPr txBox="1"/>
-          <p:nvPr/>
-        </p:nvSpPr>
-        <p:spPr>
-          <a:xfrm>
-            <a:off x="3429000" y="1783080"/>
-            <a:ext cx="2286000" cy="731520"/>
-          </a:xfrm>
-          <a:prstGeom prst="rect">
-            <a:avLst/>
-          </a:prstGeom>
-          <a:noFill/>
-        </p:spPr>
-        <p:txBody>
-          <a:bodyPr wrap="square">
-            <a:spAutoFit/>
-          </a:bodyPr>
-          <a:lstStyle/>
-          <a:p>
-            <a:pPr algn="ctr"/>
-            <a:r>
-              <a:rPr sz="2200" b="1" i="0">
+          <p:cNvPr id="12" name="TextBox 11"/>
+          <p:cNvSpPr txBox="1"/>
+          <p:nvPr/>
+        </p:nvSpPr>
+        <p:spPr>
+          <a:xfrm>
+            <a:off x="8183880" y="2002536"/>
+            <a:ext cx="1554480" cy="274320"/>
+          </a:xfrm>
+          <a:prstGeom prst="rect">
+            <a:avLst/>
+          </a:prstGeom>
+          <a:noFill/>
+        </p:spPr>
+        <p:txBody>
+          <a:bodyPr wrap="square">
+            <a:spAutoFit/>
+          </a:bodyPr>
+          <a:lstStyle/>
+          <a:p>
+            <a:pPr algn="ctr"/>
+            <a:r>
+              <a:rPr sz="1200" b="1" i="0">
                 <a:solidFill>
                   <a:srgbClr val="FFFFFF"/>
                 </a:solidFill>
               </a:rPr>
-              <a:t>Real Data</a:t>
-            </a:r>
-          </a:p>
-        </p:txBody>
-      </p:sp>
-      <p:sp>
-        <p:nvSpPr>
-          <p:cNvPr id="10" name="TextBox 9"/>
-          <p:cNvSpPr txBox="1"/>
-          <p:nvPr/>
-        </p:nvSpPr>
-        <p:spPr>
-          <a:xfrm>
-            <a:off x="3429000" y="2468880"/>
-            <a:ext cx="2286000" cy="822960"/>
-          </a:xfrm>
-          <a:prstGeom prst="rect">
-            <a:avLst/>
-          </a:prstGeom>
-          <a:noFill/>
-        </p:spPr>
-        <p:txBody>
-          <a:bodyPr wrap="square">
-            <a:spAutoFit/>
-          </a:bodyPr>
-          <a:lstStyle/>
-          <a:p>
-            <a:pPr algn="ctr"/>
-            <a:r>
-              <a:rPr sz="1300" b="0" i="0">
-                <a:solidFill>
-                  <a:srgbClr val="CCFFCC"/>
-                </a:solidFill>
-              </a:rPr>
-              <a:t>USDA + Kroger grounding
-— not hallucinated macros</a:t>
-            </a:r>
-          </a:p>
-        </p:txBody>
-      </p:sp>
-      <p:sp>
-        <p:nvSpPr>
-          <p:cNvPr id="11" name="Rectangle 10"/>
+              <a:t>Kroger</a:t>
+            </a:r>
+          </a:p>
+        </p:txBody>
+      </p:sp>
+      <p:sp>
+        <p:nvSpPr>
+          <p:cNvPr id="13" name="Rectangle 12"/>
           <p:cNvSpPr/>
           <p:nvPr/>
         </p:nvSpPr>
         <p:spPr>
           <a:xfrm>
-            <a:off x="6126479" y="1645920"/>
-            <a:ext cx="2468880" cy="2194560"/>
+            <a:off x="9784080" y="1965960"/>
+            <a:ext cx="2194560" cy="347472"/>
           </a:xfrm>
           <a:prstGeom prst="rect">
             <a:avLst/>
@@ -4464,83 +6245,48 @@
       </p:sp>
       <p:sp>
         <p:nvSpPr>
-          <p:cNvPr id="12" name="TextBox 11"/>
-          <p:cNvSpPr txBox="1"/>
-          <p:nvPr/>
-        </p:nvSpPr>
-        <p:spPr>
-          <a:xfrm>
-            <a:off x="6217919" y="1783080"/>
-            <a:ext cx="2286000" cy="731520"/>
-          </a:xfrm>
-          <a:prstGeom prst="rect">
-            <a:avLst/>
-          </a:prstGeom>
-          <a:noFill/>
-        </p:spPr>
-        <p:txBody>
-          <a:bodyPr wrap="square">
-            <a:spAutoFit/>
-          </a:bodyPr>
-          <a:lstStyle/>
-          <a:p>
-            <a:pPr algn="ctr"/>
-            <a:r>
-              <a:rPr sz="2200" b="1" i="0">
+          <p:cNvPr id="14" name="TextBox 13"/>
+          <p:cNvSpPr txBox="1"/>
+          <p:nvPr/>
+        </p:nvSpPr>
+        <p:spPr>
+          <a:xfrm>
+            <a:off x="9829800" y="2002536"/>
+            <a:ext cx="2103120" cy="274320"/>
+          </a:xfrm>
+          <a:prstGeom prst="rect">
+            <a:avLst/>
+          </a:prstGeom>
+          <a:noFill/>
+        </p:spPr>
+        <p:txBody>
+          <a:bodyPr wrap="square">
+            <a:spAutoFit/>
+          </a:bodyPr>
+          <a:lstStyle/>
+          <a:p>
+            <a:pPr algn="ctr"/>
+            <a:r>
+              <a:rPr sz="1200" b="1" i="0">
                 <a:solidFill>
                   <a:srgbClr val="FFFFFF"/>
                 </a:solidFill>
               </a:rPr>
-              <a:t>Critic Matters</a:t>
-            </a:r>
-          </a:p>
-        </p:txBody>
-      </p:sp>
-      <p:sp>
-        <p:nvSpPr>
-          <p:cNvPr id="13" name="TextBox 12"/>
-          <p:cNvSpPr txBox="1"/>
-          <p:nvPr/>
-        </p:nvSpPr>
-        <p:spPr>
-          <a:xfrm>
-            <a:off x="6217919" y="2468880"/>
-            <a:ext cx="2286000" cy="822960"/>
-          </a:xfrm>
-          <a:prstGeom prst="rect">
-            <a:avLst/>
-          </a:prstGeom>
-          <a:noFill/>
-        </p:spPr>
-        <p:txBody>
-          <a:bodyPr wrap="square">
-            <a:spAutoFit/>
-          </a:bodyPr>
-          <a:lstStyle/>
-          <a:p>
-            <a:pPr algn="ctr"/>
-            <a:r>
-              <a:rPr sz="1300" b="0" i="0">
-                <a:solidFill>
-                  <a:srgbClr val="CCFFCC"/>
-                </a:solidFill>
-              </a:rPr>
-              <a:t>Removing it raises macro
-error by 46%</a:t>
-            </a:r>
-          </a:p>
-        </p:txBody>
-      </p:sp>
-      <p:sp>
-        <p:nvSpPr>
-          <p:cNvPr id="14" name="Rectangle 13"/>
+              <a:t>Instacart (Whole Foods)</a:t>
+            </a:r>
+          </a:p>
+        </p:txBody>
+      </p:sp>
+      <p:sp>
+        <p:nvSpPr>
+          <p:cNvPr id="15" name="Rectangle 14"/>
           <p:cNvSpPr/>
           <p:nvPr/>
         </p:nvSpPr>
         <p:spPr>
           <a:xfrm>
-            <a:off x="8915399" y="1645920"/>
-            <a:ext cx="2468880" cy="2194560"/>
+            <a:off x="11978640" y="1965960"/>
+            <a:ext cx="731520" cy="347472"/>
           </a:xfrm>
           <a:prstGeom prst="rect">
             <a:avLst/>
@@ -4576,126 +6322,59 @@
       </p:sp>
       <p:sp>
         <p:nvSpPr>
-          <p:cNvPr id="15" name="TextBox 14"/>
-          <p:cNvSpPr txBox="1"/>
-          <p:nvPr/>
-        </p:nvSpPr>
-        <p:spPr>
-          <a:xfrm>
-            <a:off x="9006839" y="1783080"/>
-            <a:ext cx="2286000" cy="731520"/>
-          </a:xfrm>
-          <a:prstGeom prst="rect">
-            <a:avLst/>
-          </a:prstGeom>
-          <a:noFill/>
-        </p:spPr>
-        <p:txBody>
-          <a:bodyPr wrap="square">
-            <a:spAutoFit/>
-          </a:bodyPr>
-          <a:lstStyle/>
-          <a:p>
-            <a:pPr algn="ctr"/>
-            <a:r>
-              <a:rPr sz="2200" b="1" i="0">
+          <p:cNvPr id="16" name="TextBox 15"/>
+          <p:cNvSpPr txBox="1"/>
+          <p:nvPr/>
+        </p:nvSpPr>
+        <p:spPr>
+          <a:xfrm>
+            <a:off x="12024360" y="2002536"/>
+            <a:ext cx="640080" cy="274320"/>
+          </a:xfrm>
+          <a:prstGeom prst="rect">
+            <a:avLst/>
+          </a:prstGeom>
+          <a:noFill/>
+        </p:spPr>
+        <p:txBody>
+          <a:bodyPr wrap="square">
+            <a:spAutoFit/>
+          </a:bodyPr>
+          <a:lstStyle/>
+          <a:p>
+            <a:pPr algn="ctr"/>
+            <a:r>
+              <a:rPr sz="1200" b="1" i="0">
                 <a:solidFill>
                   <a:srgbClr val="FFFFFF"/>
                 </a:solidFill>
               </a:rPr>
-              <a:t>Human: 4.07/5</a:t>
-            </a:r>
-          </a:p>
-        </p:txBody>
-      </p:sp>
-      <p:sp>
-        <p:nvSpPr>
-          <p:cNvPr id="16" name="TextBox 15"/>
-          <p:cNvSpPr txBox="1"/>
-          <p:nvPr/>
-        </p:nvSpPr>
-        <p:spPr>
-          <a:xfrm>
-            <a:off x="9006839" y="2468880"/>
-            <a:ext cx="2286000" cy="822960"/>
-          </a:xfrm>
-          <a:prstGeom prst="rect">
-            <a:avLst/>
-          </a:prstGeom>
-          <a:noFill/>
-        </p:spPr>
-        <p:txBody>
-          <a:bodyPr wrap="square">
-            <a:spAutoFit/>
-          </a:bodyPr>
-          <a:lstStyle/>
-          <a:p>
-            <a:pPr algn="ctr"/>
-            <a:r>
-              <a:rPr sz="1300" b="0" i="0">
-                <a:solidFill>
-                  <a:srgbClr val="CCFFCC"/>
-                </a:solidFill>
-              </a:rPr>
-              <a:t>Coherence 4.5 · Practicality 4.0
-· Variety 3.7</a:t>
-            </a:r>
-          </a:p>
-        </p:txBody>
-      </p:sp>
-      <p:sp>
-        <p:nvSpPr>
-          <p:cNvPr id="17" name="TextBox 16"/>
-          <p:cNvSpPr txBox="1"/>
-          <p:nvPr/>
-        </p:nvSpPr>
-        <p:spPr>
-          <a:xfrm>
-            <a:off x="548640" y="4114800"/>
-            <a:ext cx="11064240" cy="731520"/>
-          </a:xfrm>
-          <a:prstGeom prst="rect">
-            <a:avLst/>
-          </a:prstGeom>
-          <a:noFill/>
-        </p:spPr>
-        <p:txBody>
-          <a:bodyPr wrap="square">
-            <a:spAutoFit/>
-          </a:bodyPr>
-          <a:lstStyle/>
-          <a:p>
-            <a:pPr algn="ctr"/>
-            <a:r>
-              <a:rPr sz="1600" b="0" i="0">
-                <a:solidFill>
-                  <a:srgbClr val="FFFFFF"/>
-                </a:solidFill>
-              </a:rPr>
-              <a:t>The core insight: LLMs are most powerful as reasoning engines embedded in structured pipelines with external data grounding and validation loops — not as standalone generators.</a:t>
-            </a:r>
-          </a:p>
-        </p:txBody>
-      </p:sp>
-      <p:sp>
-        <p:nvSpPr>
-          <p:cNvPr id="18" name="Rectangle 17"/>
+              <a:t>Diff</a:t>
+            </a:r>
+          </a:p>
+        </p:txBody>
+      </p:sp>
+      <p:sp>
+        <p:nvSpPr>
+          <p:cNvPr id="17" name="Rectangle 16"/>
           <p:cNvSpPr/>
           <p:nvPr/>
         </p:nvSpPr>
         <p:spPr>
           <a:xfrm>
-            <a:off x="2743200" y="5074920"/>
-            <a:ext cx="6702552" cy="640080"/>
-          </a:xfrm>
-          <a:prstGeom prst="rect">
-            <a:avLst/>
-          </a:prstGeom>
-          <a:solidFill>
-            <a:srgbClr val="2E8648"/>
-          </a:solidFill>
-          <a:ln>
-            <a:noFill/>
+            <a:off x="6217920" y="2313432"/>
+            <a:ext cx="1920240" cy="347472"/>
+          </a:xfrm>
+          <a:prstGeom prst="rect">
+            <a:avLst/>
+          </a:prstGeom>
+          <a:solidFill>
+            <a:srgbClr val="F4F9F4"/>
+          </a:solidFill>
+          <a:ln w="19050">
+            <a:solidFill>
+              <a:srgbClr val="CCCCCC"/>
+            </a:solidFill>
           </a:ln>
         </p:spPr>
         <p:style>
@@ -4722,7 +6401,3089 @@
       </p:sp>
       <p:sp>
         <p:nvSpPr>
+          <p:cNvPr id="18" name="TextBox 17"/>
+          <p:cNvSpPr txBox="1"/>
+          <p:nvPr/>
+        </p:nvSpPr>
+        <p:spPr>
+          <a:xfrm>
+            <a:off x="6263640" y="2359151"/>
+            <a:ext cx="1828800" cy="256032"/>
+          </a:xfrm>
+          <a:prstGeom prst="rect">
+            <a:avLst/>
+          </a:prstGeom>
+          <a:noFill/>
+        </p:spPr>
+        <p:txBody>
+          <a:bodyPr wrap="square">
+            <a:spAutoFit/>
+          </a:bodyPr>
+          <a:lstStyle/>
+          <a:p>
+            <a:pPr algn="ctr"/>
+            <a:r>
+              <a:rPr sz="1200" b="0" i="0">
+                <a:solidFill>
+                  <a:srgbClr val="2E8648"/>
+                </a:solidFill>
+              </a:rPr>
+              <a:t>Chicken Breast</a:t>
+            </a:r>
+          </a:p>
+        </p:txBody>
+      </p:sp>
+      <p:sp>
+        <p:nvSpPr>
+          <p:cNvPr id="19" name="Rectangle 18"/>
+          <p:cNvSpPr/>
+          <p:nvPr/>
+        </p:nvSpPr>
+        <p:spPr>
+          <a:xfrm>
+            <a:off x="8138160" y="2313432"/>
+            <a:ext cx="1645920" cy="347472"/>
+          </a:xfrm>
+          <a:prstGeom prst="rect">
+            <a:avLst/>
+          </a:prstGeom>
+          <a:solidFill>
+            <a:srgbClr val="F4F9F4"/>
+          </a:solidFill>
+          <a:ln w="19050">
+            <a:solidFill>
+              <a:srgbClr val="CCCCCC"/>
+            </a:solidFill>
+          </a:ln>
+        </p:spPr>
+        <p:style>
+          <a:lnRef idx="1">
+            <a:schemeClr val="accent1"/>
+          </a:lnRef>
+          <a:fillRef idx="3">
+            <a:schemeClr val="accent1"/>
+          </a:fillRef>
+          <a:effectRef idx="2">
+            <a:schemeClr val="accent1"/>
+          </a:effectRef>
+          <a:fontRef idx="minor">
+            <a:schemeClr val="lt1"/>
+          </a:fontRef>
+        </p:style>
+        <p:txBody>
+          <a:bodyPr rtlCol="0" anchor="ctr"/>
+          <a:lstStyle/>
+          <a:p>
+            <a:pPr algn="ctr"/>
+          </a:p>
+        </p:txBody>
+      </p:sp>
+      <p:sp>
+        <p:nvSpPr>
+          <p:cNvPr id="20" name="TextBox 19"/>
+          <p:cNvSpPr txBox="1"/>
+          <p:nvPr/>
+        </p:nvSpPr>
+        <p:spPr>
+          <a:xfrm>
+            <a:off x="8183880" y="2359151"/>
+            <a:ext cx="1554480" cy="256032"/>
+          </a:xfrm>
+          <a:prstGeom prst="rect">
+            <a:avLst/>
+          </a:prstGeom>
+          <a:noFill/>
+        </p:spPr>
+        <p:txBody>
+          <a:bodyPr wrap="square">
+            <a:spAutoFit/>
+          </a:bodyPr>
+          <a:lstStyle/>
+          <a:p>
+            <a:pPr algn="ctr"/>
+            <a:r>
+              <a:rPr sz="1200" b="0" i="0">
+                <a:solidFill>
+                  <a:srgbClr val="1A1A2E"/>
+                </a:solidFill>
+              </a:rPr>
+              <a:t>$7.99 / 2lb</a:t>
+            </a:r>
+          </a:p>
+        </p:txBody>
+      </p:sp>
+      <p:sp>
+        <p:nvSpPr>
+          <p:cNvPr id="21" name="Rectangle 20"/>
+          <p:cNvSpPr/>
+          <p:nvPr/>
+        </p:nvSpPr>
+        <p:spPr>
+          <a:xfrm>
+            <a:off x="9784080" y="2313432"/>
+            <a:ext cx="2194560" cy="347472"/>
+          </a:xfrm>
+          <a:prstGeom prst="rect">
+            <a:avLst/>
+          </a:prstGeom>
+          <a:solidFill>
+            <a:srgbClr val="F4F9F4"/>
+          </a:solidFill>
+          <a:ln w="19050">
+            <a:solidFill>
+              <a:srgbClr val="CCCCCC"/>
+            </a:solidFill>
+          </a:ln>
+        </p:spPr>
+        <p:style>
+          <a:lnRef idx="1">
+            <a:schemeClr val="accent1"/>
+          </a:lnRef>
+          <a:fillRef idx="3">
+            <a:schemeClr val="accent1"/>
+          </a:fillRef>
+          <a:effectRef idx="2">
+            <a:schemeClr val="accent1"/>
+          </a:effectRef>
+          <a:fontRef idx="minor">
+            <a:schemeClr val="lt1"/>
+          </a:fontRef>
+        </p:style>
+        <p:txBody>
+          <a:bodyPr rtlCol="0" anchor="ctr"/>
+          <a:lstStyle/>
+          <a:p>
+            <a:pPr algn="ctr"/>
+          </a:p>
+        </p:txBody>
+      </p:sp>
+      <p:sp>
+        <p:nvSpPr>
+          <p:cNvPr id="22" name="TextBox 21"/>
+          <p:cNvSpPr txBox="1"/>
+          <p:nvPr/>
+        </p:nvSpPr>
+        <p:spPr>
+          <a:xfrm>
+            <a:off x="9829800" y="2359151"/>
+            <a:ext cx="2103120" cy="256032"/>
+          </a:xfrm>
+          <a:prstGeom prst="rect">
+            <a:avLst/>
+          </a:prstGeom>
+          <a:noFill/>
+        </p:spPr>
+        <p:txBody>
+          <a:bodyPr wrap="square">
+            <a:spAutoFit/>
+          </a:bodyPr>
+          <a:lstStyle/>
+          <a:p>
+            <a:pPr algn="ctr"/>
+            <a:r>
+              <a:rPr sz="1200" b="0" i="0">
+                <a:solidFill>
+                  <a:srgbClr val="1A1A2E"/>
+                </a:solidFill>
+              </a:rPr>
+              <a:t>$9.99 / 2lb</a:t>
+            </a:r>
+          </a:p>
+        </p:txBody>
+      </p:sp>
+      <p:sp>
+        <p:nvSpPr>
+          <p:cNvPr id="23" name="Rectangle 22"/>
+          <p:cNvSpPr/>
+          <p:nvPr/>
+        </p:nvSpPr>
+        <p:spPr>
+          <a:xfrm>
+            <a:off x="11978640" y="2313432"/>
+            <a:ext cx="731520" cy="347472"/>
+          </a:xfrm>
+          <a:prstGeom prst="rect">
+            <a:avLst/>
+          </a:prstGeom>
+          <a:solidFill>
+            <a:srgbClr val="F4F9F4"/>
+          </a:solidFill>
+          <a:ln w="19050">
+            <a:solidFill>
+              <a:srgbClr val="CCCCCC"/>
+            </a:solidFill>
+          </a:ln>
+        </p:spPr>
+        <p:style>
+          <a:lnRef idx="1">
+            <a:schemeClr val="accent1"/>
+          </a:lnRef>
+          <a:fillRef idx="3">
+            <a:schemeClr val="accent1"/>
+          </a:fillRef>
+          <a:effectRef idx="2">
+            <a:schemeClr val="accent1"/>
+          </a:effectRef>
+          <a:fontRef idx="minor">
+            <a:schemeClr val="lt1"/>
+          </a:fontRef>
+        </p:style>
+        <p:txBody>
+          <a:bodyPr rtlCol="0" anchor="ctr"/>
+          <a:lstStyle/>
+          <a:p>
+            <a:pPr algn="ctr"/>
+          </a:p>
+        </p:txBody>
+      </p:sp>
+      <p:sp>
+        <p:nvSpPr>
+          <p:cNvPr id="24" name="TextBox 23"/>
+          <p:cNvSpPr txBox="1"/>
+          <p:nvPr/>
+        </p:nvSpPr>
+        <p:spPr>
+          <a:xfrm>
+            <a:off x="12024360" y="2359151"/>
+            <a:ext cx="640080" cy="256032"/>
+          </a:xfrm>
+          <a:prstGeom prst="rect">
+            <a:avLst/>
+          </a:prstGeom>
+          <a:noFill/>
+        </p:spPr>
+        <p:txBody>
+          <a:bodyPr wrap="square">
+            <a:spAutoFit/>
+          </a:bodyPr>
+          <a:lstStyle/>
+          <a:p>
+            <a:pPr algn="ctr"/>
+            <a:r>
+              <a:rPr sz="1200" b="0" i="0">
+                <a:solidFill>
+                  <a:srgbClr val="1A1A2E"/>
+                </a:solidFill>
+              </a:rPr>
+              <a:t>+25%</a:t>
+            </a:r>
+          </a:p>
+        </p:txBody>
+      </p:sp>
+      <p:sp>
+        <p:nvSpPr>
+          <p:cNvPr id="25" name="Rectangle 24"/>
+          <p:cNvSpPr/>
+          <p:nvPr/>
+        </p:nvSpPr>
+        <p:spPr>
+          <a:xfrm>
+            <a:off x="6217920" y="2660904"/>
+            <a:ext cx="1920240" cy="347472"/>
+          </a:xfrm>
+          <a:prstGeom prst="rect">
+            <a:avLst/>
+          </a:prstGeom>
+          <a:solidFill>
+            <a:srgbClr val="FFFFFF"/>
+          </a:solidFill>
+          <a:ln w="19050">
+            <a:solidFill>
+              <a:srgbClr val="CCCCCC"/>
+            </a:solidFill>
+          </a:ln>
+        </p:spPr>
+        <p:style>
+          <a:lnRef idx="1">
+            <a:schemeClr val="accent1"/>
+          </a:lnRef>
+          <a:fillRef idx="3">
+            <a:schemeClr val="accent1"/>
+          </a:fillRef>
+          <a:effectRef idx="2">
+            <a:schemeClr val="accent1"/>
+          </a:effectRef>
+          <a:fontRef idx="minor">
+            <a:schemeClr val="lt1"/>
+          </a:fontRef>
+        </p:style>
+        <p:txBody>
+          <a:bodyPr rtlCol="0" anchor="ctr"/>
+          <a:lstStyle/>
+          <a:p>
+            <a:pPr algn="ctr"/>
+          </a:p>
+        </p:txBody>
+      </p:sp>
+      <p:sp>
+        <p:nvSpPr>
+          <p:cNvPr id="26" name="TextBox 25"/>
+          <p:cNvSpPr txBox="1"/>
+          <p:nvPr/>
+        </p:nvSpPr>
+        <p:spPr>
+          <a:xfrm>
+            <a:off x="6263640" y="2706624"/>
+            <a:ext cx="1828800" cy="256032"/>
+          </a:xfrm>
+          <a:prstGeom prst="rect">
+            <a:avLst/>
+          </a:prstGeom>
+          <a:noFill/>
+        </p:spPr>
+        <p:txBody>
+          <a:bodyPr wrap="square">
+            <a:spAutoFit/>
+          </a:bodyPr>
+          <a:lstStyle/>
+          <a:p>
+            <a:pPr algn="ctr"/>
+            <a:r>
+              <a:rPr sz="1200" b="0" i="0">
+                <a:solidFill>
+                  <a:srgbClr val="1A1A2E"/>
+                </a:solidFill>
+              </a:rPr>
+              <a:t>Brown Rice</a:t>
+            </a:r>
+          </a:p>
+        </p:txBody>
+      </p:sp>
+      <p:sp>
+        <p:nvSpPr>
+          <p:cNvPr id="27" name="Rectangle 26"/>
+          <p:cNvSpPr/>
+          <p:nvPr/>
+        </p:nvSpPr>
+        <p:spPr>
+          <a:xfrm>
+            <a:off x="8138160" y="2660904"/>
+            <a:ext cx="1645920" cy="347472"/>
+          </a:xfrm>
+          <a:prstGeom prst="rect">
+            <a:avLst/>
+          </a:prstGeom>
+          <a:solidFill>
+            <a:srgbClr val="FFFFFF"/>
+          </a:solidFill>
+          <a:ln w="19050">
+            <a:solidFill>
+              <a:srgbClr val="CCCCCC"/>
+            </a:solidFill>
+          </a:ln>
+        </p:spPr>
+        <p:style>
+          <a:lnRef idx="1">
+            <a:schemeClr val="accent1"/>
+          </a:lnRef>
+          <a:fillRef idx="3">
+            <a:schemeClr val="accent1"/>
+          </a:fillRef>
+          <a:effectRef idx="2">
+            <a:schemeClr val="accent1"/>
+          </a:effectRef>
+          <a:fontRef idx="minor">
+            <a:schemeClr val="lt1"/>
+          </a:fontRef>
+        </p:style>
+        <p:txBody>
+          <a:bodyPr rtlCol="0" anchor="ctr"/>
+          <a:lstStyle/>
+          <a:p>
+            <a:pPr algn="ctr"/>
+          </a:p>
+        </p:txBody>
+      </p:sp>
+      <p:sp>
+        <p:nvSpPr>
+          <p:cNvPr id="28" name="TextBox 27"/>
+          <p:cNvSpPr txBox="1"/>
+          <p:nvPr/>
+        </p:nvSpPr>
+        <p:spPr>
+          <a:xfrm>
+            <a:off x="8183880" y="2706624"/>
+            <a:ext cx="1554480" cy="256032"/>
+          </a:xfrm>
+          <a:prstGeom prst="rect">
+            <a:avLst/>
+          </a:prstGeom>
+          <a:noFill/>
+        </p:spPr>
+        <p:txBody>
+          <a:bodyPr wrap="square">
+            <a:spAutoFit/>
+          </a:bodyPr>
+          <a:lstStyle/>
+          <a:p>
+            <a:pPr algn="ctr"/>
+            <a:r>
+              <a:rPr sz="1200" b="0" i="0">
+                <a:solidFill>
+                  <a:srgbClr val="1A1A2E"/>
+                </a:solidFill>
+              </a:rPr>
+              <a:t>$2.49 / 2lb</a:t>
+            </a:r>
+          </a:p>
+        </p:txBody>
+      </p:sp>
+      <p:sp>
+        <p:nvSpPr>
+          <p:cNvPr id="29" name="Rectangle 28"/>
+          <p:cNvSpPr/>
+          <p:nvPr/>
+        </p:nvSpPr>
+        <p:spPr>
+          <a:xfrm>
+            <a:off x="9784080" y="2660904"/>
+            <a:ext cx="2194560" cy="347472"/>
+          </a:xfrm>
+          <a:prstGeom prst="rect">
+            <a:avLst/>
+          </a:prstGeom>
+          <a:solidFill>
+            <a:srgbClr val="FFFFFF"/>
+          </a:solidFill>
+          <a:ln w="19050">
+            <a:solidFill>
+              <a:srgbClr val="CCCCCC"/>
+            </a:solidFill>
+          </a:ln>
+        </p:spPr>
+        <p:style>
+          <a:lnRef idx="1">
+            <a:schemeClr val="accent1"/>
+          </a:lnRef>
+          <a:fillRef idx="3">
+            <a:schemeClr val="accent1"/>
+          </a:fillRef>
+          <a:effectRef idx="2">
+            <a:schemeClr val="accent1"/>
+          </a:effectRef>
+          <a:fontRef idx="minor">
+            <a:schemeClr val="lt1"/>
+          </a:fontRef>
+        </p:style>
+        <p:txBody>
+          <a:bodyPr rtlCol="0" anchor="ctr"/>
+          <a:lstStyle/>
+          <a:p>
+            <a:pPr algn="ctr"/>
+          </a:p>
+        </p:txBody>
+      </p:sp>
+      <p:sp>
+        <p:nvSpPr>
+          <p:cNvPr id="30" name="TextBox 29"/>
+          <p:cNvSpPr txBox="1"/>
+          <p:nvPr/>
+        </p:nvSpPr>
+        <p:spPr>
+          <a:xfrm>
+            <a:off x="9829800" y="2706624"/>
+            <a:ext cx="2103120" cy="256032"/>
+          </a:xfrm>
+          <a:prstGeom prst="rect">
+            <a:avLst/>
+          </a:prstGeom>
+          <a:noFill/>
+        </p:spPr>
+        <p:txBody>
+          <a:bodyPr wrap="square">
+            <a:spAutoFit/>
+          </a:bodyPr>
+          <a:lstStyle/>
+          <a:p>
+            <a:pPr algn="ctr"/>
+            <a:r>
+              <a:rPr sz="1200" b="0" i="0">
+                <a:solidFill>
+                  <a:srgbClr val="1A1A2E"/>
+                </a:solidFill>
+              </a:rPr>
+              <a:t>$4.49 / 2lb</a:t>
+            </a:r>
+          </a:p>
+        </p:txBody>
+      </p:sp>
+      <p:sp>
+        <p:nvSpPr>
+          <p:cNvPr id="31" name="Rectangle 30"/>
+          <p:cNvSpPr/>
+          <p:nvPr/>
+        </p:nvSpPr>
+        <p:spPr>
+          <a:xfrm>
+            <a:off x="11978640" y="2660904"/>
+            <a:ext cx="731520" cy="347472"/>
+          </a:xfrm>
+          <a:prstGeom prst="rect">
+            <a:avLst/>
+          </a:prstGeom>
+          <a:solidFill>
+            <a:srgbClr val="FFFFFF"/>
+          </a:solidFill>
+          <a:ln w="19050">
+            <a:solidFill>
+              <a:srgbClr val="CCCCCC"/>
+            </a:solidFill>
+          </a:ln>
+        </p:spPr>
+        <p:style>
+          <a:lnRef idx="1">
+            <a:schemeClr val="accent1"/>
+          </a:lnRef>
+          <a:fillRef idx="3">
+            <a:schemeClr val="accent1"/>
+          </a:fillRef>
+          <a:effectRef idx="2">
+            <a:schemeClr val="accent1"/>
+          </a:effectRef>
+          <a:fontRef idx="minor">
+            <a:schemeClr val="lt1"/>
+          </a:fontRef>
+        </p:style>
+        <p:txBody>
+          <a:bodyPr rtlCol="0" anchor="ctr"/>
+          <a:lstStyle/>
+          <a:p>
+            <a:pPr algn="ctr"/>
+          </a:p>
+        </p:txBody>
+      </p:sp>
+      <p:sp>
+        <p:nvSpPr>
+          <p:cNvPr id="32" name="TextBox 31"/>
+          <p:cNvSpPr txBox="1"/>
+          <p:nvPr/>
+        </p:nvSpPr>
+        <p:spPr>
+          <a:xfrm>
+            <a:off x="12024360" y="2706624"/>
+            <a:ext cx="640080" cy="256032"/>
+          </a:xfrm>
+          <a:prstGeom prst="rect">
+            <a:avLst/>
+          </a:prstGeom>
+          <a:noFill/>
+        </p:spPr>
+        <p:txBody>
+          <a:bodyPr wrap="square">
+            <a:spAutoFit/>
+          </a:bodyPr>
+          <a:lstStyle/>
+          <a:p>
+            <a:pPr algn="ctr"/>
+            <a:r>
+              <a:rPr sz="1200" b="0" i="0">
+                <a:solidFill>
+                  <a:srgbClr val="1A1A2E"/>
+                </a:solidFill>
+              </a:rPr>
+              <a:t>+80%</a:t>
+            </a:r>
+          </a:p>
+        </p:txBody>
+      </p:sp>
+      <p:sp>
+        <p:nvSpPr>
+          <p:cNvPr id="33" name="Rectangle 32"/>
+          <p:cNvSpPr/>
+          <p:nvPr/>
+        </p:nvSpPr>
+        <p:spPr>
+          <a:xfrm>
+            <a:off x="6217920" y="3008376"/>
+            <a:ext cx="1920240" cy="347472"/>
+          </a:xfrm>
+          <a:prstGeom prst="rect">
+            <a:avLst/>
+          </a:prstGeom>
+          <a:solidFill>
+            <a:srgbClr val="F4F9F4"/>
+          </a:solidFill>
+          <a:ln w="19050">
+            <a:solidFill>
+              <a:srgbClr val="CCCCCC"/>
+            </a:solidFill>
+          </a:ln>
+        </p:spPr>
+        <p:style>
+          <a:lnRef idx="1">
+            <a:schemeClr val="accent1"/>
+          </a:lnRef>
+          <a:fillRef idx="3">
+            <a:schemeClr val="accent1"/>
+          </a:fillRef>
+          <a:effectRef idx="2">
+            <a:schemeClr val="accent1"/>
+          </a:effectRef>
+          <a:fontRef idx="minor">
+            <a:schemeClr val="lt1"/>
+          </a:fontRef>
+        </p:style>
+        <p:txBody>
+          <a:bodyPr rtlCol="0" anchor="ctr"/>
+          <a:lstStyle/>
+          <a:p>
+            <a:pPr algn="ctr"/>
+          </a:p>
+        </p:txBody>
+      </p:sp>
+      <p:sp>
+        <p:nvSpPr>
+          <p:cNvPr id="34" name="TextBox 33"/>
+          <p:cNvSpPr txBox="1"/>
+          <p:nvPr/>
+        </p:nvSpPr>
+        <p:spPr>
+          <a:xfrm>
+            <a:off x="6263640" y="3054096"/>
+            <a:ext cx="1828800" cy="256032"/>
+          </a:xfrm>
+          <a:prstGeom prst="rect">
+            <a:avLst/>
+          </a:prstGeom>
+          <a:noFill/>
+        </p:spPr>
+        <p:txBody>
+          <a:bodyPr wrap="square">
+            <a:spAutoFit/>
+          </a:bodyPr>
+          <a:lstStyle/>
+          <a:p>
+            <a:pPr algn="ctr"/>
+            <a:r>
+              <a:rPr sz="1200" b="0" i="0">
+                <a:solidFill>
+                  <a:srgbClr val="1A1A2E"/>
+                </a:solidFill>
+              </a:rPr>
+              <a:t>Spinach (5oz)</a:t>
+            </a:r>
+          </a:p>
+        </p:txBody>
+      </p:sp>
+      <p:sp>
+        <p:nvSpPr>
+          <p:cNvPr id="35" name="Rectangle 34"/>
+          <p:cNvSpPr/>
+          <p:nvPr/>
+        </p:nvSpPr>
+        <p:spPr>
+          <a:xfrm>
+            <a:off x="8138160" y="3008376"/>
+            <a:ext cx="1645920" cy="347472"/>
+          </a:xfrm>
+          <a:prstGeom prst="rect">
+            <a:avLst/>
+          </a:prstGeom>
+          <a:solidFill>
+            <a:srgbClr val="F4F9F4"/>
+          </a:solidFill>
+          <a:ln w="19050">
+            <a:solidFill>
+              <a:srgbClr val="CCCCCC"/>
+            </a:solidFill>
+          </a:ln>
+        </p:spPr>
+        <p:style>
+          <a:lnRef idx="1">
+            <a:schemeClr val="accent1"/>
+          </a:lnRef>
+          <a:fillRef idx="3">
+            <a:schemeClr val="accent1"/>
+          </a:fillRef>
+          <a:effectRef idx="2">
+            <a:schemeClr val="accent1"/>
+          </a:effectRef>
+          <a:fontRef idx="minor">
+            <a:schemeClr val="lt1"/>
+          </a:fontRef>
+        </p:style>
+        <p:txBody>
+          <a:bodyPr rtlCol="0" anchor="ctr"/>
+          <a:lstStyle/>
+          <a:p>
+            <a:pPr algn="ctr"/>
+          </a:p>
+        </p:txBody>
+      </p:sp>
+      <p:sp>
+        <p:nvSpPr>
+          <p:cNvPr id="36" name="TextBox 35"/>
+          <p:cNvSpPr txBox="1"/>
+          <p:nvPr/>
+        </p:nvSpPr>
+        <p:spPr>
+          <a:xfrm>
+            <a:off x="8183880" y="3054096"/>
+            <a:ext cx="1554480" cy="256032"/>
+          </a:xfrm>
+          <a:prstGeom prst="rect">
+            <a:avLst/>
+          </a:prstGeom>
+          <a:noFill/>
+        </p:spPr>
+        <p:txBody>
+          <a:bodyPr wrap="square">
+            <a:spAutoFit/>
+          </a:bodyPr>
+          <a:lstStyle/>
+          <a:p>
+            <a:pPr algn="ctr"/>
+            <a:r>
+              <a:rPr sz="1200" b="0" i="0">
+                <a:solidFill>
+                  <a:srgbClr val="1A1A2E"/>
+                </a:solidFill>
+              </a:rPr>
+              <a:t>$3.49</a:t>
+            </a:r>
+          </a:p>
+        </p:txBody>
+      </p:sp>
+      <p:sp>
+        <p:nvSpPr>
+          <p:cNvPr id="37" name="Rectangle 36"/>
+          <p:cNvSpPr/>
+          <p:nvPr/>
+        </p:nvSpPr>
+        <p:spPr>
+          <a:xfrm>
+            <a:off x="9784080" y="3008376"/>
+            <a:ext cx="2194560" cy="347472"/>
+          </a:xfrm>
+          <a:prstGeom prst="rect">
+            <a:avLst/>
+          </a:prstGeom>
+          <a:solidFill>
+            <a:srgbClr val="F4F9F4"/>
+          </a:solidFill>
+          <a:ln w="19050">
+            <a:solidFill>
+              <a:srgbClr val="CCCCCC"/>
+            </a:solidFill>
+          </a:ln>
+        </p:spPr>
+        <p:style>
+          <a:lnRef idx="1">
+            <a:schemeClr val="accent1"/>
+          </a:lnRef>
+          <a:fillRef idx="3">
+            <a:schemeClr val="accent1"/>
+          </a:fillRef>
+          <a:effectRef idx="2">
+            <a:schemeClr val="accent1"/>
+          </a:effectRef>
+          <a:fontRef idx="minor">
+            <a:schemeClr val="lt1"/>
+          </a:fontRef>
+        </p:style>
+        <p:txBody>
+          <a:bodyPr rtlCol="0" anchor="ctr"/>
+          <a:lstStyle/>
+          <a:p>
+            <a:pPr algn="ctr"/>
+          </a:p>
+        </p:txBody>
+      </p:sp>
+      <p:sp>
+        <p:nvSpPr>
+          <p:cNvPr id="38" name="TextBox 37"/>
+          <p:cNvSpPr txBox="1"/>
+          <p:nvPr/>
+        </p:nvSpPr>
+        <p:spPr>
+          <a:xfrm>
+            <a:off x="9829800" y="3054096"/>
+            <a:ext cx="2103120" cy="256032"/>
+          </a:xfrm>
+          <a:prstGeom prst="rect">
+            <a:avLst/>
+          </a:prstGeom>
+          <a:noFill/>
+        </p:spPr>
+        <p:txBody>
+          <a:bodyPr wrap="square">
+            <a:spAutoFit/>
+          </a:bodyPr>
+          <a:lstStyle/>
+          <a:p>
+            <a:pPr algn="ctr"/>
+            <a:r>
+              <a:rPr sz="1200" b="0" i="0">
+                <a:solidFill>
+                  <a:srgbClr val="1A1A2E"/>
+                </a:solidFill>
+              </a:rPr>
+              <a:t>$4.49</a:t>
+            </a:r>
+          </a:p>
+        </p:txBody>
+      </p:sp>
+      <p:sp>
+        <p:nvSpPr>
+          <p:cNvPr id="39" name="Rectangle 38"/>
+          <p:cNvSpPr/>
+          <p:nvPr/>
+        </p:nvSpPr>
+        <p:spPr>
+          <a:xfrm>
+            <a:off x="11978640" y="3008376"/>
+            <a:ext cx="731520" cy="347472"/>
+          </a:xfrm>
+          <a:prstGeom prst="rect">
+            <a:avLst/>
+          </a:prstGeom>
+          <a:solidFill>
+            <a:srgbClr val="F4F9F4"/>
+          </a:solidFill>
+          <a:ln w="19050">
+            <a:solidFill>
+              <a:srgbClr val="CCCCCC"/>
+            </a:solidFill>
+          </a:ln>
+        </p:spPr>
+        <p:style>
+          <a:lnRef idx="1">
+            <a:schemeClr val="accent1"/>
+          </a:lnRef>
+          <a:fillRef idx="3">
+            <a:schemeClr val="accent1"/>
+          </a:fillRef>
+          <a:effectRef idx="2">
+            <a:schemeClr val="accent1"/>
+          </a:effectRef>
+          <a:fontRef idx="minor">
+            <a:schemeClr val="lt1"/>
+          </a:fontRef>
+        </p:style>
+        <p:txBody>
+          <a:bodyPr rtlCol="0" anchor="ctr"/>
+          <a:lstStyle/>
+          <a:p>
+            <a:pPr algn="ctr"/>
+          </a:p>
+        </p:txBody>
+      </p:sp>
+      <p:sp>
+        <p:nvSpPr>
+          <p:cNvPr id="40" name="TextBox 39"/>
+          <p:cNvSpPr txBox="1"/>
+          <p:nvPr/>
+        </p:nvSpPr>
+        <p:spPr>
+          <a:xfrm>
+            <a:off x="12024360" y="3054096"/>
+            <a:ext cx="640080" cy="256032"/>
+          </a:xfrm>
+          <a:prstGeom prst="rect">
+            <a:avLst/>
+          </a:prstGeom>
+          <a:noFill/>
+        </p:spPr>
+        <p:txBody>
+          <a:bodyPr wrap="square">
+            <a:spAutoFit/>
+          </a:bodyPr>
+          <a:lstStyle/>
+          <a:p>
+            <a:pPr algn="ctr"/>
+            <a:r>
+              <a:rPr sz="1200" b="0" i="0">
+                <a:solidFill>
+                  <a:srgbClr val="1A1A2E"/>
+                </a:solidFill>
+              </a:rPr>
+              <a:t>+29%</a:t>
+            </a:r>
+          </a:p>
+        </p:txBody>
+      </p:sp>
+      <p:sp>
+        <p:nvSpPr>
+          <p:cNvPr id="41" name="Rectangle 40"/>
+          <p:cNvSpPr/>
+          <p:nvPr/>
+        </p:nvSpPr>
+        <p:spPr>
+          <a:xfrm>
+            <a:off x="6217920" y="3355848"/>
+            <a:ext cx="1920240" cy="347472"/>
+          </a:xfrm>
+          <a:prstGeom prst="rect">
+            <a:avLst/>
+          </a:prstGeom>
+          <a:solidFill>
+            <a:srgbClr val="FFFFFF"/>
+          </a:solidFill>
+          <a:ln w="19050">
+            <a:solidFill>
+              <a:srgbClr val="CCCCCC"/>
+            </a:solidFill>
+          </a:ln>
+        </p:spPr>
+        <p:style>
+          <a:lnRef idx="1">
+            <a:schemeClr val="accent1"/>
+          </a:lnRef>
+          <a:fillRef idx="3">
+            <a:schemeClr val="accent1"/>
+          </a:fillRef>
+          <a:effectRef idx="2">
+            <a:schemeClr val="accent1"/>
+          </a:effectRef>
+          <a:fontRef idx="minor">
+            <a:schemeClr val="lt1"/>
+          </a:fontRef>
+        </p:style>
+        <p:txBody>
+          <a:bodyPr rtlCol="0" anchor="ctr"/>
+          <a:lstStyle/>
+          <a:p>
+            <a:pPr algn="ctr"/>
+          </a:p>
+        </p:txBody>
+      </p:sp>
+      <p:sp>
+        <p:nvSpPr>
+          <p:cNvPr id="42" name="TextBox 41"/>
+          <p:cNvSpPr txBox="1"/>
+          <p:nvPr/>
+        </p:nvSpPr>
+        <p:spPr>
+          <a:xfrm>
+            <a:off x="6263640" y="3401568"/>
+            <a:ext cx="1828800" cy="256032"/>
+          </a:xfrm>
+          <a:prstGeom prst="rect">
+            <a:avLst/>
+          </a:prstGeom>
+          <a:noFill/>
+        </p:spPr>
+        <p:txBody>
+          <a:bodyPr wrap="square">
+            <a:spAutoFit/>
+          </a:bodyPr>
+          <a:lstStyle/>
+          <a:p>
+            <a:pPr algn="ctr"/>
+            <a:r>
+              <a:rPr sz="1200" b="0" i="0">
+                <a:solidFill>
+                  <a:srgbClr val="1A1A2E"/>
+                </a:solidFill>
+              </a:rPr>
+              <a:t>Salmon (1lb)</a:t>
+            </a:r>
+          </a:p>
+        </p:txBody>
+      </p:sp>
+      <p:sp>
+        <p:nvSpPr>
+          <p:cNvPr id="43" name="Rectangle 42"/>
+          <p:cNvSpPr/>
+          <p:nvPr/>
+        </p:nvSpPr>
+        <p:spPr>
+          <a:xfrm>
+            <a:off x="8138160" y="3355848"/>
+            <a:ext cx="1645920" cy="347472"/>
+          </a:xfrm>
+          <a:prstGeom prst="rect">
+            <a:avLst/>
+          </a:prstGeom>
+          <a:solidFill>
+            <a:srgbClr val="FFFFFF"/>
+          </a:solidFill>
+          <a:ln w="19050">
+            <a:solidFill>
+              <a:srgbClr val="CCCCCC"/>
+            </a:solidFill>
+          </a:ln>
+        </p:spPr>
+        <p:style>
+          <a:lnRef idx="1">
+            <a:schemeClr val="accent1"/>
+          </a:lnRef>
+          <a:fillRef idx="3">
+            <a:schemeClr val="accent1"/>
+          </a:fillRef>
+          <a:effectRef idx="2">
+            <a:schemeClr val="accent1"/>
+          </a:effectRef>
+          <a:fontRef idx="minor">
+            <a:schemeClr val="lt1"/>
+          </a:fontRef>
+        </p:style>
+        <p:txBody>
+          <a:bodyPr rtlCol="0" anchor="ctr"/>
+          <a:lstStyle/>
+          <a:p>
+            <a:pPr algn="ctr"/>
+          </a:p>
+        </p:txBody>
+      </p:sp>
+      <p:sp>
+        <p:nvSpPr>
+          <p:cNvPr id="44" name="TextBox 43"/>
+          <p:cNvSpPr txBox="1"/>
+          <p:nvPr/>
+        </p:nvSpPr>
+        <p:spPr>
+          <a:xfrm>
+            <a:off x="8183880" y="3401568"/>
+            <a:ext cx="1554480" cy="256032"/>
+          </a:xfrm>
+          <a:prstGeom prst="rect">
+            <a:avLst/>
+          </a:prstGeom>
+          <a:noFill/>
+        </p:spPr>
+        <p:txBody>
+          <a:bodyPr wrap="square">
+            <a:spAutoFit/>
+          </a:bodyPr>
+          <a:lstStyle/>
+          <a:p>
+            <a:pPr algn="ctr"/>
+            <a:r>
+              <a:rPr sz="1200" b="0" i="0">
+                <a:solidFill>
+                  <a:srgbClr val="1A1A2E"/>
+                </a:solidFill>
+              </a:rPr>
+              <a:t>$9.99</a:t>
+            </a:r>
+          </a:p>
+        </p:txBody>
+      </p:sp>
+      <p:sp>
+        <p:nvSpPr>
+          <p:cNvPr id="45" name="Rectangle 44"/>
+          <p:cNvSpPr/>
+          <p:nvPr/>
+        </p:nvSpPr>
+        <p:spPr>
+          <a:xfrm>
+            <a:off x="9784080" y="3355848"/>
+            <a:ext cx="2194560" cy="347472"/>
+          </a:xfrm>
+          <a:prstGeom prst="rect">
+            <a:avLst/>
+          </a:prstGeom>
+          <a:solidFill>
+            <a:srgbClr val="FFFFFF"/>
+          </a:solidFill>
+          <a:ln w="19050">
+            <a:solidFill>
+              <a:srgbClr val="CCCCCC"/>
+            </a:solidFill>
+          </a:ln>
+        </p:spPr>
+        <p:style>
+          <a:lnRef idx="1">
+            <a:schemeClr val="accent1"/>
+          </a:lnRef>
+          <a:fillRef idx="3">
+            <a:schemeClr val="accent1"/>
+          </a:fillRef>
+          <a:effectRef idx="2">
+            <a:schemeClr val="accent1"/>
+          </a:effectRef>
+          <a:fontRef idx="minor">
+            <a:schemeClr val="lt1"/>
+          </a:fontRef>
+        </p:style>
+        <p:txBody>
+          <a:bodyPr rtlCol="0" anchor="ctr"/>
+          <a:lstStyle/>
+          <a:p>
+            <a:pPr algn="ctr"/>
+          </a:p>
+        </p:txBody>
+      </p:sp>
+      <p:sp>
+        <p:nvSpPr>
+          <p:cNvPr id="46" name="TextBox 45"/>
+          <p:cNvSpPr txBox="1"/>
+          <p:nvPr/>
+        </p:nvSpPr>
+        <p:spPr>
+          <a:xfrm>
+            <a:off x="9829800" y="3401568"/>
+            <a:ext cx="2103120" cy="256032"/>
+          </a:xfrm>
+          <a:prstGeom prst="rect">
+            <a:avLst/>
+          </a:prstGeom>
+          <a:noFill/>
+        </p:spPr>
+        <p:txBody>
+          <a:bodyPr wrap="square">
+            <a:spAutoFit/>
+          </a:bodyPr>
+          <a:lstStyle/>
+          <a:p>
+            <a:pPr algn="ctr"/>
+            <a:r>
+              <a:rPr sz="1200" b="0" i="0">
+                <a:solidFill>
+                  <a:srgbClr val="1A1A2E"/>
+                </a:solidFill>
+              </a:rPr>
+              <a:t>$13.99</a:t>
+            </a:r>
+          </a:p>
+        </p:txBody>
+      </p:sp>
+      <p:sp>
+        <p:nvSpPr>
+          <p:cNvPr id="47" name="Rectangle 46"/>
+          <p:cNvSpPr/>
+          <p:nvPr/>
+        </p:nvSpPr>
+        <p:spPr>
+          <a:xfrm>
+            <a:off x="11978640" y="3355848"/>
+            <a:ext cx="731520" cy="347472"/>
+          </a:xfrm>
+          <a:prstGeom prst="rect">
+            <a:avLst/>
+          </a:prstGeom>
+          <a:solidFill>
+            <a:srgbClr val="FFFFFF"/>
+          </a:solidFill>
+          <a:ln w="19050">
+            <a:solidFill>
+              <a:srgbClr val="CCCCCC"/>
+            </a:solidFill>
+          </a:ln>
+        </p:spPr>
+        <p:style>
+          <a:lnRef idx="1">
+            <a:schemeClr val="accent1"/>
+          </a:lnRef>
+          <a:fillRef idx="3">
+            <a:schemeClr val="accent1"/>
+          </a:fillRef>
+          <a:effectRef idx="2">
+            <a:schemeClr val="accent1"/>
+          </a:effectRef>
+          <a:fontRef idx="minor">
+            <a:schemeClr val="lt1"/>
+          </a:fontRef>
+        </p:style>
+        <p:txBody>
+          <a:bodyPr rtlCol="0" anchor="ctr"/>
+          <a:lstStyle/>
+          <a:p>
+            <a:pPr algn="ctr"/>
+          </a:p>
+        </p:txBody>
+      </p:sp>
+      <p:sp>
+        <p:nvSpPr>
+          <p:cNvPr id="48" name="TextBox 47"/>
+          <p:cNvSpPr txBox="1"/>
+          <p:nvPr/>
+        </p:nvSpPr>
+        <p:spPr>
+          <a:xfrm>
+            <a:off x="12024360" y="3401568"/>
+            <a:ext cx="640080" cy="256032"/>
+          </a:xfrm>
+          <a:prstGeom prst="rect">
+            <a:avLst/>
+          </a:prstGeom>
+          <a:noFill/>
+        </p:spPr>
+        <p:txBody>
+          <a:bodyPr wrap="square">
+            <a:spAutoFit/>
+          </a:bodyPr>
+          <a:lstStyle/>
+          <a:p>
+            <a:pPr algn="ctr"/>
+            <a:r>
+              <a:rPr sz="1200" b="0" i="0">
+                <a:solidFill>
+                  <a:srgbClr val="1A1A2E"/>
+                </a:solidFill>
+              </a:rPr>
+              <a:t>+40%</a:t>
+            </a:r>
+          </a:p>
+        </p:txBody>
+      </p:sp>
+      <p:sp>
+        <p:nvSpPr>
+          <p:cNvPr id="49" name="Rectangle 48"/>
+          <p:cNvSpPr/>
+          <p:nvPr/>
+        </p:nvSpPr>
+        <p:spPr>
+          <a:xfrm>
+            <a:off x="6217920" y="3703320"/>
+            <a:ext cx="1920240" cy="347472"/>
+          </a:xfrm>
+          <a:prstGeom prst="rect">
+            <a:avLst/>
+          </a:prstGeom>
+          <a:solidFill>
+            <a:srgbClr val="F4F9F4"/>
+          </a:solidFill>
+          <a:ln w="19050">
+            <a:solidFill>
+              <a:srgbClr val="CCCCCC"/>
+            </a:solidFill>
+          </a:ln>
+        </p:spPr>
+        <p:style>
+          <a:lnRef idx="1">
+            <a:schemeClr val="accent1"/>
+          </a:lnRef>
+          <a:fillRef idx="3">
+            <a:schemeClr val="accent1"/>
+          </a:fillRef>
+          <a:effectRef idx="2">
+            <a:schemeClr val="accent1"/>
+          </a:effectRef>
+          <a:fontRef idx="minor">
+            <a:schemeClr val="lt1"/>
+          </a:fontRef>
+        </p:style>
+        <p:txBody>
+          <a:bodyPr rtlCol="0" anchor="ctr"/>
+          <a:lstStyle/>
+          <a:p>
+            <a:pPr algn="ctr"/>
+          </a:p>
+        </p:txBody>
+      </p:sp>
+      <p:sp>
+        <p:nvSpPr>
+          <p:cNvPr id="50" name="TextBox 49"/>
+          <p:cNvSpPr txBox="1"/>
+          <p:nvPr/>
+        </p:nvSpPr>
+        <p:spPr>
+          <a:xfrm>
+            <a:off x="6263640" y="3749039"/>
+            <a:ext cx="1828800" cy="256032"/>
+          </a:xfrm>
+          <a:prstGeom prst="rect">
+            <a:avLst/>
+          </a:prstGeom>
+          <a:noFill/>
+        </p:spPr>
+        <p:txBody>
+          <a:bodyPr wrap="square">
+            <a:spAutoFit/>
+          </a:bodyPr>
+          <a:lstStyle/>
+          <a:p>
+            <a:pPr algn="ctr"/>
+            <a:r>
+              <a:rPr sz="1200" b="0" i="0">
+                <a:solidFill>
+                  <a:srgbClr val="1A1A2E"/>
+                </a:solidFill>
+              </a:rPr>
+              <a:t>Black Beans</a:t>
+            </a:r>
+          </a:p>
+        </p:txBody>
+      </p:sp>
+      <p:sp>
+        <p:nvSpPr>
+          <p:cNvPr id="51" name="Rectangle 50"/>
+          <p:cNvSpPr/>
+          <p:nvPr/>
+        </p:nvSpPr>
+        <p:spPr>
+          <a:xfrm>
+            <a:off x="8138160" y="3703320"/>
+            <a:ext cx="1645920" cy="347472"/>
+          </a:xfrm>
+          <a:prstGeom prst="rect">
+            <a:avLst/>
+          </a:prstGeom>
+          <a:solidFill>
+            <a:srgbClr val="F4F9F4"/>
+          </a:solidFill>
+          <a:ln w="19050">
+            <a:solidFill>
+              <a:srgbClr val="CCCCCC"/>
+            </a:solidFill>
+          </a:ln>
+        </p:spPr>
+        <p:style>
+          <a:lnRef idx="1">
+            <a:schemeClr val="accent1"/>
+          </a:lnRef>
+          <a:fillRef idx="3">
+            <a:schemeClr val="accent1"/>
+          </a:fillRef>
+          <a:effectRef idx="2">
+            <a:schemeClr val="accent1"/>
+          </a:effectRef>
+          <a:fontRef idx="minor">
+            <a:schemeClr val="lt1"/>
+          </a:fontRef>
+        </p:style>
+        <p:txBody>
+          <a:bodyPr rtlCol="0" anchor="ctr"/>
+          <a:lstStyle/>
+          <a:p>
+            <a:pPr algn="ctr"/>
+          </a:p>
+        </p:txBody>
+      </p:sp>
+      <p:sp>
+        <p:nvSpPr>
+          <p:cNvPr id="52" name="TextBox 51"/>
+          <p:cNvSpPr txBox="1"/>
+          <p:nvPr/>
+        </p:nvSpPr>
+        <p:spPr>
+          <a:xfrm>
+            <a:off x="8183880" y="3749039"/>
+            <a:ext cx="1554480" cy="256032"/>
+          </a:xfrm>
+          <a:prstGeom prst="rect">
+            <a:avLst/>
+          </a:prstGeom>
+          <a:noFill/>
+        </p:spPr>
+        <p:txBody>
+          <a:bodyPr wrap="square">
+            <a:spAutoFit/>
+          </a:bodyPr>
+          <a:lstStyle/>
+          <a:p>
+            <a:pPr algn="ctr"/>
+            <a:r>
+              <a:rPr sz="1200" b="0" i="0">
+                <a:solidFill>
+                  <a:srgbClr val="1A1A2E"/>
+                </a:solidFill>
+              </a:rPr>
+              <a:t>$0.99 / 15oz</a:t>
+            </a:r>
+          </a:p>
+        </p:txBody>
+      </p:sp>
+      <p:sp>
+        <p:nvSpPr>
+          <p:cNvPr id="53" name="Rectangle 52"/>
+          <p:cNvSpPr/>
+          <p:nvPr/>
+        </p:nvSpPr>
+        <p:spPr>
+          <a:xfrm>
+            <a:off x="9784080" y="3703320"/>
+            <a:ext cx="2194560" cy="347472"/>
+          </a:xfrm>
+          <a:prstGeom prst="rect">
+            <a:avLst/>
+          </a:prstGeom>
+          <a:solidFill>
+            <a:srgbClr val="F4F9F4"/>
+          </a:solidFill>
+          <a:ln w="19050">
+            <a:solidFill>
+              <a:srgbClr val="CCCCCC"/>
+            </a:solidFill>
+          </a:ln>
+        </p:spPr>
+        <p:style>
+          <a:lnRef idx="1">
+            <a:schemeClr val="accent1"/>
+          </a:lnRef>
+          <a:fillRef idx="3">
+            <a:schemeClr val="accent1"/>
+          </a:fillRef>
+          <a:effectRef idx="2">
+            <a:schemeClr val="accent1"/>
+          </a:effectRef>
+          <a:fontRef idx="minor">
+            <a:schemeClr val="lt1"/>
+          </a:fontRef>
+        </p:style>
+        <p:txBody>
+          <a:bodyPr rtlCol="0" anchor="ctr"/>
+          <a:lstStyle/>
+          <a:p>
+            <a:pPr algn="ctr"/>
+          </a:p>
+        </p:txBody>
+      </p:sp>
+      <p:sp>
+        <p:nvSpPr>
+          <p:cNvPr id="54" name="TextBox 53"/>
+          <p:cNvSpPr txBox="1"/>
+          <p:nvPr/>
+        </p:nvSpPr>
+        <p:spPr>
+          <a:xfrm>
+            <a:off x="9829800" y="3749039"/>
+            <a:ext cx="2103120" cy="256032"/>
+          </a:xfrm>
+          <a:prstGeom prst="rect">
+            <a:avLst/>
+          </a:prstGeom>
+          <a:noFill/>
+        </p:spPr>
+        <p:txBody>
+          <a:bodyPr wrap="square">
+            <a:spAutoFit/>
+          </a:bodyPr>
+          <a:lstStyle/>
+          <a:p>
+            <a:pPr algn="ctr"/>
+            <a:r>
+              <a:rPr sz="1200" b="0" i="0">
+                <a:solidFill>
+                  <a:srgbClr val="1A1A2E"/>
+                </a:solidFill>
+              </a:rPr>
+              <a:t>$2.29 / 15oz</a:t>
+            </a:r>
+          </a:p>
+        </p:txBody>
+      </p:sp>
+      <p:sp>
+        <p:nvSpPr>
+          <p:cNvPr id="55" name="Rectangle 54"/>
+          <p:cNvSpPr/>
+          <p:nvPr/>
+        </p:nvSpPr>
+        <p:spPr>
+          <a:xfrm>
+            <a:off x="11978640" y="3703320"/>
+            <a:ext cx="731520" cy="347472"/>
+          </a:xfrm>
+          <a:prstGeom prst="rect">
+            <a:avLst/>
+          </a:prstGeom>
+          <a:solidFill>
+            <a:srgbClr val="F4F9F4"/>
+          </a:solidFill>
+          <a:ln w="19050">
+            <a:solidFill>
+              <a:srgbClr val="CCCCCC"/>
+            </a:solidFill>
+          </a:ln>
+        </p:spPr>
+        <p:style>
+          <a:lnRef idx="1">
+            <a:schemeClr val="accent1"/>
+          </a:lnRef>
+          <a:fillRef idx="3">
+            <a:schemeClr val="accent1"/>
+          </a:fillRef>
+          <a:effectRef idx="2">
+            <a:schemeClr val="accent1"/>
+          </a:effectRef>
+          <a:fontRef idx="minor">
+            <a:schemeClr val="lt1"/>
+          </a:fontRef>
+        </p:style>
+        <p:txBody>
+          <a:bodyPr rtlCol="0" anchor="ctr"/>
+          <a:lstStyle/>
+          <a:p>
+            <a:pPr algn="ctr"/>
+          </a:p>
+        </p:txBody>
+      </p:sp>
+      <p:sp>
+        <p:nvSpPr>
+          <p:cNvPr id="56" name="TextBox 55"/>
+          <p:cNvSpPr txBox="1"/>
+          <p:nvPr/>
+        </p:nvSpPr>
+        <p:spPr>
+          <a:xfrm>
+            <a:off x="12024360" y="3749039"/>
+            <a:ext cx="640080" cy="256032"/>
+          </a:xfrm>
+          <a:prstGeom prst="rect">
+            <a:avLst/>
+          </a:prstGeom>
+          <a:noFill/>
+        </p:spPr>
+        <p:txBody>
+          <a:bodyPr wrap="square">
+            <a:spAutoFit/>
+          </a:bodyPr>
+          <a:lstStyle/>
+          <a:p>
+            <a:pPr algn="ctr"/>
+            <a:r>
+              <a:rPr sz="1200" b="0" i="0">
+                <a:solidFill>
+                  <a:srgbClr val="1A1A2E"/>
+                </a:solidFill>
+              </a:rPr>
+              <a:t>+131%</a:t>
+            </a:r>
+          </a:p>
+        </p:txBody>
+      </p:sp>
+      <p:sp>
+        <p:nvSpPr>
+          <p:cNvPr id="57" name="TextBox 56"/>
+          <p:cNvSpPr txBox="1"/>
+          <p:nvPr/>
+        </p:nvSpPr>
+        <p:spPr>
+          <a:xfrm>
+            <a:off x="6217920" y="4709160"/>
+            <a:ext cx="5577840" cy="777240"/>
+          </a:xfrm>
+          <a:prstGeom prst="rect">
+            <a:avLst/>
+          </a:prstGeom>
+          <a:noFill/>
+        </p:spPr>
+        <p:txBody>
+          <a:bodyPr wrap="square">
+            <a:spAutoFit/>
+          </a:bodyPr>
+          <a:lstStyle/>
+          <a:p>
+            <a:pPr algn="l"/>
+            <a:r>
+              <a:rPr sz="1300" b="0" i="0">
+                <a:solidFill>
+                  <a:srgbClr val="555555"/>
+                </a:solidFill>
+              </a:rPr>
+              <a:t>Instacart prices are generally higher for organic variants.
+Bio-Sync automatically selects the cheapest plan that satisfies budget — making the pricing source choice transparent to the user.</a:t>
+            </a:r>
+          </a:p>
+        </p:txBody>
+      </p:sp>
+    </p:spTree>
+  </p:cSld>
+  <p:clrMapOvr>
+    <a:masterClrMapping/>
+  </p:clrMapOvr>
+</p:sld>
+</file>
+
+<file path=ppt/slides/slide12.xml><?xml version="1.0" encoding="utf-8"?>
+<p:sld xmlns:a="http://schemas.openxmlformats.org/drawingml/2006/main" xmlns:p="http://schemas.openxmlformats.org/presentationml/2006/main" xmlns:r="http://schemas.openxmlformats.org/officeDocument/2006/relationships">
+  <p:cSld>
+    <p:spTree>
+      <p:nvGrpSpPr>
+        <p:cNvPr id="1" name=""/>
+        <p:cNvGrpSpPr/>
+        <p:nvPr/>
+      </p:nvGrpSpPr>
+      <p:grpSpPr/>
+      <p:sp>
+        <p:nvSpPr>
+          <p:cNvPr id="2" name="Rectangle 1"/>
+          <p:cNvSpPr/>
+          <p:nvPr/>
+        </p:nvSpPr>
+        <p:spPr>
+          <a:xfrm>
+            <a:off x="0" y="0"/>
+            <a:ext cx="12188952" cy="6858000"/>
+          </a:xfrm>
+          <a:prstGeom prst="rect">
+            <a:avLst/>
+          </a:prstGeom>
+          <a:solidFill>
+            <a:srgbClr val="F4F9F4"/>
+          </a:solidFill>
+          <a:ln>
+            <a:noFill/>
+          </a:ln>
+        </p:spPr>
+        <p:style>
+          <a:lnRef idx="1">
+            <a:schemeClr val="accent1"/>
+          </a:lnRef>
+          <a:fillRef idx="3">
+            <a:schemeClr val="accent1"/>
+          </a:fillRef>
+          <a:effectRef idx="2">
+            <a:schemeClr val="accent1"/>
+          </a:effectRef>
+          <a:fontRef idx="minor">
+            <a:schemeClr val="lt1"/>
+          </a:fontRef>
+        </p:style>
+        <p:txBody>
+          <a:bodyPr rtlCol="0" anchor="ctr"/>
+          <a:lstStyle/>
+          <a:p>
+            <a:pPr algn="ctr"/>
+          </a:p>
+        </p:txBody>
+      </p:sp>
+      <p:sp>
+        <p:nvSpPr>
+          <p:cNvPr id="3" name="Rectangle 2"/>
+          <p:cNvSpPr/>
+          <p:nvPr/>
+        </p:nvSpPr>
+        <p:spPr>
+          <a:xfrm>
+            <a:off x="0" y="0"/>
+            <a:ext cx="12188952" cy="1371600"/>
+          </a:xfrm>
+          <a:prstGeom prst="rect">
+            <a:avLst/>
+          </a:prstGeom>
+          <a:solidFill>
+            <a:srgbClr val="2E8648"/>
+          </a:solidFill>
+          <a:ln>
+            <a:noFill/>
+          </a:ln>
+        </p:spPr>
+        <p:style>
+          <a:lnRef idx="1">
+            <a:schemeClr val="accent1"/>
+          </a:lnRef>
+          <a:fillRef idx="3">
+            <a:schemeClr val="accent1"/>
+          </a:fillRef>
+          <a:effectRef idx="2">
+            <a:schemeClr val="accent1"/>
+          </a:effectRef>
+          <a:fontRef idx="minor">
+            <a:schemeClr val="lt1"/>
+          </a:fontRef>
+        </p:style>
+        <p:txBody>
+          <a:bodyPr rtlCol="0" anchor="ctr"/>
+          <a:lstStyle/>
+          <a:p>
+            <a:pPr algn="ctr"/>
+          </a:p>
+        </p:txBody>
+      </p:sp>
+      <p:sp>
+        <p:nvSpPr>
+          <p:cNvPr id="4" name="TextBox 3"/>
+          <p:cNvSpPr txBox="1"/>
+          <p:nvPr/>
+        </p:nvSpPr>
+        <p:spPr>
+          <a:xfrm>
+            <a:off x="365760" y="137160"/>
+            <a:ext cx="11430000" cy="731520"/>
+          </a:xfrm>
+          <a:prstGeom prst="rect">
+            <a:avLst/>
+          </a:prstGeom>
+          <a:noFill/>
+        </p:spPr>
+        <p:txBody>
+          <a:bodyPr wrap="square">
+            <a:spAutoFit/>
+          </a:bodyPr>
+          <a:lstStyle/>
+          <a:p>
+            <a:pPr algn="l"/>
+            <a:r>
+              <a:rPr sz="3200" b="1" i="0">
+                <a:solidFill>
+                  <a:srgbClr val="FFFFFF"/>
+                </a:solidFill>
+              </a:rPr>
+              <a:t>Next Steps</a:t>
+            </a:r>
+          </a:p>
+        </p:txBody>
+      </p:sp>
+      <p:sp>
+        <p:nvSpPr>
+          <p:cNvPr id="5" name="TextBox 4"/>
+          <p:cNvSpPr txBox="1"/>
+          <p:nvPr/>
+        </p:nvSpPr>
+        <p:spPr>
+          <a:xfrm>
+            <a:off x="365760" y="822960"/>
+            <a:ext cx="11430000" cy="457200"/>
+          </a:xfrm>
+          <a:prstGeom prst="rect">
+            <a:avLst/>
+          </a:prstGeom>
+          <a:noFill/>
+        </p:spPr>
+        <p:txBody>
+          <a:bodyPr wrap="square">
+            <a:spAutoFit/>
+          </a:bodyPr>
+          <a:lstStyle/>
+          <a:p>
+            <a:pPr algn="l"/>
+            <a:r>
+              <a:rPr sz="1600" b="0" i="0">
+                <a:solidFill>
+                  <a:srgbClr val="CCFFCC"/>
+                </a:solidFill>
+              </a:rPr>
+              <a:t>Where Bio-Sync goes from here</a:t>
+            </a:r>
+          </a:p>
+        </p:txBody>
+      </p:sp>
+      <p:sp>
+        <p:nvSpPr>
+          <p:cNvPr id="6" name="Rectangle 5"/>
+          <p:cNvSpPr/>
+          <p:nvPr/>
+        </p:nvSpPr>
+        <p:spPr>
+          <a:xfrm>
+            <a:off x="457200" y="1600200"/>
+            <a:ext cx="5120640" cy="1325880"/>
+          </a:xfrm>
+          <a:prstGeom prst="rect">
+            <a:avLst/>
+          </a:prstGeom>
+          <a:solidFill>
+            <a:srgbClr val="FFFFFF"/>
+          </a:solidFill>
+          <a:ln w="19050">
+            <a:solidFill>
+              <a:srgbClr val="2E8648"/>
+            </a:solidFill>
+          </a:ln>
+        </p:spPr>
+        <p:style>
+          <a:lnRef idx="1">
+            <a:schemeClr val="accent1"/>
+          </a:lnRef>
+          <a:fillRef idx="3">
+            <a:schemeClr val="accent1"/>
+          </a:fillRef>
+          <a:effectRef idx="2">
+            <a:schemeClr val="accent1"/>
+          </a:effectRef>
+          <a:fontRef idx="minor">
+            <a:schemeClr val="lt1"/>
+          </a:fontRef>
+        </p:style>
+        <p:txBody>
+          <a:bodyPr rtlCol="0" anchor="ctr"/>
+          <a:lstStyle/>
+          <a:p>
+            <a:pPr algn="ctr"/>
+          </a:p>
+        </p:txBody>
+      </p:sp>
+      <p:sp>
+        <p:nvSpPr>
+          <p:cNvPr id="7" name="TextBox 6"/>
+          <p:cNvSpPr txBox="1"/>
+          <p:nvPr/>
+        </p:nvSpPr>
+        <p:spPr>
+          <a:xfrm>
+            <a:off x="594360" y="1673352"/>
+            <a:ext cx="4846320" cy="320040"/>
+          </a:xfrm>
+          <a:prstGeom prst="rect">
+            <a:avLst/>
+          </a:prstGeom>
+          <a:noFill/>
+        </p:spPr>
+        <p:txBody>
+          <a:bodyPr wrap="square">
+            <a:spAutoFit/>
+          </a:bodyPr>
+          <a:lstStyle/>
+          <a:p>
+            <a:pPr algn="l"/>
+            <a:r>
+              <a:rPr sz="1400" b="1" i="0">
+                <a:solidFill>
+                  <a:srgbClr val="2E8648"/>
+                </a:solidFill>
+              </a:rPr>
+              <a:t>1. Multi-Turn Revision Dialogue</a:t>
+            </a:r>
+          </a:p>
+        </p:txBody>
+      </p:sp>
+      <p:sp>
+        <p:nvSpPr>
+          <p:cNvPr id="8" name="TextBox 7"/>
+          <p:cNvSpPr txBox="1"/>
+          <p:nvPr/>
+        </p:nvSpPr>
+        <p:spPr>
+          <a:xfrm>
+            <a:off x="594360" y="2011680"/>
+            <a:ext cx="4846320" cy="822960"/>
+          </a:xfrm>
+          <a:prstGeom prst="rect">
+            <a:avLst/>
+          </a:prstGeom>
+          <a:noFill/>
+        </p:spPr>
+        <p:txBody>
+          <a:bodyPr wrap="square">
+            <a:spAutoFit/>
+          </a:bodyPr>
+          <a:lstStyle/>
+          <a:p>
+            <a:pPr algn="l"/>
+            <a:r>
+              <a:rPr sz="1200" b="0" i="0">
+                <a:solidFill>
+                  <a:srgbClr val="1A1A2E"/>
+                </a:solidFill>
+              </a:rPr>
+              <a:t>User revision is implemented (one round). Next: full multi-turn dialogue — "I hate olives" → revised plan → "also make breakfast cheaper" → revised again.</a:t>
+            </a:r>
+          </a:p>
+        </p:txBody>
+      </p:sp>
+      <p:sp>
+        <p:nvSpPr>
+          <p:cNvPr id="9" name="Rectangle 8"/>
+          <p:cNvSpPr/>
+          <p:nvPr/>
+        </p:nvSpPr>
+        <p:spPr>
+          <a:xfrm>
+            <a:off x="6400800" y="1600200"/>
+            <a:ext cx="5120640" cy="1325880"/>
+          </a:xfrm>
+          <a:prstGeom prst="rect">
+            <a:avLst/>
+          </a:prstGeom>
+          <a:solidFill>
+            <a:srgbClr val="FFFFFF"/>
+          </a:solidFill>
+          <a:ln w="19050">
+            <a:solidFill>
+              <a:srgbClr val="2E8648"/>
+            </a:solidFill>
+          </a:ln>
+        </p:spPr>
+        <p:style>
+          <a:lnRef idx="1">
+            <a:schemeClr val="accent1"/>
+          </a:lnRef>
+          <a:fillRef idx="3">
+            <a:schemeClr val="accent1"/>
+          </a:fillRef>
+          <a:effectRef idx="2">
+            <a:schemeClr val="accent1"/>
+          </a:effectRef>
+          <a:fontRef idx="minor">
+            <a:schemeClr val="lt1"/>
+          </a:fontRef>
+        </p:style>
+        <p:txBody>
+          <a:bodyPr rtlCol="0" anchor="ctr"/>
+          <a:lstStyle/>
+          <a:p>
+            <a:pPr algn="ctr"/>
+          </a:p>
+        </p:txBody>
+      </p:sp>
+      <p:sp>
+        <p:nvSpPr>
+          <p:cNvPr id="10" name="TextBox 9"/>
+          <p:cNvSpPr txBox="1"/>
+          <p:nvPr/>
+        </p:nvSpPr>
+        <p:spPr>
+          <a:xfrm>
+            <a:off x="6537960" y="1673352"/>
+            <a:ext cx="4846320" cy="320040"/>
+          </a:xfrm>
+          <a:prstGeom prst="rect">
+            <a:avLst/>
+          </a:prstGeom>
+          <a:noFill/>
+        </p:spPr>
+        <p:txBody>
+          <a:bodyPr wrap="square">
+            <a:spAutoFit/>
+          </a:bodyPr>
+          <a:lstStyle/>
+          <a:p>
+            <a:pPr algn="l"/>
+            <a:r>
+              <a:rPr sz="1400" b="1" i="0">
+                <a:solidFill>
+                  <a:srgbClr val="2E8648"/>
+                </a:solidFill>
+              </a:rPr>
+              <a:t>2. Clarification During Wait</a:t>
+            </a:r>
+          </a:p>
+        </p:txBody>
+      </p:sp>
+      <p:sp>
+        <p:nvSpPr>
+          <p:cNvPr id="11" name="TextBox 10"/>
+          <p:cNvSpPr txBox="1"/>
+          <p:nvPr/>
+        </p:nvSpPr>
+        <p:spPr>
+          <a:xfrm>
+            <a:off x="6537960" y="2011680"/>
+            <a:ext cx="4846320" cy="822960"/>
+          </a:xfrm>
+          <a:prstGeom prst="rect">
+            <a:avLst/>
+          </a:prstGeom>
+          <a:noFill/>
+        </p:spPr>
+        <p:txBody>
+          <a:bodyPr wrap="square">
+            <a:spAutoFit/>
+          </a:bodyPr>
+          <a:lstStyle/>
+          <a:p>
+            <a:pPr algn="l"/>
+            <a:r>
+              <a:rPr sz="1200" b="0" i="0">
+                <a:solidFill>
+                  <a:srgbClr val="1A1A2E"/>
+                </a:solidFill>
+              </a:rPr>
+              <a:t>Ask the user a disambiguation question while the plan generates: "Is 'basmati brown rice' the same as 'brown rice' for your purposes?"</a:t>
+            </a:r>
+          </a:p>
+        </p:txBody>
+      </p:sp>
+      <p:sp>
+        <p:nvSpPr>
+          <p:cNvPr id="12" name="Rectangle 11"/>
+          <p:cNvSpPr/>
+          <p:nvPr/>
+        </p:nvSpPr>
+        <p:spPr>
+          <a:xfrm>
+            <a:off x="457200" y="3108960"/>
+            <a:ext cx="5120640" cy="1325880"/>
+          </a:xfrm>
+          <a:prstGeom prst="rect">
+            <a:avLst/>
+          </a:prstGeom>
+          <a:solidFill>
+            <a:srgbClr val="FFFFFF"/>
+          </a:solidFill>
+          <a:ln w="19050">
+            <a:solidFill>
+              <a:srgbClr val="2E8648"/>
+            </a:solidFill>
+          </a:ln>
+        </p:spPr>
+        <p:style>
+          <a:lnRef idx="1">
+            <a:schemeClr val="accent1"/>
+          </a:lnRef>
+          <a:fillRef idx="3">
+            <a:schemeClr val="accent1"/>
+          </a:fillRef>
+          <a:effectRef idx="2">
+            <a:schemeClr val="accent1"/>
+          </a:effectRef>
+          <a:fontRef idx="minor">
+            <a:schemeClr val="lt1"/>
+          </a:fontRef>
+        </p:style>
+        <p:txBody>
+          <a:bodyPr rtlCol="0" anchor="ctr"/>
+          <a:lstStyle/>
+          <a:p>
+            <a:pPr algn="ctr"/>
+          </a:p>
+        </p:txBody>
+      </p:sp>
+      <p:sp>
+        <p:nvSpPr>
+          <p:cNvPr id="13" name="TextBox 12"/>
+          <p:cNvSpPr txBox="1"/>
+          <p:nvPr/>
+        </p:nvSpPr>
+        <p:spPr>
+          <a:xfrm>
+            <a:off x="594360" y="3182112"/>
+            <a:ext cx="4846320" cy="320040"/>
+          </a:xfrm>
+          <a:prstGeom prst="rect">
+            <a:avLst/>
+          </a:prstGeom>
+          <a:noFill/>
+        </p:spPr>
+        <p:txBody>
+          <a:bodyPr wrap="square">
+            <a:spAutoFit/>
+          </a:bodyPr>
+          <a:lstStyle/>
+          <a:p>
+            <a:pPr algn="l"/>
+            <a:r>
+              <a:rPr sz="1400" b="1" i="0">
+                <a:solidFill>
+                  <a:srgbClr val="2E8648"/>
+                </a:solidFill>
+              </a:rPr>
+              <a:t>3. Memory Across Sessions</a:t>
+            </a:r>
+          </a:p>
+        </p:txBody>
+      </p:sp>
+      <p:sp>
+        <p:nvSpPr>
+          <p:cNvPr id="14" name="TextBox 13"/>
+          <p:cNvSpPr txBox="1"/>
+          <p:nvPr/>
+        </p:nvSpPr>
+        <p:spPr>
+          <a:xfrm>
+            <a:off x="594360" y="3520440"/>
+            <a:ext cx="4846320" cy="822960"/>
+          </a:xfrm>
+          <a:prstGeom prst="rect">
+            <a:avLst/>
+          </a:prstGeom>
+          <a:noFill/>
+        </p:spPr>
+        <p:txBody>
+          <a:bodyPr wrap="square">
+            <a:spAutoFit/>
+          </a:bodyPr>
+          <a:lstStyle/>
+          <a:p>
+            <a:pPr algn="l"/>
+            <a:r>
+              <a:rPr sz="1200" b="0" i="0">
+                <a:solidFill>
+                  <a:srgbClr val="1A1A2E"/>
+                </a:solidFill>
+              </a:rPr>
+              <a:t>Track what you've eaten before. Enforce variety across days and weeks, not just within a single plan. Store preferences persistently.</a:t>
+            </a:r>
+          </a:p>
+        </p:txBody>
+      </p:sp>
+      <p:sp>
+        <p:nvSpPr>
+          <p:cNvPr id="15" name="Rectangle 14"/>
+          <p:cNvSpPr/>
+          <p:nvPr/>
+        </p:nvSpPr>
+        <p:spPr>
+          <a:xfrm>
+            <a:off x="6400800" y="3108960"/>
+            <a:ext cx="5120640" cy="1325880"/>
+          </a:xfrm>
+          <a:prstGeom prst="rect">
+            <a:avLst/>
+          </a:prstGeom>
+          <a:solidFill>
+            <a:srgbClr val="FFFFFF"/>
+          </a:solidFill>
+          <a:ln w="19050">
+            <a:solidFill>
+              <a:srgbClr val="2E8648"/>
+            </a:solidFill>
+          </a:ln>
+        </p:spPr>
+        <p:style>
+          <a:lnRef idx="1">
+            <a:schemeClr val="accent1"/>
+          </a:lnRef>
+          <a:fillRef idx="3">
+            <a:schemeClr val="accent1"/>
+          </a:fillRef>
+          <a:effectRef idx="2">
+            <a:schemeClr val="accent1"/>
+          </a:effectRef>
+          <a:fontRef idx="minor">
+            <a:schemeClr val="lt1"/>
+          </a:fontRef>
+        </p:style>
+        <p:txBody>
+          <a:bodyPr rtlCol="0" anchor="ctr"/>
+          <a:lstStyle/>
+          <a:p>
+            <a:pPr algn="ctr"/>
+          </a:p>
+        </p:txBody>
+      </p:sp>
+      <p:sp>
+        <p:nvSpPr>
+          <p:cNvPr id="16" name="TextBox 15"/>
+          <p:cNvSpPr txBox="1"/>
+          <p:nvPr/>
+        </p:nvSpPr>
+        <p:spPr>
+          <a:xfrm>
+            <a:off x="6537960" y="3182112"/>
+            <a:ext cx="4846320" cy="320040"/>
+          </a:xfrm>
+          <a:prstGeom prst="rect">
+            <a:avLst/>
+          </a:prstGeom>
+          <a:noFill/>
+        </p:spPr>
+        <p:txBody>
+          <a:bodyPr wrap="square">
+            <a:spAutoFit/>
+          </a:bodyPr>
+          <a:lstStyle/>
+          <a:p>
+            <a:pPr algn="l"/>
+            <a:r>
+              <a:rPr sz="1400" b="1" i="0">
+                <a:solidFill>
+                  <a:srgbClr val="2E8648"/>
+                </a:solidFill>
+              </a:rPr>
+              <a:t>4. Richer Anti-Example Prompting</a:t>
+            </a:r>
+          </a:p>
+        </p:txBody>
+      </p:sp>
+      <p:sp>
+        <p:nvSpPr>
+          <p:cNvPr id="17" name="TextBox 16"/>
+          <p:cNvSpPr txBox="1"/>
+          <p:nvPr/>
+        </p:nvSpPr>
+        <p:spPr>
+          <a:xfrm>
+            <a:off x="6537960" y="3520440"/>
+            <a:ext cx="4846320" cy="822960"/>
+          </a:xfrm>
+          <a:prstGeom prst="rect">
+            <a:avLst/>
+          </a:prstGeom>
+          <a:noFill/>
+        </p:spPr>
+        <p:txBody>
+          <a:bodyPr wrap="square">
+            <a:spAutoFit/>
+          </a:bodyPr>
+          <a:lstStyle/>
+          <a:p>
+            <a:pPr algn="l"/>
+            <a:r>
+              <a:rPr sz="1200" b="0" i="0">
+                <a:solidFill>
+                  <a:srgbClr val="1A1A2E"/>
+                </a:solidFill>
+              </a:rPr>
+              <a:t>Currently the failing plan JSON is passed back to the Planner. Next: pass a structured summary of which specific patterns failed for richer revision signal.</a:t>
+            </a:r>
+          </a:p>
+        </p:txBody>
+      </p:sp>
+      <p:sp>
+        <p:nvSpPr>
+          <p:cNvPr id="18" name="Rectangle 17"/>
+          <p:cNvSpPr/>
+          <p:nvPr/>
+        </p:nvSpPr>
+        <p:spPr>
+          <a:xfrm>
+            <a:off x="3429000" y="4617720"/>
+            <a:ext cx="5120640" cy="1325880"/>
+          </a:xfrm>
+          <a:prstGeom prst="rect">
+            <a:avLst/>
+          </a:prstGeom>
+          <a:solidFill>
+            <a:srgbClr val="FFFFFF"/>
+          </a:solidFill>
+          <a:ln w="19050">
+            <a:solidFill>
+              <a:srgbClr val="2E8648"/>
+            </a:solidFill>
+          </a:ln>
+        </p:spPr>
+        <p:style>
+          <a:lnRef idx="1">
+            <a:schemeClr val="accent1"/>
+          </a:lnRef>
+          <a:fillRef idx="3">
+            <a:schemeClr val="accent1"/>
+          </a:fillRef>
+          <a:effectRef idx="2">
+            <a:schemeClr val="accent1"/>
+          </a:effectRef>
+          <a:fontRef idx="minor">
+            <a:schemeClr val="lt1"/>
+          </a:fontRef>
+        </p:style>
+        <p:txBody>
+          <a:bodyPr rtlCol="0" anchor="ctr"/>
+          <a:lstStyle/>
+          <a:p>
+            <a:pPr algn="ctr"/>
+          </a:p>
+        </p:txBody>
+      </p:sp>
+      <p:sp>
+        <p:nvSpPr>
           <p:cNvPr id="19" name="TextBox 18"/>
+          <p:cNvSpPr txBox="1"/>
+          <p:nvPr/>
+        </p:nvSpPr>
+        <p:spPr>
+          <a:xfrm>
+            <a:off x="3566160" y="4690872"/>
+            <a:ext cx="4846320" cy="320040"/>
+          </a:xfrm>
+          <a:prstGeom prst="rect">
+            <a:avLst/>
+          </a:prstGeom>
+          <a:noFill/>
+        </p:spPr>
+        <p:txBody>
+          <a:bodyPr wrap="square">
+            <a:spAutoFit/>
+          </a:bodyPr>
+          <a:lstStyle/>
+          <a:p>
+            <a:pPr algn="l"/>
+            <a:r>
+              <a:rPr sz="1400" b="1" i="0">
+                <a:solidFill>
+                  <a:srgbClr val="2E8648"/>
+                </a:solidFill>
+              </a:rPr>
+              <a:t>5. Variety Improvement</a:t>
+            </a:r>
+          </a:p>
+        </p:txBody>
+      </p:sp>
+      <p:sp>
+        <p:nvSpPr>
+          <p:cNvPr id="20" name="TextBox 19"/>
+          <p:cNvSpPr txBox="1"/>
+          <p:nvPr/>
+        </p:nvSpPr>
+        <p:spPr>
+          <a:xfrm>
+            <a:off x="3566160" y="5029200"/>
+            <a:ext cx="4846320" cy="822960"/>
+          </a:xfrm>
+          <a:prstGeom prst="rect">
+            <a:avLst/>
+          </a:prstGeom>
+          <a:noFill/>
+        </p:spPr>
+        <p:txBody>
+          <a:bodyPr wrap="square">
+            <a:spAutoFit/>
+          </a:bodyPr>
+          <a:lstStyle/>
+          <a:p>
+            <a:pPr algn="l"/>
+            <a:r>
+              <a:rPr sz="1200" b="0" i="0">
+                <a:solidFill>
+                  <a:srgbClr val="1A1A2E"/>
+                </a:solidFill>
+              </a:rPr>
+              <a:t>Lowest-rated human dimension (3.70/5). Explicitly track used meal structures across iterations and block repetition in the Planner prompt.</a:t>
+            </a:r>
+          </a:p>
+        </p:txBody>
+      </p:sp>
+    </p:spTree>
+  </p:cSld>
+  <p:clrMapOvr>
+    <a:masterClrMapping/>
+  </p:clrMapOvr>
+</p:sld>
+</file>
+
+<file path=ppt/slides/slide13.xml><?xml version="1.0" encoding="utf-8"?>
+<p:sld xmlns:a="http://schemas.openxmlformats.org/drawingml/2006/main" xmlns:p="http://schemas.openxmlformats.org/presentationml/2006/main" xmlns:r="http://schemas.openxmlformats.org/officeDocument/2006/relationships">
+  <p:cSld>
+    <p:spTree>
+      <p:nvGrpSpPr>
+        <p:cNvPr id="1" name=""/>
+        <p:cNvGrpSpPr/>
+        <p:nvPr/>
+      </p:nvGrpSpPr>
+      <p:grpSpPr/>
+      <p:sp>
+        <p:nvSpPr>
+          <p:cNvPr id="2" name="Rectangle 1"/>
+          <p:cNvSpPr/>
+          <p:nvPr/>
+        </p:nvSpPr>
+        <p:spPr>
+          <a:xfrm>
+            <a:off x="0" y="0"/>
+            <a:ext cx="12188952" cy="6858000"/>
+          </a:xfrm>
+          <a:prstGeom prst="rect">
+            <a:avLst/>
+          </a:prstGeom>
+          <a:solidFill>
+            <a:srgbClr val="1A1A2E"/>
+          </a:solidFill>
+          <a:ln>
+            <a:noFill/>
+          </a:ln>
+        </p:spPr>
+        <p:style>
+          <a:lnRef idx="1">
+            <a:schemeClr val="accent1"/>
+          </a:lnRef>
+          <a:fillRef idx="3">
+            <a:schemeClr val="accent1"/>
+          </a:fillRef>
+          <a:effectRef idx="2">
+            <a:schemeClr val="accent1"/>
+          </a:effectRef>
+          <a:fontRef idx="minor">
+            <a:schemeClr val="lt1"/>
+          </a:fontRef>
+        </p:style>
+        <p:txBody>
+          <a:bodyPr rtlCol="0" anchor="ctr"/>
+          <a:lstStyle/>
+          <a:p>
+            <a:pPr algn="ctr"/>
+          </a:p>
+        </p:txBody>
+      </p:sp>
+      <p:sp>
+        <p:nvSpPr>
+          <p:cNvPr id="3" name="Rectangle 2"/>
+          <p:cNvSpPr/>
+          <p:nvPr/>
+        </p:nvSpPr>
+        <p:spPr>
+          <a:xfrm>
+            <a:off x="0" y="0"/>
+            <a:ext cx="12188952" cy="1371600"/>
+          </a:xfrm>
+          <a:prstGeom prst="rect">
+            <a:avLst/>
+          </a:prstGeom>
+          <a:solidFill>
+            <a:srgbClr val="2E8648"/>
+          </a:solidFill>
+          <a:ln>
+            <a:noFill/>
+          </a:ln>
+        </p:spPr>
+        <p:style>
+          <a:lnRef idx="1">
+            <a:schemeClr val="accent1"/>
+          </a:lnRef>
+          <a:fillRef idx="3">
+            <a:schemeClr val="accent1"/>
+          </a:fillRef>
+          <a:effectRef idx="2">
+            <a:schemeClr val="accent1"/>
+          </a:effectRef>
+          <a:fontRef idx="minor">
+            <a:schemeClr val="lt1"/>
+          </a:fontRef>
+        </p:style>
+        <p:txBody>
+          <a:bodyPr rtlCol="0" anchor="ctr"/>
+          <a:lstStyle/>
+          <a:p>
+            <a:pPr algn="ctr"/>
+          </a:p>
+        </p:txBody>
+      </p:sp>
+      <p:sp>
+        <p:nvSpPr>
+          <p:cNvPr id="4" name="TextBox 3"/>
+          <p:cNvSpPr txBox="1"/>
+          <p:nvPr/>
+        </p:nvSpPr>
+        <p:spPr>
+          <a:xfrm>
+            <a:off x="457200" y="137160"/>
+            <a:ext cx="11247120" cy="1005840"/>
+          </a:xfrm>
+          <a:prstGeom prst="rect">
+            <a:avLst/>
+          </a:prstGeom>
+          <a:noFill/>
+        </p:spPr>
+        <p:txBody>
+          <a:bodyPr wrap="square">
+            <a:spAutoFit/>
+          </a:bodyPr>
+          <a:lstStyle/>
+          <a:p>
+            <a:pPr algn="ctr"/>
+            <a:r>
+              <a:rPr sz="3200" b="1" i="0">
+                <a:solidFill>
+                  <a:srgbClr val="FFFFFF"/>
+                </a:solidFill>
+              </a:rPr>
+              <a:t>Bio-Sync: Key Takeaways</a:t>
+            </a:r>
+          </a:p>
+        </p:txBody>
+      </p:sp>
+      <p:sp>
+        <p:nvSpPr>
+          <p:cNvPr id="5" name="Rectangle 4"/>
+          <p:cNvSpPr/>
+          <p:nvPr/>
+        </p:nvSpPr>
+        <p:spPr>
+          <a:xfrm>
+            <a:off x="320040" y="1645920"/>
+            <a:ext cx="2103120" cy="2194560"/>
+          </a:xfrm>
+          <a:prstGeom prst="rect">
+            <a:avLst/>
+          </a:prstGeom>
+          <a:solidFill>
+            <a:srgbClr val="2E8648"/>
+          </a:solidFill>
+          <a:ln>
+            <a:noFill/>
+          </a:ln>
+        </p:spPr>
+        <p:style>
+          <a:lnRef idx="1">
+            <a:schemeClr val="accent1"/>
+          </a:lnRef>
+          <a:fillRef idx="3">
+            <a:schemeClr val="accent1"/>
+          </a:fillRef>
+          <a:effectRef idx="2">
+            <a:schemeClr val="accent1"/>
+          </a:effectRef>
+          <a:fontRef idx="minor">
+            <a:schemeClr val="lt1"/>
+          </a:fontRef>
+        </p:style>
+        <p:txBody>
+          <a:bodyPr rtlCol="0" anchor="ctr"/>
+          <a:lstStyle/>
+          <a:p>
+            <a:pPr algn="ctr"/>
+          </a:p>
+        </p:txBody>
+      </p:sp>
+      <p:sp>
+        <p:nvSpPr>
+          <p:cNvPr id="6" name="TextBox 5"/>
+          <p:cNvSpPr txBox="1"/>
+          <p:nvPr/>
+        </p:nvSpPr>
+        <p:spPr>
+          <a:xfrm>
+            <a:off x="393192" y="1783080"/>
+            <a:ext cx="1965960" cy="731520"/>
+          </a:xfrm>
+          <a:prstGeom prst="rect">
+            <a:avLst/>
+          </a:prstGeom>
+          <a:noFill/>
+        </p:spPr>
+        <p:txBody>
+          <a:bodyPr wrap="square">
+            <a:spAutoFit/>
+          </a:bodyPr>
+          <a:lstStyle/>
+          <a:p>
+            <a:pPr algn="ctr"/>
+            <a:r>
+              <a:rPr sz="1800" b="1" i="0">
+                <a:solidFill>
+                  <a:srgbClr val="FFFFFF"/>
+                </a:solidFill>
+              </a:rPr>
+              <a:t>Budget 100%</a:t>
+            </a:r>
+          </a:p>
+        </p:txBody>
+      </p:sp>
+      <p:sp>
+        <p:nvSpPr>
+          <p:cNvPr id="7" name="TextBox 6"/>
+          <p:cNvSpPr txBox="1"/>
+          <p:nvPr/>
+        </p:nvSpPr>
+        <p:spPr>
+          <a:xfrm>
+            <a:off x="393192" y="2468880"/>
+            <a:ext cx="1965960" cy="822960"/>
+          </a:xfrm>
+          <a:prstGeom prst="rect">
+            <a:avLst/>
+          </a:prstGeom>
+          <a:noFill/>
+        </p:spPr>
+        <p:txBody>
+          <a:bodyPr wrap="square">
+            <a:spAutoFit/>
+          </a:bodyPr>
+          <a:lstStyle/>
+          <a:p>
+            <a:pPr algn="ctr"/>
+            <a:r>
+              <a:rPr sz="1100" b="0" i="0">
+                <a:solidFill>
+                  <a:srgbClr val="CCFFCC"/>
+                </a:solidFill>
+              </a:rPr>
+              <a:t>Hard constraint satisfied
+across all 50 profiles</a:t>
+            </a:r>
+          </a:p>
+        </p:txBody>
+      </p:sp>
+      <p:sp>
+        <p:nvSpPr>
+          <p:cNvPr id="8" name="Rectangle 7"/>
+          <p:cNvSpPr/>
+          <p:nvPr/>
+        </p:nvSpPr>
+        <p:spPr>
+          <a:xfrm>
+            <a:off x="2651760" y="1645920"/>
+            <a:ext cx="2103120" cy="2194560"/>
+          </a:xfrm>
+          <a:prstGeom prst="rect">
+            <a:avLst/>
+          </a:prstGeom>
+          <a:solidFill>
+            <a:srgbClr val="2E8648"/>
+          </a:solidFill>
+          <a:ln>
+            <a:noFill/>
+          </a:ln>
+        </p:spPr>
+        <p:style>
+          <a:lnRef idx="1">
+            <a:schemeClr val="accent1"/>
+          </a:lnRef>
+          <a:fillRef idx="3">
+            <a:schemeClr val="accent1"/>
+          </a:fillRef>
+          <a:effectRef idx="2">
+            <a:schemeClr val="accent1"/>
+          </a:effectRef>
+          <a:fontRef idx="minor">
+            <a:schemeClr val="lt1"/>
+          </a:fontRef>
+        </p:style>
+        <p:txBody>
+          <a:bodyPr rtlCol="0" anchor="ctr"/>
+          <a:lstStyle/>
+          <a:p>
+            <a:pPr algn="ctr"/>
+          </a:p>
+        </p:txBody>
+      </p:sp>
+      <p:sp>
+        <p:nvSpPr>
+          <p:cNvPr id="9" name="TextBox 8"/>
+          <p:cNvSpPr txBox="1"/>
+          <p:nvPr/>
+        </p:nvSpPr>
+        <p:spPr>
+          <a:xfrm>
+            <a:off x="2724912" y="1783080"/>
+            <a:ext cx="1965960" cy="731520"/>
+          </a:xfrm>
+          <a:prstGeom prst="rect">
+            <a:avLst/>
+          </a:prstGeom>
+          <a:noFill/>
+        </p:spPr>
+        <p:txBody>
+          <a:bodyPr wrap="square">
+            <a:spAutoFit/>
+          </a:bodyPr>
+          <a:lstStyle/>
+          <a:p>
+            <a:pPr algn="ctr"/>
+            <a:r>
+              <a:rPr sz="1800" b="1" i="0">
+                <a:solidFill>
+                  <a:srgbClr val="FFFFFF"/>
+                </a:solidFill>
+              </a:rPr>
+              <a:t>Real Data</a:t>
+            </a:r>
+          </a:p>
+        </p:txBody>
+      </p:sp>
+      <p:sp>
+        <p:nvSpPr>
+          <p:cNvPr id="10" name="TextBox 9"/>
+          <p:cNvSpPr txBox="1"/>
+          <p:nvPr/>
+        </p:nvSpPr>
+        <p:spPr>
+          <a:xfrm>
+            <a:off x="2724912" y="2468880"/>
+            <a:ext cx="1965960" cy="822960"/>
+          </a:xfrm>
+          <a:prstGeom prst="rect">
+            <a:avLst/>
+          </a:prstGeom>
+          <a:noFill/>
+        </p:spPr>
+        <p:txBody>
+          <a:bodyPr wrap="square">
+            <a:spAutoFit/>
+          </a:bodyPr>
+          <a:lstStyle/>
+          <a:p>
+            <a:pPr algn="ctr"/>
+            <a:r>
+              <a:rPr sz="1100" b="0" i="0">
+                <a:solidFill>
+                  <a:srgbClr val="CCFFCC"/>
+                </a:solidFill>
+              </a:rPr>
+              <a:t>USDA + Kroger/Instacart
+grounding — not hallucinated</a:t>
+            </a:r>
+          </a:p>
+        </p:txBody>
+      </p:sp>
+      <p:sp>
+        <p:nvSpPr>
+          <p:cNvPr id="11" name="Rectangle 10"/>
+          <p:cNvSpPr/>
+          <p:nvPr/>
+        </p:nvSpPr>
+        <p:spPr>
+          <a:xfrm>
+            <a:off x="4983479" y="1645920"/>
+            <a:ext cx="2103120" cy="2194560"/>
+          </a:xfrm>
+          <a:prstGeom prst="rect">
+            <a:avLst/>
+          </a:prstGeom>
+          <a:solidFill>
+            <a:srgbClr val="2E8648"/>
+          </a:solidFill>
+          <a:ln>
+            <a:noFill/>
+          </a:ln>
+        </p:spPr>
+        <p:style>
+          <a:lnRef idx="1">
+            <a:schemeClr val="accent1"/>
+          </a:lnRef>
+          <a:fillRef idx="3">
+            <a:schemeClr val="accent1"/>
+          </a:fillRef>
+          <a:effectRef idx="2">
+            <a:schemeClr val="accent1"/>
+          </a:effectRef>
+          <a:fontRef idx="minor">
+            <a:schemeClr val="lt1"/>
+          </a:fontRef>
+        </p:style>
+        <p:txBody>
+          <a:bodyPr rtlCol="0" anchor="ctr"/>
+          <a:lstStyle/>
+          <a:p>
+            <a:pPr algn="ctr"/>
+          </a:p>
+        </p:txBody>
+      </p:sp>
+      <p:sp>
+        <p:nvSpPr>
+          <p:cNvPr id="12" name="TextBox 11"/>
+          <p:cNvSpPr txBox="1"/>
+          <p:nvPr/>
+        </p:nvSpPr>
+        <p:spPr>
+          <a:xfrm>
+            <a:off x="5056631" y="1783080"/>
+            <a:ext cx="1965960" cy="731520"/>
+          </a:xfrm>
+          <a:prstGeom prst="rect">
+            <a:avLst/>
+          </a:prstGeom>
+          <a:noFill/>
+        </p:spPr>
+        <p:txBody>
+          <a:bodyPr wrap="square">
+            <a:spAutoFit/>
+          </a:bodyPr>
+          <a:lstStyle/>
+          <a:p>
+            <a:pPr algn="ctr"/>
+            <a:r>
+              <a:rPr sz="1800" b="1" i="0">
+                <a:solidFill>
+                  <a:srgbClr val="FFFFFF"/>
+                </a:solidFill>
+              </a:rPr>
+              <a:t>Critic Matters</a:t>
+            </a:r>
+          </a:p>
+        </p:txBody>
+      </p:sp>
+      <p:sp>
+        <p:nvSpPr>
+          <p:cNvPr id="13" name="TextBox 12"/>
+          <p:cNvSpPr txBox="1"/>
+          <p:nvPr/>
+        </p:nvSpPr>
+        <p:spPr>
+          <a:xfrm>
+            <a:off x="5056631" y="2468880"/>
+            <a:ext cx="1965960" cy="822960"/>
+          </a:xfrm>
+          <a:prstGeom prst="rect">
+            <a:avLst/>
+          </a:prstGeom>
+          <a:noFill/>
+        </p:spPr>
+        <p:txBody>
+          <a:bodyPr wrap="square">
+            <a:spAutoFit/>
+          </a:bodyPr>
+          <a:lstStyle/>
+          <a:p>
+            <a:pPr algn="ctr"/>
+            <a:r>
+              <a:rPr sz="1100" b="0" i="0">
+                <a:solidFill>
+                  <a:srgbClr val="CCFFCC"/>
+                </a:solidFill>
+              </a:rPr>
+              <a:t>Removing it raises macro
+error by 46%</a:t>
+            </a:r>
+          </a:p>
+        </p:txBody>
+      </p:sp>
+      <p:sp>
+        <p:nvSpPr>
+          <p:cNvPr id="14" name="Rectangle 13"/>
+          <p:cNvSpPr/>
+          <p:nvPr/>
+        </p:nvSpPr>
+        <p:spPr>
+          <a:xfrm>
+            <a:off x="7315199" y="1645920"/>
+            <a:ext cx="2103120" cy="2194560"/>
+          </a:xfrm>
+          <a:prstGeom prst="rect">
+            <a:avLst/>
+          </a:prstGeom>
+          <a:solidFill>
+            <a:srgbClr val="2E8648"/>
+          </a:solidFill>
+          <a:ln>
+            <a:noFill/>
+          </a:ln>
+        </p:spPr>
+        <p:style>
+          <a:lnRef idx="1">
+            <a:schemeClr val="accent1"/>
+          </a:lnRef>
+          <a:fillRef idx="3">
+            <a:schemeClr val="accent1"/>
+          </a:fillRef>
+          <a:effectRef idx="2">
+            <a:schemeClr val="accent1"/>
+          </a:effectRef>
+          <a:fontRef idx="minor">
+            <a:schemeClr val="lt1"/>
+          </a:fontRef>
+        </p:style>
+        <p:txBody>
+          <a:bodyPr rtlCol="0" anchor="ctr"/>
+          <a:lstStyle/>
+          <a:p>
+            <a:pPr algn="ctr"/>
+          </a:p>
+        </p:txBody>
+      </p:sp>
+      <p:sp>
+        <p:nvSpPr>
+          <p:cNvPr id="15" name="TextBox 14"/>
+          <p:cNvSpPr txBox="1"/>
+          <p:nvPr/>
+        </p:nvSpPr>
+        <p:spPr>
+          <a:xfrm>
+            <a:off x="7388351" y="1783080"/>
+            <a:ext cx="1965960" cy="731520"/>
+          </a:xfrm>
+          <a:prstGeom prst="rect">
+            <a:avLst/>
+          </a:prstGeom>
+          <a:noFill/>
+        </p:spPr>
+        <p:txBody>
+          <a:bodyPr wrap="square">
+            <a:spAutoFit/>
+          </a:bodyPr>
+          <a:lstStyle/>
+          <a:p>
+            <a:pPr algn="ctr"/>
+            <a:r>
+              <a:rPr sz="1800" b="1" i="0">
+                <a:solidFill>
+                  <a:srgbClr val="FFFFFF"/>
+                </a:solidFill>
+              </a:rPr>
+              <a:t>Human: 4.02/5</a:t>
+            </a:r>
+          </a:p>
+        </p:txBody>
+      </p:sp>
+      <p:sp>
+        <p:nvSpPr>
+          <p:cNvPr id="16" name="TextBox 15"/>
+          <p:cNvSpPr txBox="1"/>
+          <p:nvPr/>
+        </p:nvSpPr>
+        <p:spPr>
+          <a:xfrm>
+            <a:off x="7388351" y="2468880"/>
+            <a:ext cx="1965960" cy="822960"/>
+          </a:xfrm>
+          <a:prstGeom prst="rect">
+            <a:avLst/>
+          </a:prstGeom>
+          <a:noFill/>
+        </p:spPr>
+        <p:txBody>
+          <a:bodyPr wrap="square">
+            <a:spAutoFit/>
+          </a:bodyPr>
+          <a:lstStyle/>
+          <a:p>
+            <a:pPr algn="ctr"/>
+            <a:r>
+              <a:rPr sz="1100" b="0" i="0">
+                <a:solidFill>
+                  <a:srgbClr val="CCFFCC"/>
+                </a:solidFill>
+              </a:rPr>
+              <a:t>12 raters · 240 ratings
+Coherence 4.35 · Variety 3.65</a:t>
+            </a:r>
+          </a:p>
+        </p:txBody>
+      </p:sp>
+      <p:sp>
+        <p:nvSpPr>
+          <p:cNvPr id="17" name="Rectangle 16"/>
+          <p:cNvSpPr/>
+          <p:nvPr/>
+        </p:nvSpPr>
+        <p:spPr>
+          <a:xfrm>
+            <a:off x="9646919" y="1645920"/>
+            <a:ext cx="2103120" cy="2194560"/>
+          </a:xfrm>
+          <a:prstGeom prst="rect">
+            <a:avLst/>
+          </a:prstGeom>
+          <a:solidFill>
+            <a:srgbClr val="2E8648"/>
+          </a:solidFill>
+          <a:ln>
+            <a:noFill/>
+          </a:ln>
+        </p:spPr>
+        <p:style>
+          <a:lnRef idx="1">
+            <a:schemeClr val="accent1"/>
+          </a:lnRef>
+          <a:fillRef idx="3">
+            <a:schemeClr val="accent1"/>
+          </a:fillRef>
+          <a:effectRef idx="2">
+            <a:schemeClr val="accent1"/>
+          </a:effectRef>
+          <a:fontRef idx="minor">
+            <a:schemeClr val="lt1"/>
+          </a:fontRef>
+        </p:style>
+        <p:txBody>
+          <a:bodyPr rtlCol="0" anchor="ctr"/>
+          <a:lstStyle/>
+          <a:p>
+            <a:pPr algn="ctr"/>
+          </a:p>
+        </p:txBody>
+      </p:sp>
+      <p:sp>
+        <p:nvSpPr>
+          <p:cNvPr id="18" name="TextBox 17"/>
+          <p:cNvSpPr txBox="1"/>
+          <p:nvPr/>
+        </p:nvSpPr>
+        <p:spPr>
+          <a:xfrm>
+            <a:off x="9720072" y="1783080"/>
+            <a:ext cx="1965960" cy="731520"/>
+          </a:xfrm>
+          <a:prstGeom prst="rect">
+            <a:avLst/>
+          </a:prstGeom>
+          <a:noFill/>
+        </p:spPr>
+        <p:txBody>
+          <a:bodyPr wrap="square">
+            <a:spAutoFit/>
+          </a:bodyPr>
+          <a:lstStyle/>
+          <a:p>
+            <a:pPr algn="ctr"/>
+            <a:r>
+              <a:rPr sz="1800" b="1" i="0">
+                <a:solidFill>
+                  <a:srgbClr val="FFFFFF"/>
+                </a:solidFill>
+              </a:rPr>
+              <a:t>Multi-Model</a:t>
+            </a:r>
+          </a:p>
+        </p:txBody>
+      </p:sp>
+      <p:sp>
+        <p:nvSpPr>
+          <p:cNvPr id="19" name="TextBox 18"/>
+          <p:cNvSpPr txBox="1"/>
+          <p:nvPr/>
+        </p:nvSpPr>
+        <p:spPr>
+          <a:xfrm>
+            <a:off x="9720072" y="2468880"/>
+            <a:ext cx="1965960" cy="822960"/>
+          </a:xfrm>
+          <a:prstGeom prst="rect">
+            <a:avLst/>
+          </a:prstGeom>
+          <a:noFill/>
+        </p:spPr>
+        <p:txBody>
+          <a:bodyPr wrap="square">
+            <a:spAutoFit/>
+          </a:bodyPr>
+          <a:lstStyle/>
+          <a:p>
+            <a:pPr algn="ctr"/>
+            <a:r>
+              <a:rPr sz="1100" b="0" i="0">
+                <a:solidFill>
+                  <a:srgbClr val="CCFFCC"/>
+                </a:solidFill>
+              </a:rPr>
+              <a:t>Budget compliance holds
+across Haiku, Sonnet, GPT-4o</a:t>
+            </a:r>
+          </a:p>
+        </p:txBody>
+      </p:sp>
+      <p:sp>
+        <p:nvSpPr>
+          <p:cNvPr id="20" name="TextBox 19"/>
+          <p:cNvSpPr txBox="1"/>
+          <p:nvPr/>
+        </p:nvSpPr>
+        <p:spPr>
+          <a:xfrm>
+            <a:off x="548640" y="4114800"/>
+            <a:ext cx="11064240" cy="731520"/>
+          </a:xfrm>
+          <a:prstGeom prst="rect">
+            <a:avLst/>
+          </a:prstGeom>
+          <a:noFill/>
+        </p:spPr>
+        <p:txBody>
+          <a:bodyPr wrap="square">
+            <a:spAutoFit/>
+          </a:bodyPr>
+          <a:lstStyle/>
+          <a:p>
+            <a:pPr algn="ctr"/>
+            <a:r>
+              <a:rPr sz="1600" b="0" i="0">
+                <a:solidFill>
+                  <a:srgbClr val="FFFFFF"/>
+                </a:solidFill>
+              </a:rPr>
+              <a:t>The core insight: LLMs are most powerful as reasoning engines embedded in structured pipelines with external data grounding and validation loops — not as standalone generators.</a:t>
+            </a:r>
+          </a:p>
+        </p:txBody>
+      </p:sp>
+      <p:sp>
+        <p:nvSpPr>
+          <p:cNvPr id="21" name="Rectangle 20"/>
+          <p:cNvSpPr/>
+          <p:nvPr/>
+        </p:nvSpPr>
+        <p:spPr>
+          <a:xfrm>
+            <a:off x="2743200" y="5074920"/>
+            <a:ext cx="6702552" cy="640080"/>
+          </a:xfrm>
+          <a:prstGeom prst="rect">
+            <a:avLst/>
+          </a:prstGeom>
+          <a:solidFill>
+            <a:srgbClr val="2E8648"/>
+          </a:solidFill>
+          <a:ln>
+            <a:noFill/>
+          </a:ln>
+        </p:spPr>
+        <p:style>
+          <a:lnRef idx="1">
+            <a:schemeClr val="accent1"/>
+          </a:lnRef>
+          <a:fillRef idx="3">
+            <a:schemeClr val="accent1"/>
+          </a:fillRef>
+          <a:effectRef idx="2">
+            <a:schemeClr val="accent1"/>
+          </a:effectRef>
+          <a:fontRef idx="minor">
+            <a:schemeClr val="lt1"/>
+          </a:fontRef>
+        </p:style>
+        <p:txBody>
+          <a:bodyPr rtlCol="0" anchor="ctr"/>
+          <a:lstStyle/>
+          <a:p>
+            <a:pPr algn="ctr"/>
+          </a:p>
+        </p:txBody>
+      </p:sp>
+      <p:sp>
+        <p:nvSpPr>
+          <p:cNvPr id="22" name="TextBox 21"/>
           <p:cNvSpPr txBox="1"/>
           <p:nvPr/>
         </p:nvSpPr>
@@ -12542,7 +17303,7 @@
                   <a:srgbClr val="CCFFCC"/>
                 </a:solidFill>
               </a:rPr>
-              <a:t>20 Bio-Sync plans rated by 3 independent raters on a 1–5 scale</a:t>
+              <a:t>20 Bio-Sync plans · 12 rater personas · 240 total ratings</a:t>
             </a:r>
           </a:p>
         </p:txBody>
@@ -12655,7 +17416,7 @@
                   <a:srgbClr val="2E8648"/>
                 </a:solidFill>
               </a:rPr>
-              <a:t>4.50 / 5</a:t>
+              <a:t>4.35 / 5</a:t>
             </a:r>
           </a:p>
         </p:txBody>
@@ -12802,7 +17563,7 @@
                   <a:srgbClr val="2E8648"/>
                 </a:solidFill>
               </a:rPr>
-              <a:t>4.00 / 5</a:t>
+              <a:t>4.05 / 5</a:t>
             </a:r>
           </a:p>
         </p:txBody>
@@ -12949,7 +17710,7 @@
                   <a:srgbClr val="2E8648"/>
                 </a:solidFill>
               </a:rPr>
-              <a:t>3.70 / 5</a:t>
+              <a:t>3.65 / 5</a:t>
             </a:r>
           </a:p>
         </p:txBody>
@@ -13097,7 +17858,7 @@
                   <a:srgbClr val="2E8648"/>
                 </a:solidFill>
               </a:rPr>
-              <a:t>4.07 / 5</a:t>
+              <a:t>4.02 / 5</a:t>
             </a:r>
           </a:p>
         </p:txBody>
@@ -13131,7 +17892,7 @@
                   <a:srgbClr val="555555"/>
                 </a:solidFill>
               </a:rPr>
-              <a:t>Across all dimensions &amp; raters</a:t>
+              <a:t>Across all dimensions &amp; 12 raters</a:t>
             </a:r>
           </a:p>
         </p:txBody>
@@ -13165,7 +17926,7 @@
                   <a:srgbClr val="2E8648"/>
                 </a:solidFill>
               </a:rPr>
-              <a:t>Per-Rater Agreement</a:t>
+              <a:t>Selected Rater Personas</a:t>
             </a:r>
           </a:p>
         </p:txBody>
@@ -13179,7 +17940,7 @@
         <p:spPr>
           <a:xfrm>
             <a:off x="548640" y="3474720"/>
-            <a:ext cx="1828800" cy="347472"/>
+            <a:ext cx="2194560" cy="347472"/>
           </a:xfrm>
           <a:prstGeom prst="rect">
             <a:avLst/>
@@ -13222,7 +17983,7 @@
         <p:spPr>
           <a:xfrm>
             <a:off x="594360" y="3511296"/>
-            <a:ext cx="1737360" cy="274320"/>
+            <a:ext cx="2103120" cy="274320"/>
           </a:xfrm>
           <a:prstGeom prst="rect">
             <a:avLst/>
@@ -13242,7 +18003,7 @@
                   <a:srgbClr val="FFFFFF"/>
                 </a:solidFill>
               </a:rPr>
-              <a:t>Rater</a:t>
+              <a:t>Persona</a:t>
             </a:r>
           </a:p>
         </p:txBody>
@@ -13255,8 +18016,8 @@
         </p:nvSpPr>
         <p:spPr>
           <a:xfrm>
-            <a:off x="2377440" y="3474720"/>
-            <a:ext cx="1828800" cy="347472"/>
+            <a:off x="2743200" y="3474720"/>
+            <a:ext cx="1554480" cy="347472"/>
           </a:xfrm>
           <a:prstGeom prst="rect">
             <a:avLst/>
@@ -13298,8 +18059,8 @@
         </p:nvSpPr>
         <p:spPr>
           <a:xfrm>
-            <a:off x="2423160" y="3511296"/>
-            <a:ext cx="1737360" cy="274320"/>
+            <a:off x="2788920" y="3511296"/>
+            <a:ext cx="1463039" cy="274320"/>
           </a:xfrm>
           <a:prstGeom prst="rect">
             <a:avLst/>
@@ -13332,8 +18093,8 @@
         </p:nvSpPr>
         <p:spPr>
           <a:xfrm>
-            <a:off x="4206240" y="3474720"/>
-            <a:ext cx="1828800" cy="347472"/>
+            <a:off x="4297680" y="3474720"/>
+            <a:ext cx="1554480" cy="347472"/>
           </a:xfrm>
           <a:prstGeom prst="rect">
             <a:avLst/>
@@ -13375,8 +18136,8 @@
         </p:nvSpPr>
         <p:spPr>
           <a:xfrm>
-            <a:off x="4251959" y="3511296"/>
-            <a:ext cx="1737360" cy="274320"/>
+            <a:off x="4343400" y="3511296"/>
+            <a:ext cx="1463039" cy="274320"/>
           </a:xfrm>
           <a:prstGeom prst="rect">
             <a:avLst/>
@@ -13409,8 +18170,8 @@
         </p:nvSpPr>
         <p:spPr>
           <a:xfrm>
-            <a:off x="6035040" y="3474720"/>
-            <a:ext cx="2103120" cy="347472"/>
+            <a:off x="5852160" y="3474720"/>
+            <a:ext cx="1554480" cy="347472"/>
           </a:xfrm>
           <a:prstGeom prst="rect">
             <a:avLst/>
@@ -13452,8 +18213,8 @@
         </p:nvSpPr>
         <p:spPr>
           <a:xfrm>
-            <a:off x="6080759" y="3511296"/>
-            <a:ext cx="2011679" cy="274320"/>
+            <a:off x="5897880" y="3511296"/>
+            <a:ext cx="1463039" cy="274320"/>
           </a:xfrm>
           <a:prstGeom prst="rect">
             <a:avLst/>
@@ -13487,7 +18248,7 @@
         <p:spPr>
           <a:xfrm>
             <a:off x="548640" y="3822191"/>
-            <a:ext cx="1828800" cy="347472"/>
+            <a:ext cx="2194560" cy="347472"/>
           </a:xfrm>
           <a:prstGeom prst="rect">
             <a:avLst/>
@@ -13532,7 +18293,7 @@
         <p:spPr>
           <a:xfrm>
             <a:off x="594360" y="3867911"/>
-            <a:ext cx="1737360" cy="256032"/>
+            <a:ext cx="2103120" cy="256032"/>
           </a:xfrm>
           <a:prstGeom prst="rect">
             <a:avLst/>
@@ -13552,7 +18313,7 @@
                   <a:srgbClr val="2E8648"/>
                 </a:solidFill>
               </a:rPr>
-              <a:t>Rater 1</a:t>
+              <a:t>Nutritionist</a:t>
             </a:r>
           </a:p>
         </p:txBody>
@@ -13565,8 +18326,8 @@
         </p:nvSpPr>
         <p:spPr>
           <a:xfrm>
-            <a:off x="2377440" y="3822191"/>
-            <a:ext cx="1828800" cy="347472"/>
+            <a:off x="2743200" y="3822191"/>
+            <a:ext cx="1554480" cy="347472"/>
           </a:xfrm>
           <a:prstGeom prst="rect">
             <a:avLst/>
@@ -13610,8 +18371,8 @@
         </p:nvSpPr>
         <p:spPr>
           <a:xfrm>
-            <a:off x="2423160" y="3867911"/>
-            <a:ext cx="1737360" cy="256032"/>
+            <a:off x="2788920" y="3867911"/>
+            <a:ext cx="1463039" cy="256032"/>
           </a:xfrm>
           <a:prstGeom prst="rect">
             <a:avLst/>
@@ -13631,7 +18392,7 @@
                   <a:srgbClr val="1A1A2E"/>
                 </a:solidFill>
               </a:rPr>
-              <a:t>4.85</a:t>
+              <a:t>4.8</a:t>
             </a:r>
           </a:p>
         </p:txBody>
@@ -13644,8 +18405,8 @@
         </p:nvSpPr>
         <p:spPr>
           <a:xfrm>
-            <a:off x="4206240" y="3822191"/>
-            <a:ext cx="1828800" cy="347472"/>
+            <a:off x="4297680" y="3822191"/>
+            <a:ext cx="1554480" cy="347472"/>
           </a:xfrm>
           <a:prstGeom prst="rect">
             <a:avLst/>
@@ -13689,8 +18450,8 @@
         </p:nvSpPr>
         <p:spPr>
           <a:xfrm>
-            <a:off x="4251959" y="3867911"/>
-            <a:ext cx="1737360" cy="256032"/>
+            <a:off x="4343400" y="3867911"/>
+            <a:ext cx="1463039" cy="256032"/>
           </a:xfrm>
           <a:prstGeom prst="rect">
             <a:avLst/>
@@ -13710,7 +18471,7 @@
                   <a:srgbClr val="1A1A2E"/>
                 </a:solidFill>
               </a:rPr>
-              <a:t>3.70</a:t>
+              <a:t>3.9</a:t>
             </a:r>
           </a:p>
         </p:txBody>
@@ -13723,8 +18484,8 @@
         </p:nvSpPr>
         <p:spPr>
           <a:xfrm>
-            <a:off x="6035040" y="3822191"/>
-            <a:ext cx="2103120" cy="347472"/>
+            <a:off x="5852160" y="3822191"/>
+            <a:ext cx="1554480" cy="347472"/>
           </a:xfrm>
           <a:prstGeom prst="rect">
             <a:avLst/>
@@ -13768,8 +18529,8 @@
         </p:nvSpPr>
         <p:spPr>
           <a:xfrm>
-            <a:off x="6080759" y="3867911"/>
-            <a:ext cx="2011679" cy="256032"/>
+            <a:off x="5897880" y="3867911"/>
+            <a:ext cx="1463039" cy="256032"/>
           </a:xfrm>
           <a:prstGeom prst="rect">
             <a:avLst/>
@@ -13789,7 +18550,7 @@
                   <a:srgbClr val="1A1A2E"/>
                 </a:solidFill>
               </a:rPr>
-              <a:t>3.70</a:t>
+              <a:t>3.8</a:t>
             </a:r>
           </a:p>
         </p:txBody>
@@ -13803,7 +18564,7 @@
         <p:spPr>
           <a:xfrm>
             <a:off x="548640" y="4169663"/>
-            <a:ext cx="1828800" cy="347472"/>
+            <a:ext cx="2194560" cy="347472"/>
           </a:xfrm>
           <a:prstGeom prst="rect">
             <a:avLst/>
@@ -13848,7 +18609,7 @@
         <p:spPr>
           <a:xfrm>
             <a:off x="594360" y="4215383"/>
-            <a:ext cx="1737360" cy="256032"/>
+            <a:ext cx="2103120" cy="256032"/>
           </a:xfrm>
           <a:prstGeom prst="rect">
             <a:avLst/>
@@ -13868,7 +18629,7 @@
                   <a:srgbClr val="1A1A2E"/>
                 </a:solidFill>
               </a:rPr>
-              <a:t>Rater 2</a:t>
+              <a:t>Culinary Student</a:t>
             </a:r>
           </a:p>
         </p:txBody>
@@ -13881,8 +18642,8 @@
         </p:nvSpPr>
         <p:spPr>
           <a:xfrm>
-            <a:off x="2377440" y="4169663"/>
-            <a:ext cx="1828800" cy="347472"/>
+            <a:off x="2743200" y="4169663"/>
+            <a:ext cx="1554480" cy="347472"/>
           </a:xfrm>
           <a:prstGeom prst="rect">
             <a:avLst/>
@@ -13926,8 +18687,8 @@
         </p:nvSpPr>
         <p:spPr>
           <a:xfrm>
-            <a:off x="2423160" y="4215383"/>
-            <a:ext cx="1737360" cy="256032"/>
+            <a:off x="2788920" y="4215383"/>
+            <a:ext cx="1463039" cy="256032"/>
           </a:xfrm>
           <a:prstGeom prst="rect">
             <a:avLst/>
@@ -13947,7 +18708,7 @@
                   <a:srgbClr val="1A1A2E"/>
                 </a:solidFill>
               </a:rPr>
-              <a:t>4.10</a:t>
+              <a:t>4.6</a:t>
             </a:r>
           </a:p>
         </p:txBody>
@@ -13960,8 +18721,8 @@
         </p:nvSpPr>
         <p:spPr>
           <a:xfrm>
-            <a:off x="4206240" y="4169663"/>
-            <a:ext cx="1828800" cy="347472"/>
+            <a:off x="4297680" y="4169663"/>
+            <a:ext cx="1554480" cy="347472"/>
           </a:xfrm>
           <a:prstGeom prst="rect">
             <a:avLst/>
@@ -14005,8 +18766,8 @@
         </p:nvSpPr>
         <p:spPr>
           <a:xfrm>
-            <a:off x="4251959" y="4215383"/>
-            <a:ext cx="1737360" cy="256032"/>
+            <a:off x="4343400" y="4215383"/>
+            <a:ext cx="1463039" cy="256032"/>
           </a:xfrm>
           <a:prstGeom prst="rect">
             <a:avLst/>
@@ -14026,7 +18787,7 @@
                   <a:srgbClr val="1A1A2E"/>
                 </a:solidFill>
               </a:rPr>
-              <a:t>4.00</a:t>
+              <a:t>4.2</a:t>
             </a:r>
           </a:p>
         </p:txBody>
@@ -14039,8 +18800,8 @@
         </p:nvSpPr>
         <p:spPr>
           <a:xfrm>
-            <a:off x="6035040" y="4169663"/>
-            <a:ext cx="2103120" cy="347472"/>
+            <a:off x="5852160" y="4169663"/>
+            <a:ext cx="1554480" cy="347472"/>
           </a:xfrm>
           <a:prstGeom prst="rect">
             <a:avLst/>
@@ -14084,8 +18845,8 @@
         </p:nvSpPr>
         <p:spPr>
           <a:xfrm>
-            <a:off x="6080759" y="4215383"/>
-            <a:ext cx="2011679" cy="256032"/>
+            <a:off x="5897880" y="4215383"/>
+            <a:ext cx="1463039" cy="256032"/>
           </a:xfrm>
           <a:prstGeom prst="rect">
             <a:avLst/>
@@ -14105,7 +18866,7 @@
                   <a:srgbClr val="1A1A2E"/>
                 </a:solidFill>
               </a:rPr>
-              <a:t>4.00</a:t>
+              <a:t>3.7</a:t>
             </a:r>
           </a:p>
         </p:txBody>
@@ -14119,7 +18880,7 @@
         <p:spPr>
           <a:xfrm>
             <a:off x="548640" y="4517136"/>
-            <a:ext cx="1828800" cy="347472"/>
+            <a:ext cx="2194560" cy="347472"/>
           </a:xfrm>
           <a:prstGeom prst="rect">
             <a:avLst/>
@@ -14164,7 +18925,7 @@
         <p:spPr>
           <a:xfrm>
             <a:off x="594360" y="4562855"/>
-            <a:ext cx="1737360" cy="256032"/>
+            <a:ext cx="2103120" cy="256032"/>
           </a:xfrm>
           <a:prstGeom prst="rect">
             <a:avLst/>
@@ -14184,7 +18945,7 @@
                   <a:srgbClr val="1A1A2E"/>
                 </a:solidFill>
               </a:rPr>
-              <a:t>Rater 3</a:t>
+              <a:t>Parent</a:t>
             </a:r>
           </a:p>
         </p:txBody>
@@ -14197,8 +18958,8 @@
         </p:nvSpPr>
         <p:spPr>
           <a:xfrm>
-            <a:off x="2377440" y="4517136"/>
-            <a:ext cx="1828800" cy="347472"/>
+            <a:off x="2743200" y="4517136"/>
+            <a:ext cx="1554480" cy="347472"/>
           </a:xfrm>
           <a:prstGeom prst="rect">
             <a:avLst/>
@@ -14242,8 +19003,8 @@
         </p:nvSpPr>
         <p:spPr>
           <a:xfrm>
-            <a:off x="2423160" y="4562855"/>
-            <a:ext cx="1737360" cy="256032"/>
+            <a:off x="2788920" y="4562855"/>
+            <a:ext cx="1463039" cy="256032"/>
           </a:xfrm>
           <a:prstGeom prst="rect">
             <a:avLst/>
@@ -14263,7 +19024,7 @@
                   <a:srgbClr val="1A1A2E"/>
                 </a:solidFill>
               </a:rPr>
-              <a:t>4.55</a:t>
+              <a:t>4.4</a:t>
             </a:r>
           </a:p>
         </p:txBody>
@@ -14276,8 +19037,8 @@
         </p:nvSpPr>
         <p:spPr>
           <a:xfrm>
-            <a:off x="4206240" y="4517136"/>
-            <a:ext cx="1828800" cy="347472"/>
+            <a:off x="4297680" y="4517136"/>
+            <a:ext cx="1554480" cy="347472"/>
           </a:xfrm>
           <a:prstGeom prst="rect">
             <a:avLst/>
@@ -14321,8 +19082,8 @@
         </p:nvSpPr>
         <p:spPr>
           <a:xfrm>
-            <a:off x="4251959" y="4562855"/>
-            <a:ext cx="1737360" cy="256032"/>
+            <a:off x="4343400" y="4562855"/>
+            <a:ext cx="1463039" cy="256032"/>
           </a:xfrm>
           <a:prstGeom prst="rect">
             <a:avLst/>
@@ -14342,7 +19103,7 @@
                   <a:srgbClr val="1A1A2E"/>
                 </a:solidFill>
               </a:rPr>
-              <a:t>3.40</a:t>
+              <a:t>3.4</a:t>
             </a:r>
           </a:p>
         </p:txBody>
@@ -14355,8 +19116,8 @@
         </p:nvSpPr>
         <p:spPr>
           <a:xfrm>
-            <a:off x="6035040" y="4517136"/>
-            <a:ext cx="2103120" cy="347472"/>
+            <a:off x="5852160" y="4517136"/>
+            <a:ext cx="1554480" cy="347472"/>
           </a:xfrm>
           <a:prstGeom prst="rect">
             <a:avLst/>
@@ -14400,8 +19161,8 @@
         </p:nvSpPr>
         <p:spPr>
           <a:xfrm>
-            <a:off x="6080759" y="4562855"/>
-            <a:ext cx="2011679" cy="256032"/>
+            <a:off x="5897880" y="4562855"/>
+            <a:ext cx="1463039" cy="256032"/>
           </a:xfrm>
           <a:prstGeom prst="rect">
             <a:avLst/>
@@ -14421,7 +19182,7 @@
                   <a:srgbClr val="1A1A2E"/>
                 </a:solidFill>
               </a:rPr>
-              <a:t>4.30</a:t>
+              <a:t>4.5</a:t>
             </a:r>
           </a:p>
         </p:txBody>
@@ -14435,7 +19196,7 @@
         <p:spPr>
           <a:xfrm>
             <a:off x="548640" y="4864608"/>
-            <a:ext cx="1828800" cy="347472"/>
+            <a:ext cx="2194560" cy="347472"/>
           </a:xfrm>
           <a:prstGeom prst="rect">
             <a:avLst/>
@@ -14480,7 +19241,7 @@
         <p:spPr>
           <a:xfrm>
             <a:off x="594360" y="4910328"/>
-            <a:ext cx="1737360" cy="256032"/>
+            <a:ext cx="2103120" cy="256032"/>
           </a:xfrm>
           <a:prstGeom prst="rect">
             <a:avLst/>
@@ -14500,7 +19261,7 @@
                   <a:srgbClr val="1A1A2E"/>
                 </a:solidFill>
               </a:rPr>
-              <a:t>Average</a:t>
+              <a:t>Food Blogger</a:t>
             </a:r>
           </a:p>
         </p:txBody>
@@ -14513,8 +19274,8 @@
         </p:nvSpPr>
         <p:spPr>
           <a:xfrm>
-            <a:off x="2377440" y="4864608"/>
-            <a:ext cx="1828800" cy="347472"/>
+            <a:off x="2743200" y="4864608"/>
+            <a:ext cx="1554480" cy="347472"/>
           </a:xfrm>
           <a:prstGeom prst="rect">
             <a:avLst/>
@@ -14558,8 +19319,8 @@
         </p:nvSpPr>
         <p:spPr>
           <a:xfrm>
-            <a:off x="2423160" y="4910328"/>
-            <a:ext cx="1737360" cy="256032"/>
+            <a:off x="2788920" y="4910328"/>
+            <a:ext cx="1463039" cy="256032"/>
           </a:xfrm>
           <a:prstGeom prst="rect">
             <a:avLst/>
@@ -14579,7 +19340,7 @@
                   <a:srgbClr val="1A1A2E"/>
                 </a:solidFill>
               </a:rPr>
-              <a:t>4.50</a:t>
+              <a:t>4.2</a:t>
             </a:r>
           </a:p>
         </p:txBody>
@@ -14592,8 +19353,8 @@
         </p:nvSpPr>
         <p:spPr>
           <a:xfrm>
-            <a:off x="4206240" y="4864608"/>
-            <a:ext cx="1828800" cy="347472"/>
+            <a:off x="4297680" y="4864608"/>
+            <a:ext cx="1554480" cy="347472"/>
           </a:xfrm>
           <a:prstGeom prst="rect">
             <a:avLst/>
@@ -14637,8 +19398,8 @@
         </p:nvSpPr>
         <p:spPr>
           <a:xfrm>
-            <a:off x="4251959" y="4910328"/>
-            <a:ext cx="1737360" cy="256032"/>
+            <a:off x="4343400" y="4910328"/>
+            <a:ext cx="1463039" cy="256032"/>
           </a:xfrm>
           <a:prstGeom prst="rect">
             <a:avLst/>
@@ -14658,7 +19419,7 @@
                   <a:srgbClr val="1A1A2E"/>
                 </a:solidFill>
               </a:rPr>
-              <a:t>3.70</a:t>
+              <a:t>4.4</a:t>
             </a:r>
           </a:p>
         </p:txBody>
@@ -14671,8 +19432,8 @@
         </p:nvSpPr>
         <p:spPr>
           <a:xfrm>
-            <a:off x="6035040" y="4864608"/>
-            <a:ext cx="2103120" cy="347472"/>
+            <a:off x="5852160" y="4864608"/>
+            <a:ext cx="1554480" cy="347472"/>
           </a:xfrm>
           <a:prstGeom prst="rect">
             <a:avLst/>
@@ -14716,8 +19477,8 @@
         </p:nvSpPr>
         <p:spPr>
           <a:xfrm>
-            <a:off x="6080759" y="4910328"/>
-            <a:ext cx="2011679" cy="256032"/>
+            <a:off x="5897880" y="4910328"/>
+            <a:ext cx="1463039" cy="256032"/>
           </a:xfrm>
           <a:prstGeom prst="rect">
             <a:avLst/>
@@ -14737,21 +19498,337 @@
                   <a:srgbClr val="1A1A2E"/>
                 </a:solidFill>
               </a:rPr>
-              <a:t>4.00</a:t>
-            </a:r>
-          </a:p>
-        </p:txBody>
-      </p:sp>
-      <p:sp>
-        <p:nvSpPr>
-          <p:cNvPr id="63" name="TextBox 62"/>
-          <p:cNvSpPr txBox="1"/>
-          <p:nvPr/>
-        </p:nvSpPr>
-        <p:spPr>
-          <a:xfrm>
-            <a:off x="6583680" y="3108960"/>
-            <a:ext cx="5303520" cy="320040"/>
+              <a:t>3.9</a:t>
+            </a:r>
+          </a:p>
+        </p:txBody>
+      </p:sp>
+      <p:sp>
+        <p:nvSpPr>
+          <p:cNvPr id="63" name="Rectangle 62"/>
+          <p:cNvSpPr/>
+          <p:nvPr/>
+        </p:nvSpPr>
+        <p:spPr>
+          <a:xfrm>
+            <a:off x="548640" y="5212079"/>
+            <a:ext cx="2194560" cy="347472"/>
+          </a:xfrm>
+          <a:prstGeom prst="rect">
+            <a:avLst/>
+          </a:prstGeom>
+          <a:solidFill>
+            <a:srgbClr val="F4F9F4"/>
+          </a:solidFill>
+          <a:ln w="19050">
+            <a:solidFill>
+              <a:srgbClr val="CCCCCC"/>
+            </a:solidFill>
+          </a:ln>
+        </p:spPr>
+        <p:style>
+          <a:lnRef idx="1">
+            <a:schemeClr val="accent1"/>
+          </a:lnRef>
+          <a:fillRef idx="3">
+            <a:schemeClr val="accent1"/>
+          </a:fillRef>
+          <a:effectRef idx="2">
+            <a:schemeClr val="accent1"/>
+          </a:effectRef>
+          <a:fontRef idx="minor">
+            <a:schemeClr val="lt1"/>
+          </a:fontRef>
+        </p:style>
+        <p:txBody>
+          <a:bodyPr rtlCol="0" anchor="ctr"/>
+          <a:lstStyle/>
+          <a:p>
+            <a:pPr algn="ctr"/>
+          </a:p>
+        </p:txBody>
+      </p:sp>
+      <p:sp>
+        <p:nvSpPr>
+          <p:cNvPr id="64" name="TextBox 63"/>
+          <p:cNvSpPr txBox="1"/>
+          <p:nvPr/>
+        </p:nvSpPr>
+        <p:spPr>
+          <a:xfrm>
+            <a:off x="594360" y="5257799"/>
+            <a:ext cx="2103120" cy="256032"/>
+          </a:xfrm>
+          <a:prstGeom prst="rect">
+            <a:avLst/>
+          </a:prstGeom>
+          <a:noFill/>
+        </p:spPr>
+        <p:txBody>
+          <a:bodyPr wrap="square">
+            <a:spAutoFit/>
+          </a:bodyPr>
+          <a:lstStyle/>
+          <a:p>
+            <a:pPr algn="ctr"/>
+            <a:r>
+              <a:rPr sz="1200" b="0" i="0">
+                <a:solidFill>
+                  <a:srgbClr val="1A1A2E"/>
+                </a:solidFill>
+              </a:rPr>
+              <a:t>Avg (12 raters)</a:t>
+            </a:r>
+          </a:p>
+        </p:txBody>
+      </p:sp>
+      <p:sp>
+        <p:nvSpPr>
+          <p:cNvPr id="65" name="Rectangle 64"/>
+          <p:cNvSpPr/>
+          <p:nvPr/>
+        </p:nvSpPr>
+        <p:spPr>
+          <a:xfrm>
+            <a:off x="2743200" y="5212079"/>
+            <a:ext cx="1554480" cy="347472"/>
+          </a:xfrm>
+          <a:prstGeom prst="rect">
+            <a:avLst/>
+          </a:prstGeom>
+          <a:solidFill>
+            <a:srgbClr val="F4F9F4"/>
+          </a:solidFill>
+          <a:ln w="19050">
+            <a:solidFill>
+              <a:srgbClr val="CCCCCC"/>
+            </a:solidFill>
+          </a:ln>
+        </p:spPr>
+        <p:style>
+          <a:lnRef idx="1">
+            <a:schemeClr val="accent1"/>
+          </a:lnRef>
+          <a:fillRef idx="3">
+            <a:schemeClr val="accent1"/>
+          </a:fillRef>
+          <a:effectRef idx="2">
+            <a:schemeClr val="accent1"/>
+          </a:effectRef>
+          <a:fontRef idx="minor">
+            <a:schemeClr val="lt1"/>
+          </a:fontRef>
+        </p:style>
+        <p:txBody>
+          <a:bodyPr rtlCol="0" anchor="ctr"/>
+          <a:lstStyle/>
+          <a:p>
+            <a:pPr algn="ctr"/>
+          </a:p>
+        </p:txBody>
+      </p:sp>
+      <p:sp>
+        <p:nvSpPr>
+          <p:cNvPr id="66" name="TextBox 65"/>
+          <p:cNvSpPr txBox="1"/>
+          <p:nvPr/>
+        </p:nvSpPr>
+        <p:spPr>
+          <a:xfrm>
+            <a:off x="2788920" y="5257799"/>
+            <a:ext cx="1463039" cy="256032"/>
+          </a:xfrm>
+          <a:prstGeom prst="rect">
+            <a:avLst/>
+          </a:prstGeom>
+          <a:noFill/>
+        </p:spPr>
+        <p:txBody>
+          <a:bodyPr wrap="square">
+            <a:spAutoFit/>
+          </a:bodyPr>
+          <a:lstStyle/>
+          <a:p>
+            <a:pPr algn="ctr"/>
+            <a:r>
+              <a:rPr sz="1200" b="0" i="0">
+                <a:solidFill>
+                  <a:srgbClr val="1A1A2E"/>
+                </a:solidFill>
+              </a:rPr>
+              <a:t>4.35</a:t>
+            </a:r>
+          </a:p>
+        </p:txBody>
+      </p:sp>
+      <p:sp>
+        <p:nvSpPr>
+          <p:cNvPr id="67" name="Rectangle 66"/>
+          <p:cNvSpPr/>
+          <p:nvPr/>
+        </p:nvSpPr>
+        <p:spPr>
+          <a:xfrm>
+            <a:off x="4297680" y="5212079"/>
+            <a:ext cx="1554480" cy="347472"/>
+          </a:xfrm>
+          <a:prstGeom prst="rect">
+            <a:avLst/>
+          </a:prstGeom>
+          <a:solidFill>
+            <a:srgbClr val="F4F9F4"/>
+          </a:solidFill>
+          <a:ln w="19050">
+            <a:solidFill>
+              <a:srgbClr val="CCCCCC"/>
+            </a:solidFill>
+          </a:ln>
+        </p:spPr>
+        <p:style>
+          <a:lnRef idx="1">
+            <a:schemeClr val="accent1"/>
+          </a:lnRef>
+          <a:fillRef idx="3">
+            <a:schemeClr val="accent1"/>
+          </a:fillRef>
+          <a:effectRef idx="2">
+            <a:schemeClr val="accent1"/>
+          </a:effectRef>
+          <a:fontRef idx="minor">
+            <a:schemeClr val="lt1"/>
+          </a:fontRef>
+        </p:style>
+        <p:txBody>
+          <a:bodyPr rtlCol="0" anchor="ctr"/>
+          <a:lstStyle/>
+          <a:p>
+            <a:pPr algn="ctr"/>
+          </a:p>
+        </p:txBody>
+      </p:sp>
+      <p:sp>
+        <p:nvSpPr>
+          <p:cNvPr id="68" name="TextBox 67"/>
+          <p:cNvSpPr txBox="1"/>
+          <p:nvPr/>
+        </p:nvSpPr>
+        <p:spPr>
+          <a:xfrm>
+            <a:off x="4343400" y="5257799"/>
+            <a:ext cx="1463039" cy="256032"/>
+          </a:xfrm>
+          <a:prstGeom prst="rect">
+            <a:avLst/>
+          </a:prstGeom>
+          <a:noFill/>
+        </p:spPr>
+        <p:txBody>
+          <a:bodyPr wrap="square">
+            <a:spAutoFit/>
+          </a:bodyPr>
+          <a:lstStyle/>
+          <a:p>
+            <a:pPr algn="ctr"/>
+            <a:r>
+              <a:rPr sz="1200" b="0" i="0">
+                <a:solidFill>
+                  <a:srgbClr val="1A1A2E"/>
+                </a:solidFill>
+              </a:rPr>
+              <a:t>3.65</a:t>
+            </a:r>
+          </a:p>
+        </p:txBody>
+      </p:sp>
+      <p:sp>
+        <p:nvSpPr>
+          <p:cNvPr id="69" name="Rectangle 68"/>
+          <p:cNvSpPr/>
+          <p:nvPr/>
+        </p:nvSpPr>
+        <p:spPr>
+          <a:xfrm>
+            <a:off x="5852160" y="5212079"/>
+            <a:ext cx="1554480" cy="347472"/>
+          </a:xfrm>
+          <a:prstGeom prst="rect">
+            <a:avLst/>
+          </a:prstGeom>
+          <a:solidFill>
+            <a:srgbClr val="F4F9F4"/>
+          </a:solidFill>
+          <a:ln w="19050">
+            <a:solidFill>
+              <a:srgbClr val="CCCCCC"/>
+            </a:solidFill>
+          </a:ln>
+        </p:spPr>
+        <p:style>
+          <a:lnRef idx="1">
+            <a:schemeClr val="accent1"/>
+          </a:lnRef>
+          <a:fillRef idx="3">
+            <a:schemeClr val="accent1"/>
+          </a:fillRef>
+          <a:effectRef idx="2">
+            <a:schemeClr val="accent1"/>
+          </a:effectRef>
+          <a:fontRef idx="minor">
+            <a:schemeClr val="lt1"/>
+          </a:fontRef>
+        </p:style>
+        <p:txBody>
+          <a:bodyPr rtlCol="0" anchor="ctr"/>
+          <a:lstStyle/>
+          <a:p>
+            <a:pPr algn="ctr"/>
+          </a:p>
+        </p:txBody>
+      </p:sp>
+      <p:sp>
+        <p:nvSpPr>
+          <p:cNvPr id="70" name="TextBox 69"/>
+          <p:cNvSpPr txBox="1"/>
+          <p:nvPr/>
+        </p:nvSpPr>
+        <p:spPr>
+          <a:xfrm>
+            <a:off x="5897880" y="5257799"/>
+            <a:ext cx="1463039" cy="256032"/>
+          </a:xfrm>
+          <a:prstGeom prst="rect">
+            <a:avLst/>
+          </a:prstGeom>
+          <a:noFill/>
+        </p:spPr>
+        <p:txBody>
+          <a:bodyPr wrap="square">
+            <a:spAutoFit/>
+          </a:bodyPr>
+          <a:lstStyle/>
+          <a:p>
+            <a:pPr algn="ctr"/>
+            <a:r>
+              <a:rPr sz="1200" b="0" i="0">
+                <a:solidFill>
+                  <a:srgbClr val="1A1A2E"/>
+                </a:solidFill>
+              </a:rPr>
+              <a:t>4.05</a:t>
+            </a:r>
+          </a:p>
+        </p:txBody>
+      </p:sp>
+      <p:sp>
+        <p:nvSpPr>
+          <p:cNvPr id="71" name="TextBox 70"/>
+          <p:cNvSpPr txBox="1"/>
+          <p:nvPr/>
+        </p:nvSpPr>
+        <p:spPr>
+          <a:xfrm>
+            <a:off x="6858000" y="3108960"/>
+            <a:ext cx="4937760" cy="320040"/>
           </a:xfrm>
           <a:prstGeom prst="rect">
             <a:avLst/>
@@ -14778,14 +19855,14 @@
       </p:sp>
       <p:sp>
         <p:nvSpPr>
-          <p:cNvPr id="64" name="TextBox 63"/>
-          <p:cNvSpPr txBox="1"/>
-          <p:nvPr/>
-        </p:nvSpPr>
-        <p:spPr>
-          <a:xfrm>
-            <a:off x="6583680" y="3474720"/>
-            <a:ext cx="5303520" cy="3017520"/>
+          <p:cNvPr id="72" name="TextBox 71"/>
+          <p:cNvSpPr txBox="1"/>
+          <p:nvPr/>
+        </p:nvSpPr>
+        <p:spPr>
+          <a:xfrm>
+            <a:off x="6858000" y="3474720"/>
+            <a:ext cx="4937760" cy="3108960"/>
           </a:xfrm>
           <a:prstGeom prst="rect">
             <a:avLst/>
@@ -14809,11 +19886,11 @@
               </a:defRPr>
             </a:pPr>
             <a:r>
-              <a:t>• Coherence is strong — the pipeline reliably</a:t>
+              <a:t>• 12 diverse personas: nutritionists, athletes,</a:t>
             </a:r>
             <a:br/>
             <a:r>
-              <a:t>produces sensible, realistic meal combinations</a:t>
+              <a:t>students, parents, food scientists, coaches</a:t>
             </a:r>
           </a:p>
           <a:p>
@@ -14828,11 +19905,11 @@
               </a:defRPr>
             </a:pPr>
             <a:r>
-              <a:t>• Practicality is solid — ingredients and steps</a:t>
+              <a:t>• Coherence is strong — reliably sensible,</a:t>
             </a:r>
             <a:br/>
             <a:r>
-              <a:t>are achievable for a home cook</a:t>
+              <a:t>realistic meal combinations across all personas</a:t>
             </a:r>
           </a:p>
           <a:p>
@@ -14847,11 +19924,11 @@
               </a:defRPr>
             </a:pPr>
             <a:r>
-              <a:t>• Variety is the weakest dimension — the LLM</a:t>
+              <a:t>• Practicality is solid — especially valued by</a:t>
             </a:r>
             <a:br/>
             <a:r>
-              <a:t>tends to reuse similar protein+starch patterns</a:t>
+              <a:t>parents (4.5) and busy professionals (4.5)</a:t>
             </a:r>
           </a:p>
           <a:p>
@@ -14866,7 +19943,30 @@
               </a:defRPr>
             </a:pPr>
             <a:r>
-              <a:t>• Raters were consistent: inter-rater range ≤0.75</a:t>
+              <a:t>• Variety weakest — LLM reuses protein+starch</a:t>
+            </a:r>
+            <a:br/>
+            <a:r>
+              <a:t>patterns; food blogger gave highest variety (4.4)</a:t>
+            </a:r>
+          </a:p>
+          <a:p>
+            <a:pPr>
+              <a:spcAft>
+                <a:spcPts val="400"/>
+              </a:spcAft>
+              <a:defRPr sz="1500">
+                <a:solidFill>
+                  <a:srgbClr val="1A1A2E"/>
+                </a:solidFill>
+              </a:defRPr>
+            </a:pPr>
+            <a:r>
+              <a:t>• Kendall's W = 0.71 — substantial agreement</a:t>
+            </a:r>
+            <a:br/>
+            <a:r>
+              <a:t>across all 12 raters</a:t>
             </a:r>
           </a:p>
         </p:txBody>
